--- a/F4/presentacion_f4_grupo9.pptx
+++ b/F4/presentacion_f4_grupo9.pptx
@@ -11,10 +11,15 @@
     <p:sldId xmlns:r="http://schemas.openxmlformats.org/officeDocument/2006/relationships" id="256" r:id="Rc2ffebf808ff4ac5"/>
     <p:sldId xmlns:r="http://schemas.openxmlformats.org/officeDocument/2006/relationships" id="257" r:id="R7f2d411074894e7f"/>
     <p:sldId xmlns:r="http://schemas.openxmlformats.org/officeDocument/2006/relationships" id="258" r:id="R6eaea5ac48f94374"/>
+    <p:sldId xmlns:ns0="http://schemas.openxmlformats.org/officeDocument/2006/relationships" id="264" ns0:id="rId14"/>
+    <p:sldId xmlns:ns0="http://schemas.openxmlformats.org/officeDocument/2006/relationships" id="265" ns0:id="rId15"/>
+    <p:sldId xmlns:ns0="http://schemas.openxmlformats.org/officeDocument/2006/relationships" id="266" ns0:id="rId16"/>
+    <p:sldId xmlns:ns0="http://schemas.openxmlformats.org/officeDocument/2006/relationships" id="267" ns0:id="rId17"/>
+    <p:sldId xmlns:ns0="http://schemas.openxmlformats.org/officeDocument/2006/relationships" id="268" ns0:id="rId18"/>
     <p:sldId xmlns:r="http://schemas.openxmlformats.org/officeDocument/2006/relationships" id="259" r:id="R55aa6675601c4d8d"/>
     <p:sldId xmlns:r="http://schemas.openxmlformats.org/officeDocument/2006/relationships" id="260" r:id="Ra4db219e04324ab1"/>
     <p:sldId xmlns:r="http://schemas.openxmlformats.org/officeDocument/2006/relationships" id="261" r:id="Rfe928034f8c44ea5"/>
-    <p:sldId xmlns:r="http://schemas.openxmlformats.org/officeDocument/2006/relationships" id="262" r:id="R2450eb9adc1b48b8"/>
+    <p:sldId xmlns:ns0="http://schemas.openxmlformats.org/officeDocument/2006/relationships" id="269" ns0:id="rId19"/>
     <p:sldId xmlns:r="http://schemas.openxmlformats.org/officeDocument/2006/relationships" id="263" r:id="R046840983d694bfe"/>
   </p:sldIdLst>
   <p:sldSz cx="12192000" cy="6858000"/>
@@ -449,22 +454,7 @@
           <a:lstStyle xmlns:a="http://schemas.openxmlformats.org/drawingml/2006/main"/>
           <a:p xmlns:a="http://schemas.openxmlformats.org/drawingml/2006/main">
             <a:r>
-              <a:t>Buenos días. En esta presentación se resume el proyecto desarrollado durante las cuatro fases del curso. El trabajo estudia cómo cambian las fallas de maquinaria según las condiciones operacionales registradas en el conjunto AI4I 2020. El análisis final se mantiene en un nivel descriptivo. Por eso, los resultados permiten reconocer asociaciones y perfiles de mayor riesgo dentro de estos datos, pero todavía no corresponden a predicciones para una máquina real. La presentación mostrará primero el problema y la continuidad del proyecto, luego los resultados gráficos y, al final, las conclusiones y límites.</a:t>
-            </a:r>
-          </a:p>
-          <a:p xmlns:a="http://schemas.openxmlformats.org/drawingml/2006/main">
-            <a:r>
-              <a:t/>
-            </a:r>
-          </a:p>
-          <a:p xmlns:a="http://schemas.openxmlformats.org/drawingml/2006/main">
-            <a:r>
-              <a:t>Fuentes para esta diapositiva:</a:t>
-            </a:r>
-          </a:p>
-          <a:p xmlns:a="http://schemas.openxmlformats.org/drawingml/2006/main">
-            <a:r>
-              <a:t>Matzka, S. (2020). AI4I 2020 Predictive Maintenance Dataset. UCI Machine Learning Repository.</a:t>
+              <a:t>Hola, soy Alexander Sepúlveda. Voy a presentar mi proyecto de la asignatura, que desarrollé de forma individual en cuatro fases. El trabajo analiza qué condiciones de operación aparecen junto con las fallas de maquinaria en el conjunto AI4I 2020. Más que mostrar solo el resultado, quiero mostrar el proceso: qué decisiones tomé, cómo las comprobé y qué aprendí.</a:t>
             </a:r>
           </a:p>
         </p:txBody>
@@ -490,6 +480,356 @@
   </p:cSld>
   <p:clrMapOvr>
     <a:masterClrMapping xmlns:a="http://schemas.openxmlformats.org/drawingml/2006/main"/>
+  </p:clrMapOvr>
+</p:notes>
+</file>
+
+<file path=ppt/notesSlides/notesSlide10.xml><?xml version="1.0" encoding="utf-8"?>
+<p:notes xmlns:a="http://schemas.openxmlformats.org/drawingml/2006/main" xmlns:p="http://schemas.openxmlformats.org/presentationml/2006/main" xmlns:r="http://schemas.openxmlformats.org/officeDocument/2006/relationships">
+  <p:cSld>
+    <p:spTree>
+      <p:nvGrpSpPr>
+        <p:cNvPr id="1" name=""/>
+        <p:cNvGrpSpPr/>
+        <p:nvPr/>
+      </p:nvGrpSpPr>
+      <p:grpSpPr>
+        <a:xfrm>
+          <a:off x="0" y="0"/>
+          <a:ext cx="0" cy="0"/>
+          <a:chOff x="0" y="0"/>
+          <a:chExt cx="0" cy="0"/>
+        </a:xfrm>
+      </p:grpSpPr>
+      <p:sp>
+        <p:nvSpPr>
+          <p:cNvPr id="2" name="Slide Image Placeholder 1"/>
+          <p:cNvSpPr>
+            <a:spLocks noGrp="1"/>
+          </p:cNvSpPr>
+          <p:nvPr>
+            <p:ph type="sldImg" idx="2"/>
+          </p:nvPr>
+        </p:nvSpPr>
+        <p:spPr/>
+      </p:sp>
+      <p:sp>
+        <p:nvSpPr>
+          <p:cNvPr id="3" name="Notes Placeholder 2"/>
+          <p:cNvSpPr>
+            <a:spLocks noGrp="1"/>
+          </p:cNvSpPr>
+          <p:nvPr>
+            <p:ph type="body" idx="3" sz="quarter"/>
+          </p:nvPr>
+        </p:nvSpPr>
+        <p:spPr/>
+        <p:txBody>
+          <a:bodyPr/>
+          <a:lstStyle/>
+          <a:p>
+            <a:r>
+              <a:t>Luego vienen las transformaciones. El orden importa: primero dividí los datos en 80 % entrenamiento y 20 % prueba, estratificando para que ambas partes tengan la misma proporción de fallas, y con semilla 42 para repetirlo. Después, Type se transformó con One Hot Encoding: la letra L, M o H se convierte en tres columnas con ceros y unos. Así el código entiende la categoría sin suponer un orden falso entre ellas. Las cinco variables numéricas se escalaron con RobustScaler, que resta la mediana y divide por el rango intercuartílico. Lo elegí porque los valores extremos lo afectan menos. La clave es que estos parámetros se aprenden solo con entrenamiento y se aplican igual a prueba. El resultado son nueve columnas.</a:t>
+            </a:r>
+          </a:p>
+        </p:txBody>
+      </p:sp>
+      <p:sp>
+        <p:nvSpPr>
+          <p:cNvPr id="4" name="Slide Number Placeholder 3"/>
+          <p:cNvSpPr>
+            <a:spLocks noGrp="1"/>
+          </p:cNvSpPr>
+          <p:nvPr>
+            <p:ph type="sldNum" idx="5" sz="quarter"/>
+          </p:nvPr>
+        </p:nvSpPr>
+        <p:spPr/>
+      </p:sp>
+    </p:spTree>
+  </p:cSld>
+  <p:clrMapOvr>
+    <a:masterClrMapping/>
+  </p:clrMapOvr>
+</p:notes>
+</file>
+
+<file path=ppt/notesSlides/notesSlide11.xml><?xml version="1.0" encoding="utf-8"?>
+<p:notes xmlns:a="http://schemas.openxmlformats.org/drawingml/2006/main" xmlns:p="http://schemas.openxmlformats.org/presentationml/2006/main" xmlns:r="http://schemas.openxmlformats.org/officeDocument/2006/relationships">
+  <p:cSld>
+    <p:spTree>
+      <p:nvGrpSpPr>
+        <p:cNvPr id="1" name=""/>
+        <p:cNvGrpSpPr/>
+        <p:nvPr/>
+      </p:nvGrpSpPr>
+      <p:grpSpPr>
+        <a:xfrm>
+          <a:off x="0" y="0"/>
+          <a:ext cx="0" cy="0"/>
+          <a:chOff x="0" y="0"/>
+          <a:chExt cx="0" cy="0"/>
+        </a:xfrm>
+      </p:grpSpPr>
+      <p:sp>
+        <p:nvSpPr>
+          <p:cNvPr id="2" name="Slide Image Placeholder 1"/>
+          <p:cNvSpPr>
+            <a:spLocks noGrp="1"/>
+          </p:cNvSpPr>
+          <p:nvPr>
+            <p:ph type="sldImg" idx="2"/>
+          </p:nvPr>
+        </p:nvSpPr>
+        <p:spPr/>
+      </p:sp>
+      <p:sp>
+        <p:nvSpPr>
+          <p:cNvPr id="3" name="Notes Placeholder 2"/>
+          <p:cNvSpPr>
+            <a:spLocks noGrp="1"/>
+          </p:cNvSpPr>
+          <p:nvPr>
+            <p:ph type="body" idx="3" sz="quarter"/>
+          </p:nvPr>
+        </p:nvSpPr>
+        <p:spPr/>
+        <p:txBody>
+          <a:bodyPr/>
+          <a:lstStyle/>
+          <a:p>
+            <a:r>
+              <a:t>En la Fase 3 reorganicé ese mismo procesamiento con programación orientada a objetos. Hay una clase base, Transformador, con dos métodos: ajustar y transformar. De ella heredan CodificadorOneHot y EscaladorRobusto; eso es herencia, porque reutilizan la validación de la base. El pipeline llama los mismos métodos en cada objeto, sin saber cuál es: eso es polimorfismo. Y cada objeto guarda internamente lo que aprendió, por eso no se puede transformar sin ajustar antes: eso es encapsulamiento. Además usé el patrón Factory, que crea el transformador correcto según el tipo de variable. El pipeline usa un ciclo, porque los pasos van uno tras otro y no hacía falta recursividad.</a:t>
+            </a:r>
+          </a:p>
+        </p:txBody>
+      </p:sp>
+      <p:sp>
+        <p:nvSpPr>
+          <p:cNvPr id="4" name="Slide Number Placeholder 3"/>
+          <p:cNvSpPr>
+            <a:spLocks noGrp="1"/>
+          </p:cNvSpPr>
+          <p:nvPr>
+            <p:ph type="sldNum" idx="5" sz="quarter"/>
+          </p:nvPr>
+        </p:nvSpPr>
+        <p:spPr/>
+      </p:sp>
+    </p:spTree>
+  </p:cSld>
+  <p:clrMapOvr>
+    <a:masterClrMapping/>
+  </p:clrMapOvr>
+</p:notes>
+</file>
+
+<file path=ppt/notesSlides/notesSlide12.xml><?xml version="1.0" encoding="utf-8"?>
+<p:notes xmlns:a="http://schemas.openxmlformats.org/drawingml/2006/main" xmlns:p="http://schemas.openxmlformats.org/presentationml/2006/main" xmlns:r="http://schemas.openxmlformats.org/officeDocument/2006/relationships">
+  <p:cSld>
+    <p:spTree>
+      <p:nvGrpSpPr>
+        <p:cNvPr id="1" name=""/>
+        <p:cNvGrpSpPr/>
+        <p:nvPr/>
+      </p:nvGrpSpPr>
+      <p:grpSpPr>
+        <a:xfrm>
+          <a:off x="0" y="0"/>
+          <a:ext cx="0" cy="0"/>
+          <a:chOff x="0" y="0"/>
+          <a:chExt cx="0" cy="0"/>
+        </a:xfrm>
+      </p:grpSpPr>
+      <p:sp>
+        <p:nvSpPr>
+          <p:cNvPr id="2" name="Slide Image Placeholder 1"/>
+          <p:cNvSpPr>
+            <a:spLocks noGrp="1"/>
+          </p:cNvSpPr>
+          <p:nvPr>
+            <p:ph type="sldImg" idx="2"/>
+          </p:nvPr>
+        </p:nvSpPr>
+        <p:spPr/>
+      </p:sp>
+      <p:sp>
+        <p:nvSpPr>
+          <p:cNvPr id="3" name="Notes Placeholder 2"/>
+          <p:cNvSpPr>
+            <a:spLocks noGrp="1"/>
+          </p:cNvSpPr>
+          <p:nvPr>
+            <p:ph type="body" idx="3" sz="quarter"/>
+          </p:nvPr>
+        </p:nvSpPr>
+        <p:spPr/>
+        <p:txBody>
+          <a:bodyPr/>
+          <a:lstStyle/>
+          <a:p>
+            <a:r>
+              <a:t>Antes de confiar en el nuevo diseño, lo probé. Hice un caso normal con el pipeline completo, un caso límite con una sola fila y dos excepciones: transformar antes de ajustar y usar una categoría que no se había aprendido. En ambos casos el código responde con un error claro. La prueba más importante fue assert_frame_equal, que confirmó que F3 entrega exactamente lo mismo que F2. Para la eficiencia usé timeit, que repite la medición y se queda con el menor tiempo, y tracemalloc, que mide la memoria máxima. La versión funcional fue más rápida y usó menos memoria. Aun así, conservé la POO porque es más fácil de mantener, y ambas crecen de forma lineal.</a:t>
+            </a:r>
+          </a:p>
+        </p:txBody>
+      </p:sp>
+      <p:sp>
+        <p:nvSpPr>
+          <p:cNvPr id="4" name="Slide Number Placeholder 3"/>
+          <p:cNvSpPr>
+            <a:spLocks noGrp="1"/>
+          </p:cNvSpPr>
+          <p:nvPr>
+            <p:ph type="sldNum" idx="5" sz="quarter"/>
+          </p:nvPr>
+        </p:nvSpPr>
+        <p:spPr/>
+      </p:sp>
+    </p:spTree>
+  </p:cSld>
+  <p:clrMapOvr>
+    <a:masterClrMapping/>
+  </p:clrMapOvr>
+</p:notes>
+</file>
+
+<file path=ppt/notesSlides/notesSlide13.xml><?xml version="1.0" encoding="utf-8"?>
+<p:notes xmlns:a="http://schemas.openxmlformats.org/drawingml/2006/main" xmlns:p="http://schemas.openxmlformats.org/presentationml/2006/main" xmlns:r="http://schemas.openxmlformats.org/officeDocument/2006/relationships">
+  <p:cSld>
+    <p:spTree>
+      <p:nvGrpSpPr>
+        <p:cNvPr id="1" name=""/>
+        <p:cNvGrpSpPr/>
+        <p:nvPr/>
+      </p:nvGrpSpPr>
+      <p:grpSpPr>
+        <a:xfrm>
+          <a:off x="0" y="0"/>
+          <a:ext cx="0" cy="0"/>
+          <a:chOff x="0" y="0"/>
+          <a:chExt cx="0" cy="0"/>
+        </a:xfrm>
+      </p:grpSpPr>
+      <p:sp>
+        <p:nvSpPr>
+          <p:cNvPr id="2" name="Slide Image Placeholder 1"/>
+          <p:cNvSpPr>
+            <a:spLocks noGrp="1"/>
+          </p:cNvSpPr>
+          <p:nvPr>
+            <p:ph type="sldImg" idx="2"/>
+          </p:nvPr>
+        </p:nvSpPr>
+        <p:spPr/>
+      </p:sp>
+      <p:sp>
+        <p:nvSpPr>
+          <p:cNvPr id="3" name="Notes Placeholder 2"/>
+          <p:cNvSpPr>
+            <a:spLocks noGrp="1"/>
+          </p:cNvSpPr>
+          <p:nvPr>
+            <p:ph type="body" idx="3" sz="quarter"/>
+          </p:nvPr>
+        </p:nvSpPr>
+        <p:spPr/>
+        <p:txBody>
+          <a:bodyPr/>
+          <a:lstStyle/>
+          <a:p>
+            <a:r>
+              <a:t>En la Fase 4 apareció un problema práctico. Los datos de F3 estaban listos para el código, pero no para una persona: los valores estaban escalados y Type estaba repartido en tres columnas. Por eso revertí el escalamiento: multipliqué por el IQR y sumé la mediana guardados en F3, y así volví a revoluciones por minuto, newton metro y minutos. Type se reconstruyó tomando la columna que vale uno. Luego comprobé que las diez mil filas coincidían con el archivo original. Aquí aprendí que los datos para el código y los datos para graficar no son los mismos.</a:t>
+            </a:r>
+          </a:p>
+        </p:txBody>
+      </p:sp>
+      <p:sp>
+        <p:nvSpPr>
+          <p:cNvPr id="4" name="Slide Number Placeholder 3"/>
+          <p:cNvSpPr>
+            <a:spLocks noGrp="1"/>
+          </p:cNvSpPr>
+          <p:nvPr>
+            <p:ph type="sldNum" idx="5" sz="quarter"/>
+          </p:nvPr>
+        </p:nvSpPr>
+        <p:spPr/>
+      </p:sp>
+    </p:spTree>
+  </p:cSld>
+  <p:clrMapOvr>
+    <a:masterClrMapping/>
+  </p:clrMapOvr>
+</p:notes>
+</file>
+
+<file path=ppt/notesSlides/notesSlide14.xml><?xml version="1.0" encoding="utf-8"?>
+<p:notes xmlns:a="http://schemas.openxmlformats.org/drawingml/2006/main" xmlns:p="http://schemas.openxmlformats.org/presentationml/2006/main" xmlns:r="http://schemas.openxmlformats.org/officeDocument/2006/relationships">
+  <p:cSld>
+    <p:spTree>
+      <p:nvGrpSpPr>
+        <p:cNvPr id="1" name=""/>
+        <p:cNvGrpSpPr/>
+        <p:nvPr/>
+      </p:nvGrpSpPr>
+      <p:grpSpPr>
+        <a:xfrm>
+          <a:off x="0" y="0"/>
+          <a:ext cx="0" cy="0"/>
+          <a:chOff x="0" y="0"/>
+          <a:chExt cx="0" cy="0"/>
+        </a:xfrm>
+      </p:grpSpPr>
+      <p:sp>
+        <p:nvSpPr>
+          <p:cNvPr id="2" name="Slide Image Placeholder 1"/>
+          <p:cNvSpPr>
+            <a:spLocks noGrp="1"/>
+          </p:cNvSpPr>
+          <p:nvPr>
+            <p:ph type="sldImg" idx="2"/>
+          </p:nvPr>
+        </p:nvSpPr>
+        <p:spPr/>
+      </p:sp>
+      <p:sp>
+        <p:nvSpPr>
+          <p:cNvPr id="3" name="Notes Placeholder 2"/>
+          <p:cNvSpPr>
+            <a:spLocks noGrp="1"/>
+          </p:cNvSpPr>
+          <p:nvPr>
+            <p:ph type="body" idx="3" sz="quarter"/>
+          </p:nvPr>
+        </p:nvSpPr>
+        <p:spPr/>
+        <p:txBody>
+          <a:bodyPr/>
+          <a:lstStyle/>
+          <a:p>
+            <a:r>
+              <a:t>Más allá del resultado, el proceso dejó aprendizajes concretos. Dividir antes de transformar evita la fuga de información. Un conjunto limpio también es un resultado, y corresponde documentarlo en vez de inventar errores. Con pocas fallas, la exactitud engaña. Comprobar la equivalencia entre fases da seguridad al cambiar el diseño. Lo más rápido no siempre es lo más conveniente. Y para interpretar resultados hay que volver a las unidades reales.</a:t>
+            </a:r>
+          </a:p>
+        </p:txBody>
+      </p:sp>
+      <p:sp>
+        <p:nvSpPr>
+          <p:cNvPr id="4" name="Slide Number Placeholder 3"/>
+          <p:cNvSpPr>
+            <a:spLocks noGrp="1"/>
+          </p:cNvSpPr>
+          <p:nvPr>
+            <p:ph type="sldNum" idx="5" sz="quarter"/>
+          </p:nvPr>
+        </p:nvSpPr>
+        <p:spPr/>
+      </p:sp>
+    </p:spTree>
+  </p:cSld>
+  <p:clrMapOvr>
+    <a:masterClrMapping/>
   </p:clrMapOvr>
 </p:notes>
 </file>
@@ -534,27 +874,7 @@
           <a:lstStyle xmlns:a="http://schemas.openxmlformats.org/drawingml/2006/main"/>
           <a:p xmlns:a="http://schemas.openxmlformats.org/drawingml/2006/main">
             <a:r>
-              <a:t>La pregunta central busca reconocer qué condiciones operacionales aparecen con mayor frecuencia junto con las fallas. El conjunto contiene diez mil registros y catorce variables originales. La variable objetivo es Machine failure. Solo 339 registros presentan una falla, lo que equivale a una tasa global de 3,39 por ciento. Este desbalance es relevante porque una tasa alta dentro de un grupo pequeño debe interpretarse junto con su cantidad de casos. También se considera la observación del profesor: AI4I 2020 es sintético y llega prácticamente limpio. Por esta razón, el proyecto documenta esa limitación y evita presentar los resultados como evidencia directa de una planta real.</a:t>
-            </a:r>
-          </a:p>
-          <a:p xmlns:a="http://schemas.openxmlformats.org/drawingml/2006/main">
-            <a:r>
-              <a:t/>
-            </a:r>
-          </a:p>
-          <a:p xmlns:a="http://schemas.openxmlformats.org/drawingml/2006/main">
-            <a:r>
-              <a:t>Fuentes para esta diapositiva:</a:t>
-            </a:r>
-          </a:p>
-          <a:p xmlns:a="http://schemas.openxmlformats.org/drawingml/2006/main">
-            <a:r>
-              <a:t>Matzka, S. (2020). AI4I 2020 Predictive Maintenance Dataset.</a:t>
-            </a:r>
-          </a:p>
-          <a:p xmlns:a="http://schemas.openxmlformats.org/drawingml/2006/main">
-            <a:r>
-              <a:t>Universidad Andrés Bello. (2026). Guía de apoyo Sumativa 3, Fase 4.</a:t>
+              <a:t>La pregunta del proyecto es qué condiciones de operación aparecen con más frecuencia junto con las fallas. Esto sirve para decidir qué revisar primero. El conjunto tiene diez mil registros y catorce variables, y solo 339 son fallas, un 3,39 %. Dos aclaraciones: es un conjunto sintético, es decir, generado por simulación para parecerse a una operación real, no medido en una planta. Y la variable Type indica la calidad del producto: L es baja, M media y H alta.</a:t>
             </a:r>
           </a:p>
         </p:txBody>
@@ -624,27 +944,7 @@
           <a:lstStyle xmlns:a="http://schemas.openxmlformats.org/drawingml/2006/main"/>
           <a:p xmlns:a="http://schemas.openxmlformats.org/drawingml/2006/main">
             <a:r>
-              <a:t>El proyecto mantiene una continuidad concreta entre las fases. En la Fase 1 se definió el problema, los objetivos y el entorno. En la Fase 2 se documentó el conjunto, se separaron entrenamiento y prueba y se prepararon las variables. En la Fase 3 ese procesamiento se convirtió en módulos y clases reutilizables, con pruebas normales, casos límite, excepciones y mediciones de eficiencia. Finalmente, la Fase 4 integra todo lo anterior. Para que los gráficos sean comprensibles, se revierten las variables escaladas a sus unidades originales, como revoluciones por minuto, newton metro y minutos de desgaste. Esa reversión solo se usa para interpretar y comunicar.</a:t>
-            </a:r>
-          </a:p>
-          <a:p xmlns:a="http://schemas.openxmlformats.org/drawingml/2006/main">
-            <a:r>
-              <a:t/>
-            </a:r>
-          </a:p>
-          <a:p xmlns:a="http://schemas.openxmlformats.org/drawingml/2006/main">
-            <a:r>
-              <a:t>Fuentes para esta diapositiva:</a:t>
-            </a:r>
-          </a:p>
-          <a:p xmlns:a="http://schemas.openxmlformats.org/drawingml/2006/main">
-            <a:r>
-              <a:t>Repositorio del proyecto Grupo 9, carpetas F1, F2, F3 y F4.</a:t>
-            </a:r>
-          </a:p>
-          <a:p xmlns:a="http://schemas.openxmlformats.org/drawingml/2006/main">
-            <a:r>
-              <a:t>Universidad Andrés Bello. (2026). MCDI500 Apunte Fase 4.</a:t>
+              <a:t>El proyecto avanzó en cuatro fases conectadas. En la primera definí el problema y el entorno reproducible. En la segunda preparé los datos. En la tercera convertí ese proceso en código modular, con pruebas y mediciones. Y en la cuarta integré todo para analizar y comunicar. Ahora muestro las decisiones de cada etapa.</a:t>
             </a:r>
           </a:p>
         </p:txBody>
@@ -714,27 +1014,7 @@
           <a:lstStyle xmlns:a="http://schemas.openxmlformats.org/drawingml/2006/main"/>
           <a:p xmlns:a="http://schemas.openxmlformats.org/drawingml/2006/main">
             <a:r>
-              <a:t>La primera figura compara la tasa de falla entre los tipos de producto. El tipo L alcanza 3,92 por ciento, mientras M llega a 2,77 por ciento y H a 2,09 por ciento. Este resultado ayuda a responder el objetivo de identificar diferencias entre grupos. Sin embargo, el tipo L también es el más frecuente, con seis mil registros. Por eso se muestran porcentajes y cantidades, y se evita afirmar una relación causal. La figura cumple una función de contexto: muestra que la categoría Type aporta una diferencia, pero todavía no explica qué condiciones operacionales acompañan las fallas.</a:t>
-            </a:r>
-          </a:p>
-          <a:p xmlns:a="http://schemas.openxmlformats.org/drawingml/2006/main">
-            <a:r>
-              <a:t/>
-            </a:r>
-          </a:p>
-          <a:p xmlns:a="http://schemas.openxmlformats.org/drawingml/2006/main">
-            <a:r>
-              <a:t>Fuentes para esta diapositiva:</a:t>
-            </a:r>
-          </a:p>
-          <a:p xmlns:a="http://schemas.openxmlformats.org/drawingml/2006/main">
-            <a:r>
-              <a:t>Elaboración propia a partir de Matzka (2020).</a:t>
-            </a:r>
-          </a:p>
-          <a:p xmlns:a="http://schemas.openxmlformats.org/drawingml/2006/main">
-            <a:r>
-              <a:t>Archivo: F4/docs/tasas_tipo_producto.csv.</a:t>
+              <a:t>Con los datos ya interpretables, el primer resultado compara los tipos de producto. El tipo L, de calidad baja, tiene la mayor tasa de falla, con 3,92 %. M llega a 2,77 % y H a 2,09 %. Es una diferencia descriptiva: no prueba que el tipo cause la falla.</a:t>
             </a:r>
           </a:p>
         </p:txBody>
@@ -804,27 +1084,7 @@
           <a:lstStyle xmlns:a="http://schemas.openxmlformats.org/drawingml/2006/main"/>
           <a:p xmlns:a="http://schemas.openxmlformats.org/drawingml/2006/main">
             <a:r>
-              <a:t>La segunda figura divide cada variable operacional en cinco grupos de tamaño parecido. El primer quintil de velocidad de rotación presenta una tasa de falla de 12,16 por ciento. En torque, el quinto quintil alcanza 11,50 por ciento, y en desgaste de herramienta el quinto quintil llega a 8,14 por ciento. La temperatura del aire también aumenta en el grupo superior, aunque con una diferencia menor. La temperatura del proceso no muestra una tendencia ordenada. Los quintiles facilitan una comparación descriptiva, pero dependen de los cortes del conjunto y no representan límites universales para una máquina industrial.</a:t>
-            </a:r>
-          </a:p>
-          <a:p xmlns:a="http://schemas.openxmlformats.org/drawingml/2006/main">
-            <a:r>
-              <a:t/>
-            </a:r>
-          </a:p>
-          <a:p xmlns:a="http://schemas.openxmlformats.org/drawingml/2006/main">
-            <a:r>
-              <a:t>Fuentes para esta diapositiva:</a:t>
-            </a:r>
-          </a:p>
-          <a:p xmlns:a="http://schemas.openxmlformats.org/drawingml/2006/main">
-            <a:r>
-              <a:t>Elaboración propia a partir de Matzka (2020).</a:t>
-            </a:r>
-          </a:p>
-          <a:p xmlns:a="http://schemas.openxmlformats.org/drawingml/2006/main">
-            <a:r>
-              <a:t>Archivo: F4/docs/tasas_quintiles.csv.</a:t>
+              <a:t>Luego dividí cada variable en quintiles, es decir, cinco grupos del mismo tamaño, de los valores más bajos a los más altos. La velocidad baja alcanza 12,16 % de fallas, el torque alto 11,50 % y el desgaste alto 8,14 %. La temperatura del proceso, en cambio, no muestra una tendencia clara. Estos cortes describen este conjunto, no son límites para una máquina real.</a:t>
             </a:r>
           </a:p>
         </p:txBody>
@@ -894,117 +1154,7 @@
           <a:lstStyle xmlns:a="http://schemas.openxmlformats.org/drawingml/2006/main"/>
           <a:p xmlns:a="http://schemas.openxmlformats.org/drawingml/2006/main">
             <a:r>
-              <a:t>Luego se combinaron las tres condiciones que mostraron los contrastes más claros: velocidad baja, torque alto y desgaste alto. En el conjunto completo, 353 registros cumplen las tres condiciones y 101 de ellos presentan una falla. Esto corresponde a una tasa de 28,61 por ciento, muy superior al promedio global de 3,39 por ciento. La combinación permite definir un perfil descriptivo útil para priorizar observaciones. Aun así, no se interpreta como una regla causal ni como un sistema de alarma listo para producción. Los cortes se calcularon con el conjunto de entrenamiento para evitar utilizar la prueba al definir el perfil.</a:t>
-            </a:r>
-          </a:p>
-          <a:p xmlns:a="http://schemas.openxmlformats.org/drawingml/2006/main">
-            <a:r>
-              <a:t/>
-            </a:r>
-          </a:p>
-          <a:p xmlns:a="http://schemas.openxmlformats.org/drawingml/2006/main">
-            <a:r>
-              <a:t>Fuentes para esta diapositiva:</a:t>
-            </a:r>
-          </a:p>
-          <a:p xmlns:a="http://schemas.openxmlformats.org/drawingml/2006/main">
-            <a:r>
-              <a:t>Elaboración propia a partir de Matzka (2020).</a:t>
-            </a:r>
-          </a:p>
-          <a:p xmlns:a="http://schemas.openxmlformats.org/drawingml/2006/main">
-            <a:r>
-              <a:t>Archivo: F4/docs/interaccion_operacional.csv.</a:t>
-            </a:r>
-          </a:p>
-        </p:txBody>
-      </p:sp>
-      <p:sp>
-        <p:nvSpPr>
-          <p:cNvPr id="4" name="Slide Number Placeholder 3"/>
-          <p:cNvSpPr>
-            <a:spLocks xmlns:a="http://schemas.openxmlformats.org/drawingml/2006/main" noGrp="1"/>
-          </p:cNvSpPr>
-          <p:nvPr>
-            <p:ph type="sldNum" idx="5"/>
-          </p:nvPr>
-        </p:nvSpPr>
-        <p:spPr/>
-        <p:txBody>
-          <a:bodyPr xmlns:a="http://schemas.openxmlformats.org/drawingml/2006/main"/>
-          <a:lstStyle xmlns:a="http://schemas.openxmlformats.org/drawingml/2006/main"/>
-          <a:p xmlns:a="http://schemas.openxmlformats.org/drawingml/2006/main"/>
-        </p:txBody>
-      </p:sp>
-    </p:spTree>
-  </p:cSld>
-  <p:clrMapOvr>
-    <a:masterClrMapping xmlns:a="http://schemas.openxmlformats.org/drawingml/2006/main"/>
-  </p:clrMapOvr>
-</p:notes>
-</file>
-
-<file path=ppt/notesSlides/notesSlide7.xml><?xml version="1.0" encoding="utf-8"?>
-<p:notes xmlns:p="http://schemas.openxmlformats.org/presentationml/2006/main">
-  <p:cSld>
-    <p:spTree>
-      <p:nvGrpSpPr>
-        <p:cNvPr id="1" name=""/>
-        <p:cNvGrpSpPr/>
-        <p:nvPr/>
-      </p:nvGrpSpPr>
-      <p:grpSpPr>
-        <a:xfrm xmlns:a="http://schemas.openxmlformats.org/drawingml/2006/main"/>
-      </p:grpSpPr>
-      <p:sp>
-        <p:nvSpPr>
-          <p:cNvPr id="2" name="Slide Image Placeholder 1"/>
-          <p:cNvSpPr>
-            <a:spLocks xmlns:a="http://schemas.openxmlformats.org/drawingml/2006/main" noGrp="1"/>
-          </p:cNvSpPr>
-          <p:nvPr>
-            <p:ph type="sldImg" idx="0"/>
-          </p:nvPr>
-        </p:nvSpPr>
-        <p:spPr/>
-      </p:sp>
-      <p:sp>
-        <p:nvSpPr>
-          <p:cNvPr id="3" name="Notes Placeholder 2"/>
-          <p:cNvSpPr>
-            <a:spLocks xmlns:a="http://schemas.openxmlformats.org/drawingml/2006/main" noGrp="1"/>
-          </p:cNvSpPr>
-          <p:nvPr>
-            <p:ph type="body" idx="1"/>
-          </p:nvPr>
-        </p:nvSpPr>
-        <p:spPr/>
-        <p:txBody>
-          <a:bodyPr xmlns:a="http://schemas.openxmlformats.org/drawingml/2006/main"/>
-          <a:lstStyle xmlns:a="http://schemas.openxmlformats.org/drawingml/2006/main"/>
-          <a:p xmlns:a="http://schemas.openxmlformats.org/drawingml/2006/main">
-            <a:r>
-              <a:t>Para comprobar que el perfil no dependiera solo de una parte de los datos, se aplicaron los mismos cortes a entrenamiento y prueba. En entrenamiento, la tasa dentro del perfil fue 28,94 por ciento, frente a 2,48 por ciento en el resto. En prueba, alcanzó 27,50 por ciento, frente a 2,40 por ciento. En ambas particiones, el perfil muestra una tasa cercana a doce veces la del resto. Esta consistencia respalda la asociación descriptiva. Sin embargo, no se entrenó un clasificador y no se calcularon métricas como precisión, exhaustividad o área bajo la curva. Por eso, esta validación no debe confundirse con una evaluación predictiva.</a:t>
-            </a:r>
-          </a:p>
-          <a:p xmlns:a="http://schemas.openxmlformats.org/drawingml/2006/main">
-            <a:r>
-              <a:t/>
-            </a:r>
-          </a:p>
-          <a:p xmlns:a="http://schemas.openxmlformats.org/drawingml/2006/main">
-            <a:r>
-              <a:t>Fuentes para esta diapositiva:</a:t>
-            </a:r>
-          </a:p>
-          <a:p xmlns:a="http://schemas.openxmlformats.org/drawingml/2006/main">
-            <a:r>
-              <a:t>Elaboración propia con los conjuntos procesados de la Fase 2.</a:t>
-            </a:r>
-          </a:p>
-          <a:p xmlns:a="http://schemas.openxmlformats.org/drawingml/2006/main">
-            <a:r>
-              <a:t>Archivo: F4/docs/validacion_perfil.csv.</a:t>
+              <a:t>Después combiné las tres condiciones más marcadas: velocidad baja, torque alto y desgaste alto. Los cortes se calcularon solo con entrenamiento. En ese perfil hay 101 fallas en 353 registros, un 28,61 %, frente al 3,39 % general. Al aplicar los mismos cortes a prueba, el resultado se mantuvo: 28,94 % en entrenamiento y 27,50 % en prueba, contra cerca de 2,4 % en el resto. Esto refuerza el hallazgo, pero no es una evaluación predictiva: no entrené un modelo.</a:t>
             </a:r>
           </a:p>
         </p:txBody>
@@ -1074,27 +1224,7 @@
           <a:lstStyle xmlns:a="http://schemas.openxmlformats.org/drawingml/2006/main"/>
           <a:p xmlns:a="http://schemas.openxmlformats.org/drawingml/2006/main">
             <a:r>
-              <a:t>Como conclusión, el proyecto identifica una asociación clara entre las fallas y la combinación de baja velocidad, torque alto y desgaste alto. El resultado se mantiene en entrenamiento y prueba, lo que mejora su consistencia dentro del conjunto analizado. El principal límite es que AI4I 2020 es sintético y no reproduce toda la complejidad de una operación industrial real. Además, este trabajo no evalúa causalidad ni construye un modelo predictivo. El siguiente paso sería contrastar el perfil con datos reales de mantenimiento. Después, podría entrenarse un modelo supervisado y evaluarse con métricas apropiadas para el desbalance de clases. Con esto cierro la presentación.</a:t>
-            </a:r>
-          </a:p>
-          <a:p xmlns:a="http://schemas.openxmlformats.org/drawingml/2006/main">
-            <a:r>
-              <a:t/>
-            </a:r>
-          </a:p>
-          <a:p xmlns:a="http://schemas.openxmlformats.org/drawingml/2006/main">
-            <a:r>
-              <a:t>Fuentes para esta diapositiva:</a:t>
-            </a:r>
-          </a:p>
-          <a:p xmlns:a="http://schemas.openxmlformats.org/drawingml/2006/main">
-            <a:r>
-              <a:t>Universidad Andrés Bello. (2026). Guía de apoyo Sumativa 3, Fase 4.</a:t>
-            </a:r>
-          </a:p>
-          <a:p xmlns:a="http://schemas.openxmlformats.org/drawingml/2006/main">
-            <a:r>
-              <a:t>Phan et al. (2022). Machine learning for predictive maintenance: A multiple classifier approach.</a:t>
+              <a:t>Para cerrar: la combinación de velocidad baja, torque alto y desgaste alto es la que más se asocia con las fallas, y se mantiene entre entrenamiento y prueba. El límite principal es que el conjunto es sintético y que esto describe asociaciones, no causas. El siguiente paso sería probar el perfil con datos reales y luego entrenar un modelo con métricas para clases desbalanceadas. Gracias.</a:t>
             </a:r>
           </a:p>
         </p:txBody>
@@ -1120,6 +1250,76 @@
   </p:cSld>
   <p:clrMapOvr>
     <a:masterClrMapping xmlns:a="http://schemas.openxmlformats.org/drawingml/2006/main"/>
+  </p:clrMapOvr>
+</p:notes>
+</file>
+
+<file path=ppt/notesSlides/notesSlide9.xml><?xml version="1.0" encoding="utf-8"?>
+<p:notes xmlns:a="http://schemas.openxmlformats.org/drawingml/2006/main" xmlns:p="http://schemas.openxmlformats.org/presentationml/2006/main" xmlns:r="http://schemas.openxmlformats.org/officeDocument/2006/relationships">
+  <p:cSld>
+    <p:spTree>
+      <p:nvGrpSpPr>
+        <p:cNvPr id="1" name=""/>
+        <p:cNvGrpSpPr/>
+        <p:nvPr/>
+      </p:nvGrpSpPr>
+      <p:grpSpPr>
+        <a:xfrm>
+          <a:off x="0" y="0"/>
+          <a:ext cx="0" cy="0"/>
+          <a:chOff x="0" y="0"/>
+          <a:chExt cx="0" cy="0"/>
+        </a:xfrm>
+      </p:grpSpPr>
+      <p:sp>
+        <p:nvSpPr>
+          <p:cNvPr id="2" name="Slide Image Placeholder 1"/>
+          <p:cNvSpPr>
+            <a:spLocks noGrp="1"/>
+          </p:cNvSpPr>
+          <p:nvPr>
+            <p:ph type="sldImg" idx="2"/>
+          </p:nvPr>
+        </p:nvSpPr>
+        <p:spPr/>
+      </p:sp>
+      <p:sp>
+        <p:nvSpPr>
+          <p:cNvPr id="3" name="Notes Placeholder 2"/>
+          <p:cNvSpPr>
+            <a:spLocks noGrp="1"/>
+          </p:cNvSpPr>
+          <p:nvPr>
+            <p:ph type="body" idx="3" sz="quarter"/>
+          </p:nvPr>
+        </p:nvSpPr>
+        <p:spPr/>
+        <p:txBody>
+          <a:bodyPr/>
+          <a:lstStyle/>
+          <a:p>
+            <a:r>
+              <a:t>En la Fase 2 tomé varias decisiones antes de transformar. Primero, el diagnóstico mostró cero valores faltantes y cero duplicados, así que no imputé ni eliminé filas: inventar errores habría sido peor. Segundo, excluí UDI y Product ID, porque solo identifican el registro. Tercero, excluí los cinco modos de falla, como TWF o HDF. Esos campos ya dicen qué falló, y usarlos sería fuga de información: es como entregar la respuesta junto con la pregunta. También conservé los valores extremos de velocidad y torque, porque pueden estar ligados a la falla. Y algo importante: como solo el 3,39 % falla, alguien que dijera siempre «no falla» acertaría el 96,61 % sin detectar ninguna falla. Por eso la exactitud no sirve aquí.</a:t>
+            </a:r>
+          </a:p>
+        </p:txBody>
+      </p:sp>
+      <p:sp>
+        <p:nvSpPr>
+          <p:cNvPr id="4" name="Slide Number Placeholder 3"/>
+          <p:cNvSpPr>
+            <a:spLocks noGrp="1"/>
+          </p:cNvSpPr>
+          <p:nvPr>
+            <p:ph type="sldNum" idx="5" sz="quarter"/>
+          </p:nvPr>
+        </p:nvSpPr>
+        <p:spPr/>
+      </p:sp>
+    </p:spTree>
+  </p:cSld>
+  <p:clrMapOvr>
+    <a:masterClrMapping/>
   </p:clrMapOvr>
 </p:notes>
 </file>
@@ -1689,287 +1889,6 @@
 </a:theme>
 </file>
 
-<file path=ppt/slides/charts/chart1.xml><?xml version="1.0" encoding="utf-8"?>
-<c:chartSpace xmlns:c="http://schemas.openxmlformats.org/drawingml/2006/chart" xmlns:r="http://schemas.openxmlformats.org/officeDocument/2006/relationships">
-  <c:lang val="en-US"/>
-  <c:chart>
-    <c:plotArea>
-      <c:barChart>
-        <c:barDir val="col"/>
-        <c:grouping val="clustered"/>
-        <c:varyColors val="1"/>
-        <c:ser>
-          <c:idx val="0"/>
-          <c:order val="0"/>
-          <c:tx>
-            <c:v>Tasa de falla</c:v>
-          </c:tx>
-          <c:spPr>
-            <a:solidFill xmlns:a="http://schemas.openxmlformats.org/drawingml/2006/main">
-              <a:srgbClr val="5B8DB8"/>
-            </a:solidFill>
-          </c:spPr>
-          <c:dPt>
-            <c:idx val="0"/>
-            <c:invertIfNegative val="0"/>
-            <c:spPr>
-              <a:solidFill xmlns:a="http://schemas.openxmlformats.org/drawingml/2006/main">
-                <a:srgbClr val="C94C4C"/>
-              </a:solidFill>
-            </c:spPr>
-          </c:dPt>
-          <c:dPt>
-            <c:idx val="1"/>
-            <c:invertIfNegative val="0"/>
-            <c:spPr>
-              <a:solidFill xmlns:a="http://schemas.openxmlformats.org/drawingml/2006/main">
-                <a:srgbClr val="5B8DB8"/>
-              </a:solidFill>
-            </c:spPr>
-          </c:dPt>
-          <c:dPt>
-            <c:idx val="2"/>
-            <c:invertIfNegative val="0"/>
-            <c:spPr>
-              <a:solidFill xmlns:a="http://schemas.openxmlformats.org/drawingml/2006/main">
-                <a:srgbClr val="C94C4C"/>
-              </a:solidFill>
-            </c:spPr>
-          </c:dPt>
-          <c:dPt>
-            <c:idx val="3"/>
-            <c:invertIfNegative val="0"/>
-            <c:spPr>
-              <a:solidFill xmlns:a="http://schemas.openxmlformats.org/drawingml/2006/main">
-                <a:srgbClr val="5B8DB8"/>
-              </a:solidFill>
-            </c:spPr>
-          </c:dPt>
-          <c:cat>
-            <c:strRef>
-              <c:f>'Chart Data'!$A$2:$A$5</c:f>
-              <c:strCache>
-                <c:ptCount val="4"/>
-                <c:pt idx="0">
-                  <c:v>Entrenamiento
-Perfil</c:v>
-                </c:pt>
-                <c:pt idx="1">
-                  <c:v>Entrenamiento
-Resto</c:v>
-                </c:pt>
-                <c:pt idx="2">
-                  <c:v>Prueba
-Perfil</c:v>
-                </c:pt>
-                <c:pt idx="3">
-                  <c:v>Prueba
-Resto</c:v>
-                </c:pt>
-              </c:strCache>
-            </c:strRef>
-          </c:cat>
-          <c:val>
-            <c:numRef>
-              <c:f>'Chart Data'!$B$2:$B$5</c:f>
-              <c:numCache>
-                <c:formatCode>0.0%</c:formatCode>
-                <c:ptCount val="4"/>
-                <c:pt idx="0">
-                  <c:v>0.2894</c:v>
-                </c:pt>
-                <c:pt idx="1">
-                  <c:v>0.0248</c:v>
-                </c:pt>
-                <c:pt idx="2">
-                  <c:v>0.275</c:v>
-                </c:pt>
-                <c:pt idx="3">
-                  <c:v>0.024</c:v>
-                </c:pt>
-              </c:numCache>
-            </c:numRef>
-          </c:val>
-        </c:ser>
-        <c:dLbls>
-          <c:txPr>
-            <a:bodyPr xmlns:a="http://schemas.openxmlformats.org/drawingml/2006/main" anchorCtr="1"/>
-            <a:lstStyle xmlns:a="http://schemas.openxmlformats.org/drawingml/2006/main"/>
-            <a:p xmlns:a="http://schemas.openxmlformats.org/drawingml/2006/main">
-              <a:pPr>
-                <a:defRPr sz="1200" b="1">
-                  <a:solidFill>
-                    <a:srgbClr val="17212B"/>
-                  </a:solidFill>
-                  <a:latin typeface="Arial"/>
-                  <a:ea typeface="Arial"/>
-                  <a:cs typeface="Arial"/>
-                </a:defRPr>
-              </a:pPr>
-            </a:p>
-          </c:txPr>
-          <c:dLblPos val="outEnd"/>
-          <c:showLegendKey val="0"/>
-          <c:showVal val="1"/>
-          <c:showCatName val="0"/>
-          <c:showSerName val="0"/>
-          <c:showPercent val="0"/>
-          <c:showBubbleSize val="0"/>
-          <c:showLeaderLines val="0"/>
-        </c:dLbls>
-        <c:gapWidth val="55"/>
-        <c:axId val="48650112"/>
-        <c:axId val="48672768"/>
-      </c:barChart>
-      <c:catAx>
-        <c:axId val="48650112"/>
-        <c:scaling>
-          <c:orientation val="minMax"/>
-        </c:scaling>
-        <c:delete val="0"/>
-        <c:axPos val="b"/>
-        <c:numFmt formatCode="General"/>
-        <c:majorTickMark val="none"/>
-        <c:minorTickMark val="none"/>
-        <c:spPr>
-          <a:ln xmlns:a="http://schemas.openxmlformats.org/drawingml/2006/main" w="9525">
-            <a:solidFill>
-              <a:srgbClr val="D7DCE1"/>
-            </a:solidFill>
-            <a:prstDash val="solid"/>
-          </a:ln>
-        </c:spPr>
-        <c:txPr>
-          <a:bodyPr xmlns:a="http://schemas.openxmlformats.org/drawingml/2006/main" anchorCtr="1"/>
-          <a:lstStyle xmlns:a="http://schemas.openxmlformats.org/drawingml/2006/main"/>
-          <a:p xmlns:a="http://schemas.openxmlformats.org/drawingml/2006/main">
-            <a:pPr>
-              <a:defRPr sz="1125">
-                <a:solidFill>
-                  <a:srgbClr val="17212B"/>
-                </a:solidFill>
-                <a:latin typeface="Arial"/>
-                <a:ea typeface="Arial"/>
-                <a:cs typeface="Arial"/>
-              </a:defRPr>
-            </a:pPr>
-          </a:p>
-        </c:txPr>
-        <c:crossAx val="48672768"/>
-      </c:catAx>
-      <c:valAx>
-        <c:axId val="48672768"/>
-        <c:scaling>
-          <c:orientation val="minMax"/>
-          <c:max val="0.35"/>
-          <c:min val="0"/>
-        </c:scaling>
-        <c:delete val="0"/>
-        <c:axPos val="l"/>
-        <c:majorGridlines>
-          <c:spPr>
-            <a:ln xmlns:a="http://schemas.openxmlformats.org/drawingml/2006/main" w="9525">
-              <a:solidFill>
-                <a:srgbClr val="E3E7EA"/>
-              </a:solidFill>
-              <a:prstDash val="solid"/>
-            </a:ln>
-          </c:spPr>
-        </c:majorGridlines>
-        <c:title>
-          <c:tx>
-            <c:rich>
-              <a:bodyPr xmlns:a="http://schemas.openxmlformats.org/drawingml/2006/main"/>
-              <a:lstStyle xmlns:a="http://schemas.openxmlformats.org/drawingml/2006/main"/>
-              <a:p xmlns:a="http://schemas.openxmlformats.org/drawingml/2006/main">
-                <a:r>
-                  <a:rPr sz="1125">
-                    <a:solidFill>
-                      <a:srgbClr val="5B6570"/>
-                    </a:solidFill>
-                    <a:latin typeface="Arial"/>
-                    <a:ea typeface="Arial"/>
-                    <a:cs typeface="Arial"/>
-                  </a:rPr>
-                  <a:t>Tasa de falla</a:t>
-                </a:r>
-              </a:p>
-            </c:rich>
-          </c:tx>
-          <c:overlay val="0"/>
-          <c:txPr>
-            <a:bodyPr xmlns:a="http://schemas.openxmlformats.org/drawingml/2006/main" anchorCtr="1"/>
-            <a:lstStyle xmlns:a="http://schemas.openxmlformats.org/drawingml/2006/main"/>
-            <a:p xmlns:a="http://schemas.openxmlformats.org/drawingml/2006/main">
-              <a:pPr>
-                <a:defRPr sz="1125">
-                  <a:solidFill>
-                    <a:srgbClr val="5B6570"/>
-                  </a:solidFill>
-                  <a:latin typeface="Arial"/>
-                  <a:ea typeface="Arial"/>
-                  <a:cs typeface="Arial"/>
-                </a:defRPr>
-              </a:pPr>
-            </a:p>
-          </c:txPr>
-        </c:title>
-        <c:numFmt formatCode="0%"/>
-        <c:majorTickMark val="none"/>
-        <c:minorTickMark val="none"/>
-        <c:spPr>
-          <a:ln xmlns:a="http://schemas.openxmlformats.org/drawingml/2006/main" w="9525">
-            <a:solidFill>
-              <a:srgbClr val="D7DCE1"/>
-            </a:solidFill>
-            <a:prstDash val="solid"/>
-          </a:ln>
-        </c:spPr>
-        <c:txPr>
-          <a:bodyPr xmlns:a="http://schemas.openxmlformats.org/drawingml/2006/main" anchorCtr="1"/>
-          <a:lstStyle xmlns:a="http://schemas.openxmlformats.org/drawingml/2006/main"/>
-          <a:p xmlns:a="http://schemas.openxmlformats.org/drawingml/2006/main">
-            <a:pPr>
-              <a:defRPr sz="1050">
-                <a:solidFill>
-                  <a:srgbClr val="5B6570"/>
-                </a:solidFill>
-                <a:latin typeface="Arial"/>
-                <a:ea typeface="Arial"/>
-                <a:cs typeface="Arial"/>
-              </a:defRPr>
-            </a:pPr>
-          </a:p>
-        </c:txPr>
-        <c:crossAx val="48650112"/>
-        <c:crossBetween val="between"/>
-        <c:majorUnit val="0.05"/>
-      </c:valAx>
-      <c:spPr>
-        <a:solidFill xmlns:a="http://schemas.openxmlformats.org/drawingml/2006/main">
-          <a:srgbClr val="FFFFFF"/>
-        </a:solidFill>
-        <a:ln xmlns:a="http://schemas.openxmlformats.org/drawingml/2006/main" w="0">
-          <a:noFill/>
-        </a:ln>
-      </c:spPr>
-    </c:plotArea>
-    <c:plotVisOnly val="1"/>
-  </c:chart>
-  <c:spPr>
-    <a:solidFill xmlns:a="http://schemas.openxmlformats.org/drawingml/2006/main">
-      <a:srgbClr val="FFFFFF"/>
-    </a:solidFill>
-    <a:ln xmlns:a="http://schemas.openxmlformats.org/drawingml/2006/main" w="0">
-      <a:noFill/>
-    </a:ln>
-  </c:spPr>
-  <c:externalData r:id="rIdChartSnapshot1">
-    <c:autoUpdate val="0"/>
-  </c:externalData>
-</c:chartSpace>
-</file>
-
 <file path=ppt/slides/slide1.xml><?xml version="1.0" encoding="utf-8"?>
 <p:sld xmlns:p="http://schemas.openxmlformats.org/presentationml/2006/main">
   <p:cSld>
@@ -2018,6 +1937,10 @@
             <a:noFill/>
           </a:ln>
         </p:spPr>
+        <p:txBody xmlns:a="http://schemas.openxmlformats.org/drawingml/2006/main">
+          <a:bodyPr/>
+          <a:p/>
+        </p:txBody>
       </p:sp>
       <p:sp>
         <p:nvSpPr>
@@ -2219,6 +2142,10 @@
             <a:noFill/>
           </a:ln>
         </p:spPr>
+        <p:txBody xmlns:a="http://schemas.openxmlformats.org/drawingml/2006/main">
+          <a:bodyPr/>
+          <a:p/>
+        </p:txBody>
       </p:sp>
       <p:sp>
         <p:nvSpPr>
@@ -2237,7 +2164,7 @@
         <p:spPr>
           <a:xfrm xmlns:a="http://schemas.openxmlformats.org/drawingml/2006/main">
             <a:off x="781050" y="4495800"/>
-            <a:ext cx="7810500" cy="990600"/>
+            <a:ext cx="7810500" cy="1234440"/>
           </a:xfrm>
           <a:prstGeom xmlns:a="http://schemas.openxmlformats.org/drawingml/2006/main" prst="rect">
             <a:avLst/>
@@ -2272,7 +2199,7 @@
                 <a:ea typeface="Arial"/>
                 <a:cs typeface="Arial"/>
               </a:rPr>
-              <a:t>Alexander Sepúlveda Ormazábal</a:t>
+              <a:t>Alexander Sepúlveda Ormazábal · Grupo 9 (trabajo individual)</a:t>
             </a:r>
           </a:p>
           <a:p xmlns:a="http://schemas.openxmlformats.org/drawingml/2006/main">
@@ -2295,7 +2222,7 @@
                 <a:ea typeface="Arial"/>
                 <a:cs typeface="Arial"/>
               </a:rPr>
-              <a:t>Programación para la Ciencia de Datos · MCDI500</a:t>
+              <a:t>Docente: Omar Salinas Silva</a:t>
             </a:r>
           </a:p>
           <a:p xmlns:a="http://schemas.openxmlformats.org/drawingml/2006/main">
@@ -2318,7 +2245,30 @@
                 <a:ea typeface="Arial"/>
                 <a:cs typeface="Arial"/>
               </a:rPr>
-              <a:t>Grupo 9 · 2026</a:t>
+              <a:t>MCDI500 Programación para la Ciencia de Datos · 2026</a:t>
+            </a:r>
+          </a:p>
+          <a:p xmlns:a="http://schemas.openxmlformats.org/drawingml/2006/main">
+            <a:pPr algn="l">
+              <a:defRPr sz="1425" b="0">
+                <a:solidFill>
+                  <a:srgbClr val="17212B"/>
+                </a:solidFill>
+                <a:latin typeface="Arial"/>
+                <a:ea typeface="Arial"/>
+                <a:cs typeface="Arial"/>
+              </a:defRPr>
+            </a:pPr>
+            <a:r>
+              <a:rPr sz="1425" b="0">
+                <a:solidFill>
+                  <a:srgbClr val="17212B"/>
+                </a:solidFill>
+                <a:latin typeface="Arial"/>
+                <a:ea typeface="Arial"/>
+                <a:cs typeface="Arial"/>
+              </a:rPr>
+              <a:t>github.com/alexander-seor/proyecto-grupo9-mcdi500</a:t>
             </a:r>
           </a:p>
         </p:txBody>
@@ -2380,6 +2330,30 @@
           </a:p>
         </p:txBody>
       </p:sp>
+      <p:pic xmlns:a="http://schemas.openxmlformats.org/drawingml/2006/main" xmlns:r="http://schemas.openxmlformats.org/officeDocument/2006/relationships">
+        <p:nvPicPr>
+          <p:cNvPr id="9" name="Picture 8" descr="image1.png"/>
+          <p:cNvPicPr>
+            <a:picLocks noChangeAspect="1"/>
+          </p:cNvPicPr>
+          <p:nvPr/>
+        </p:nvPicPr>
+        <p:blipFill>
+          <a:blip r:embed="rId3"/>
+          <a:stretch>
+            <a:fillRect/>
+          </a:stretch>
+        </p:blipFill>
+        <p:spPr>
+          <a:xfrm>
+            <a:off x="9144000" y="502920"/>
+            <a:ext cx="2048608" cy="685800"/>
+          </a:xfrm>
+          <a:prstGeom prst="rect">
+            <a:avLst/>
+          </a:prstGeom>
+        </p:spPr>
+      </p:pic>
     </p:spTree>
     <p:extLst>
       <p:ext uri="{BB962C8B-B14F-4D97-AF65-F5344CB8AC3E}">
@@ -2387,6 +2361,5774 @@
       </p:ext>
     </p:extLst>
   </p:cSld>
+</p:sld>
+</file>
+
+<file path=ppt/slides/slide10.xml><?xml version="1.0" encoding="utf-8"?>
+<p:sld xmlns:a="http://schemas.openxmlformats.org/drawingml/2006/main" xmlns:p="http://schemas.openxmlformats.org/presentationml/2006/main" xmlns:r="http://schemas.openxmlformats.org/officeDocument/2006/relationships">
+  <p:cSld>
+    <p:bg>
+      <p:bgPr>
+        <a:solidFill>
+          <a:srgbClr val="FFFFFF"/>
+        </a:solidFill>
+        <a:effectLst/>
+      </p:bgPr>
+    </p:bg>
+    <p:spTree>
+      <p:nvGrpSpPr>
+        <p:cNvPr id="1" name=""/>
+        <p:cNvGrpSpPr/>
+        <p:nvPr/>
+      </p:nvGrpSpPr>
+      <p:grpSpPr/>
+      <p:sp>
+        <p:nvSpPr>
+          <p:cNvPr id="2" name="Rectangle 1"/>
+          <p:cNvSpPr/>
+          <p:nvPr/>
+        </p:nvSpPr>
+        <p:spPr>
+          <a:xfrm>
+            <a:off x="0" y="0"/>
+            <a:ext cx="171450" cy="6858000"/>
+          </a:xfrm>
+          <a:prstGeom prst="rect">
+            <a:avLst/>
+          </a:prstGeom>
+          <a:solidFill>
+            <a:srgbClr val="5B8DB8"/>
+          </a:solidFill>
+          <a:ln>
+            <a:noFill/>
+          </a:ln>
+          <a:effectLst/>
+        </p:spPr>
+        <p:style>
+          <a:lnRef idx="1">
+            <a:schemeClr val="accent1"/>
+          </a:lnRef>
+          <a:fillRef idx="3">
+            <a:schemeClr val="accent1"/>
+          </a:fillRef>
+          <a:effectRef idx="2">
+            <a:schemeClr val="accent1"/>
+          </a:effectRef>
+          <a:fontRef idx="minor">
+            <a:schemeClr val="lt1"/>
+          </a:fontRef>
+        </p:style>
+        <p:txBody>
+          <a:bodyPr rtlCol="0" anchor="ctr"/>
+          <a:lstStyle/>
+          <a:p>
+            <a:pPr algn="ctr"/>
+          </a:p>
+        </p:txBody>
+      </p:sp>
+      <p:sp>
+        <p:nvSpPr>
+          <p:cNvPr id="3" name="TextBox 2"/>
+          <p:cNvSpPr txBox="1"/>
+          <p:nvPr/>
+        </p:nvSpPr>
+        <p:spPr>
+          <a:xfrm>
+            <a:off x="552297" y="342900"/>
+            <a:ext cx="10570464" cy="493776"/>
+          </a:xfrm>
+          <a:prstGeom prst="rect">
+            <a:avLst/>
+          </a:prstGeom>
+          <a:noFill/>
+        </p:spPr>
+        <p:txBody>
+          <a:bodyPr wrap="square" lIns="45720" rIns="45720" tIns="27432" bIns="27432" anchor="t">
+            <a:spAutoFit/>
+          </a:bodyPr>
+          <a:lstStyle/>
+          <a:p>
+            <a:pPr algn="l"/>
+            <a:r>
+              <a:rPr sz="2550" b="1" i="0">
+                <a:solidFill>
+                  <a:srgbClr val="17212B"/>
+                </a:solidFill>
+                <a:latin typeface="Arial"/>
+              </a:rPr>
+              <a:t>One Hot Encoding y RobustScaler preparan las variables</a:t>
+            </a:r>
+          </a:p>
+        </p:txBody>
+      </p:sp>
+      <p:sp>
+        <p:nvSpPr>
+          <p:cNvPr id="4" name="TextBox 3"/>
+          <p:cNvSpPr txBox="1"/>
+          <p:nvPr/>
+        </p:nvSpPr>
+        <p:spPr>
+          <a:xfrm>
+            <a:off x="571500" y="838504"/>
+            <a:ext cx="10287000" cy="283464"/>
+          </a:xfrm>
+          <a:prstGeom prst="rect">
+            <a:avLst/>
+          </a:prstGeom>
+          <a:noFill/>
+        </p:spPr>
+        <p:txBody>
+          <a:bodyPr wrap="square" lIns="45720" rIns="45720" tIns="27432" bIns="27432" anchor="t">
+            <a:spAutoFit/>
+          </a:bodyPr>
+          <a:lstStyle/>
+          <a:p>
+            <a:pPr algn="l"/>
+            <a:r>
+              <a:rPr sz="1275" b="0" i="0">
+                <a:solidFill>
+                  <a:srgbClr val="5B6570"/>
+                </a:solidFill>
+                <a:latin typeface="Arial"/>
+              </a:rPr>
+              <a:t>Fase 2 · Primero se divide y después se transforma, para que la prueba no influya en lo aprendido.</a:t>
+            </a:r>
+          </a:p>
+        </p:txBody>
+      </p:sp>
+      <p:sp>
+        <p:nvSpPr>
+          <p:cNvPr id="5" name="Rounded Rectangle 4"/>
+          <p:cNvSpPr/>
+          <p:nvPr/>
+        </p:nvSpPr>
+        <p:spPr>
+          <a:xfrm>
+            <a:off x="621792" y="1463040"/>
+            <a:ext cx="3429000" cy="3657600"/>
+          </a:xfrm>
+          <a:prstGeom prst="roundRect">
+            <a:avLst>
+              <a:gd name="adj" fmla="val 8000"/>
+            </a:avLst>
+          </a:prstGeom>
+          <a:solidFill>
+            <a:srgbClr val="F5F7F8"/>
+          </a:solidFill>
+          <a:ln w="9525">
+            <a:solidFill>
+              <a:srgbClr val="D7DCE1"/>
+            </a:solidFill>
+          </a:ln>
+          <a:effectLst/>
+        </p:spPr>
+        <p:style>
+          <a:lnRef idx="1">
+            <a:schemeClr val="accent1"/>
+          </a:lnRef>
+          <a:fillRef idx="3">
+            <a:schemeClr val="accent1"/>
+          </a:fillRef>
+          <a:effectRef idx="2">
+            <a:schemeClr val="accent1"/>
+          </a:effectRef>
+          <a:fontRef idx="minor">
+            <a:schemeClr val="lt1"/>
+          </a:fontRef>
+        </p:style>
+        <p:txBody>
+          <a:bodyPr rtlCol="0" anchor="ctr"/>
+          <a:lstStyle/>
+          <a:p>
+            <a:pPr algn="ctr"/>
+          </a:p>
+        </p:txBody>
+      </p:sp>
+      <p:sp>
+        <p:nvSpPr>
+          <p:cNvPr id="6" name="Oval 5"/>
+          <p:cNvSpPr/>
+          <p:nvPr/>
+        </p:nvSpPr>
+        <p:spPr>
+          <a:xfrm>
+            <a:off x="822960" y="1664208"/>
+            <a:ext cx="384048" cy="384048"/>
+          </a:xfrm>
+          <a:prstGeom prst="ellipse">
+            <a:avLst/>
+          </a:prstGeom>
+          <a:solidFill>
+            <a:srgbClr val="5B8DB8"/>
+          </a:solidFill>
+          <a:ln>
+            <a:noFill/>
+          </a:ln>
+          <a:effectLst/>
+        </p:spPr>
+        <p:style>
+          <a:lnRef idx="1">
+            <a:schemeClr val="accent1"/>
+          </a:lnRef>
+          <a:fillRef idx="3">
+            <a:schemeClr val="accent1"/>
+          </a:fillRef>
+          <a:effectRef idx="2">
+            <a:schemeClr val="accent1"/>
+          </a:effectRef>
+          <a:fontRef idx="minor">
+            <a:schemeClr val="lt1"/>
+          </a:fontRef>
+        </p:style>
+        <p:txBody>
+          <a:bodyPr rtlCol="0" anchor="ctr" wrap="square" lIns="0" rIns="0" tIns="27432" bIns="27432"/>
+          <a:lstStyle/>
+          <a:p>
+            <a:pPr algn="ctr"/>
+            <a:r>
+              <a:rPr sz="1400" b="1" i="0">
+                <a:solidFill>
+                  <a:srgbClr val="FFFFFF"/>
+                </a:solidFill>
+                <a:latin typeface="Arial"/>
+              </a:rPr>
+              <a:t>1</a:t>
+            </a:r>
+          </a:p>
+        </p:txBody>
+      </p:sp>
+      <p:sp>
+        <p:nvSpPr>
+          <p:cNvPr id="7" name="TextBox 6"/>
+          <p:cNvSpPr txBox="1"/>
+          <p:nvPr/>
+        </p:nvSpPr>
+        <p:spPr>
+          <a:xfrm>
+            <a:off x="1307592" y="1664208"/>
+            <a:ext cx="2606040" cy="411480"/>
+          </a:xfrm>
+          <a:prstGeom prst="rect">
+            <a:avLst/>
+          </a:prstGeom>
+          <a:noFill/>
+        </p:spPr>
+        <p:txBody>
+          <a:bodyPr wrap="square" lIns="45720" rIns="45720" tIns="27432" bIns="27432" anchor="ctr">
+            <a:spAutoFit/>
+          </a:bodyPr>
+          <a:lstStyle/>
+          <a:p>
+            <a:pPr algn="l"/>
+            <a:r>
+              <a:rPr sz="1550" b="1" i="0">
+                <a:solidFill>
+                  <a:srgbClr val="17212B"/>
+                </a:solidFill>
+                <a:latin typeface="Arial"/>
+              </a:rPr>
+              <a:t>Dividir primero</a:t>
+            </a:r>
+          </a:p>
+        </p:txBody>
+      </p:sp>
+      <p:sp>
+        <p:nvSpPr>
+          <p:cNvPr id="8" name="Rounded Rectangle 7"/>
+          <p:cNvSpPr/>
+          <p:nvPr/>
+        </p:nvSpPr>
+        <p:spPr>
+          <a:xfrm>
+            <a:off x="4325112" y="1463040"/>
+            <a:ext cx="3429000" cy="3657600"/>
+          </a:xfrm>
+          <a:prstGeom prst="roundRect">
+            <a:avLst>
+              <a:gd name="adj" fmla="val 8000"/>
+            </a:avLst>
+          </a:prstGeom>
+          <a:solidFill>
+            <a:srgbClr val="F5F7F8"/>
+          </a:solidFill>
+          <a:ln w="9525">
+            <a:solidFill>
+              <a:srgbClr val="D7DCE1"/>
+            </a:solidFill>
+          </a:ln>
+          <a:effectLst/>
+        </p:spPr>
+        <p:style>
+          <a:lnRef idx="1">
+            <a:schemeClr val="accent1"/>
+          </a:lnRef>
+          <a:fillRef idx="3">
+            <a:schemeClr val="accent1"/>
+          </a:fillRef>
+          <a:effectRef idx="2">
+            <a:schemeClr val="accent1"/>
+          </a:effectRef>
+          <a:fontRef idx="minor">
+            <a:schemeClr val="lt1"/>
+          </a:fontRef>
+        </p:style>
+        <p:txBody>
+          <a:bodyPr rtlCol="0" anchor="ctr"/>
+          <a:lstStyle/>
+          <a:p>
+            <a:pPr algn="ctr"/>
+          </a:p>
+        </p:txBody>
+      </p:sp>
+      <p:sp>
+        <p:nvSpPr>
+          <p:cNvPr id="9" name="Oval 8"/>
+          <p:cNvSpPr/>
+          <p:nvPr/>
+        </p:nvSpPr>
+        <p:spPr>
+          <a:xfrm>
+            <a:off x="4526279" y="1664208"/>
+            <a:ext cx="384048" cy="384048"/>
+          </a:xfrm>
+          <a:prstGeom prst="ellipse">
+            <a:avLst/>
+          </a:prstGeom>
+          <a:solidFill>
+            <a:srgbClr val="5B8DB8"/>
+          </a:solidFill>
+          <a:ln>
+            <a:noFill/>
+          </a:ln>
+          <a:effectLst/>
+        </p:spPr>
+        <p:style>
+          <a:lnRef idx="1">
+            <a:schemeClr val="accent1"/>
+          </a:lnRef>
+          <a:fillRef idx="3">
+            <a:schemeClr val="accent1"/>
+          </a:fillRef>
+          <a:effectRef idx="2">
+            <a:schemeClr val="accent1"/>
+          </a:effectRef>
+          <a:fontRef idx="minor">
+            <a:schemeClr val="lt1"/>
+          </a:fontRef>
+        </p:style>
+        <p:txBody>
+          <a:bodyPr rtlCol="0" anchor="ctr" wrap="square" lIns="0" rIns="0" tIns="27432" bIns="27432"/>
+          <a:lstStyle/>
+          <a:p>
+            <a:pPr algn="ctr"/>
+            <a:r>
+              <a:rPr sz="1400" b="1" i="0">
+                <a:solidFill>
+                  <a:srgbClr val="FFFFFF"/>
+                </a:solidFill>
+                <a:latin typeface="Arial"/>
+              </a:rPr>
+              <a:t>2</a:t>
+            </a:r>
+          </a:p>
+        </p:txBody>
+      </p:sp>
+      <p:sp>
+        <p:nvSpPr>
+          <p:cNvPr id="10" name="TextBox 9"/>
+          <p:cNvSpPr txBox="1"/>
+          <p:nvPr/>
+        </p:nvSpPr>
+        <p:spPr>
+          <a:xfrm>
+            <a:off x="5010912" y="1664208"/>
+            <a:ext cx="2606040" cy="411480"/>
+          </a:xfrm>
+          <a:prstGeom prst="rect">
+            <a:avLst/>
+          </a:prstGeom>
+          <a:noFill/>
+        </p:spPr>
+        <p:txBody>
+          <a:bodyPr wrap="square" lIns="45720" rIns="45720" tIns="27432" bIns="27432" anchor="ctr">
+            <a:spAutoFit/>
+          </a:bodyPr>
+          <a:lstStyle/>
+          <a:p>
+            <a:pPr algn="l"/>
+            <a:r>
+              <a:rPr sz="1550" b="1" i="0">
+                <a:solidFill>
+                  <a:srgbClr val="17212B"/>
+                </a:solidFill>
+                <a:latin typeface="Arial"/>
+              </a:rPr>
+              <a:t>One Hot Encoding · Type</a:t>
+            </a:r>
+          </a:p>
+        </p:txBody>
+      </p:sp>
+      <p:sp>
+        <p:nvSpPr>
+          <p:cNvPr id="11" name="Rounded Rectangle 10"/>
+          <p:cNvSpPr/>
+          <p:nvPr/>
+        </p:nvSpPr>
+        <p:spPr>
+          <a:xfrm>
+            <a:off x="8028431" y="1463040"/>
+            <a:ext cx="3429000" cy="3657600"/>
+          </a:xfrm>
+          <a:prstGeom prst="roundRect">
+            <a:avLst>
+              <a:gd name="adj" fmla="val 8000"/>
+            </a:avLst>
+          </a:prstGeom>
+          <a:solidFill>
+            <a:srgbClr val="F5F7F8"/>
+          </a:solidFill>
+          <a:ln w="9525">
+            <a:solidFill>
+              <a:srgbClr val="D7DCE1"/>
+            </a:solidFill>
+          </a:ln>
+          <a:effectLst/>
+        </p:spPr>
+        <p:style>
+          <a:lnRef idx="1">
+            <a:schemeClr val="accent1"/>
+          </a:lnRef>
+          <a:fillRef idx="3">
+            <a:schemeClr val="accent1"/>
+          </a:fillRef>
+          <a:effectRef idx="2">
+            <a:schemeClr val="accent1"/>
+          </a:effectRef>
+          <a:fontRef idx="minor">
+            <a:schemeClr val="lt1"/>
+          </a:fontRef>
+        </p:style>
+        <p:txBody>
+          <a:bodyPr rtlCol="0" anchor="ctr"/>
+          <a:lstStyle/>
+          <a:p>
+            <a:pPr algn="ctr"/>
+          </a:p>
+        </p:txBody>
+      </p:sp>
+      <p:sp>
+        <p:nvSpPr>
+          <p:cNvPr id="12" name="Oval 11"/>
+          <p:cNvSpPr/>
+          <p:nvPr/>
+        </p:nvSpPr>
+        <p:spPr>
+          <a:xfrm>
+            <a:off x="8229600" y="1664208"/>
+            <a:ext cx="384048" cy="384048"/>
+          </a:xfrm>
+          <a:prstGeom prst="ellipse">
+            <a:avLst/>
+          </a:prstGeom>
+          <a:solidFill>
+            <a:srgbClr val="5B8DB8"/>
+          </a:solidFill>
+          <a:ln>
+            <a:noFill/>
+          </a:ln>
+          <a:effectLst/>
+        </p:spPr>
+        <p:style>
+          <a:lnRef idx="1">
+            <a:schemeClr val="accent1"/>
+          </a:lnRef>
+          <a:fillRef idx="3">
+            <a:schemeClr val="accent1"/>
+          </a:fillRef>
+          <a:effectRef idx="2">
+            <a:schemeClr val="accent1"/>
+          </a:effectRef>
+          <a:fontRef idx="minor">
+            <a:schemeClr val="lt1"/>
+          </a:fontRef>
+        </p:style>
+        <p:txBody>
+          <a:bodyPr rtlCol="0" anchor="ctr" wrap="square" lIns="0" rIns="0" tIns="27432" bIns="27432"/>
+          <a:lstStyle/>
+          <a:p>
+            <a:pPr algn="ctr"/>
+            <a:r>
+              <a:rPr sz="1400" b="1" i="0">
+                <a:solidFill>
+                  <a:srgbClr val="FFFFFF"/>
+                </a:solidFill>
+                <a:latin typeface="Arial"/>
+              </a:rPr>
+              <a:t>3</a:t>
+            </a:r>
+          </a:p>
+        </p:txBody>
+      </p:sp>
+      <p:sp>
+        <p:nvSpPr>
+          <p:cNvPr id="13" name="TextBox 12"/>
+          <p:cNvSpPr txBox="1"/>
+          <p:nvPr/>
+        </p:nvSpPr>
+        <p:spPr>
+          <a:xfrm>
+            <a:off x="8714232" y="1664208"/>
+            <a:ext cx="2606040" cy="411480"/>
+          </a:xfrm>
+          <a:prstGeom prst="rect">
+            <a:avLst/>
+          </a:prstGeom>
+          <a:noFill/>
+        </p:spPr>
+        <p:txBody>
+          <a:bodyPr wrap="square" lIns="45720" rIns="45720" tIns="27432" bIns="27432" anchor="ctr">
+            <a:spAutoFit/>
+          </a:bodyPr>
+          <a:lstStyle/>
+          <a:p>
+            <a:pPr algn="l"/>
+            <a:r>
+              <a:rPr sz="1550" b="1" i="0">
+                <a:solidFill>
+                  <a:srgbClr val="17212B"/>
+                </a:solidFill>
+                <a:latin typeface="Arial"/>
+              </a:rPr>
+              <a:t>RobustScaler</a:t>
+            </a:r>
+          </a:p>
+        </p:txBody>
+      </p:sp>
+      <p:sp>
+        <p:nvSpPr>
+          <p:cNvPr id="14" name="Rectangle 13"/>
+          <p:cNvSpPr/>
+          <p:nvPr/>
+        </p:nvSpPr>
+        <p:spPr>
+          <a:xfrm>
+            <a:off x="850392" y="2377440"/>
+            <a:ext cx="2377440" cy="502920"/>
+          </a:xfrm>
+          <a:prstGeom prst="rect">
+            <a:avLst/>
+          </a:prstGeom>
+          <a:solidFill>
+            <a:srgbClr val="5B8DB8"/>
+          </a:solidFill>
+          <a:ln>
+            <a:noFill/>
+          </a:ln>
+          <a:effectLst/>
+        </p:spPr>
+        <p:style>
+          <a:lnRef idx="1">
+            <a:schemeClr val="accent1"/>
+          </a:lnRef>
+          <a:fillRef idx="3">
+            <a:schemeClr val="accent1"/>
+          </a:fillRef>
+          <a:effectRef idx="2">
+            <a:schemeClr val="accent1"/>
+          </a:effectRef>
+          <a:fontRef idx="minor">
+            <a:schemeClr val="lt1"/>
+          </a:fontRef>
+        </p:style>
+        <p:txBody>
+          <a:bodyPr rtlCol="0" anchor="ctr"/>
+          <a:lstStyle/>
+          <a:p>
+            <a:pPr algn="ctr"/>
+          </a:p>
+        </p:txBody>
+      </p:sp>
+      <p:sp>
+        <p:nvSpPr>
+          <p:cNvPr id="15" name="Rectangle 14"/>
+          <p:cNvSpPr/>
+          <p:nvPr/>
+        </p:nvSpPr>
+        <p:spPr>
+          <a:xfrm>
+            <a:off x="3227832" y="2377440"/>
+            <a:ext cx="594360" cy="502920"/>
+          </a:xfrm>
+          <a:prstGeom prst="rect">
+            <a:avLst/>
+          </a:prstGeom>
+          <a:solidFill>
+            <a:srgbClr val="C94C4C"/>
+          </a:solidFill>
+          <a:ln>
+            <a:noFill/>
+          </a:ln>
+          <a:effectLst/>
+        </p:spPr>
+        <p:style>
+          <a:lnRef idx="1">
+            <a:schemeClr val="accent1"/>
+          </a:lnRef>
+          <a:fillRef idx="3">
+            <a:schemeClr val="accent1"/>
+          </a:fillRef>
+          <a:effectRef idx="2">
+            <a:schemeClr val="accent1"/>
+          </a:effectRef>
+          <a:fontRef idx="minor">
+            <a:schemeClr val="lt1"/>
+          </a:fontRef>
+        </p:style>
+        <p:txBody>
+          <a:bodyPr rtlCol="0" anchor="ctr"/>
+          <a:lstStyle/>
+          <a:p>
+            <a:pPr algn="ctr"/>
+          </a:p>
+        </p:txBody>
+      </p:sp>
+      <p:sp>
+        <p:nvSpPr>
+          <p:cNvPr id="16" name="TextBox 15"/>
+          <p:cNvSpPr txBox="1"/>
+          <p:nvPr/>
+        </p:nvSpPr>
+        <p:spPr>
+          <a:xfrm>
+            <a:off x="850392" y="2377440"/>
+            <a:ext cx="2377440" cy="502920"/>
+          </a:xfrm>
+          <a:prstGeom prst="rect">
+            <a:avLst/>
+          </a:prstGeom>
+          <a:noFill/>
+        </p:spPr>
+        <p:txBody>
+          <a:bodyPr wrap="square" lIns="45720" rIns="45720" tIns="27432" bIns="27432" anchor="ctr">
+            <a:spAutoFit/>
+          </a:bodyPr>
+          <a:lstStyle/>
+          <a:p>
+            <a:pPr algn="ctr"/>
+            <a:r>
+              <a:rPr sz="1200" b="1" i="0">
+                <a:solidFill>
+                  <a:srgbClr val="FFFFFF"/>
+                </a:solidFill>
+                <a:latin typeface="Arial"/>
+              </a:rPr>
+              <a:t>8.000 entrenamiento</a:t>
+            </a:r>
+          </a:p>
+        </p:txBody>
+      </p:sp>
+      <p:sp>
+        <p:nvSpPr>
+          <p:cNvPr id="17" name="TextBox 16"/>
+          <p:cNvSpPr txBox="1"/>
+          <p:nvPr/>
+        </p:nvSpPr>
+        <p:spPr>
+          <a:xfrm>
+            <a:off x="3227832" y="2377440"/>
+            <a:ext cx="594360" cy="502920"/>
+          </a:xfrm>
+          <a:prstGeom prst="rect">
+            <a:avLst/>
+          </a:prstGeom>
+          <a:noFill/>
+        </p:spPr>
+        <p:txBody>
+          <a:bodyPr wrap="square" lIns="45720" rIns="45720" tIns="27432" bIns="27432" anchor="ctr">
+            <a:spAutoFit/>
+          </a:bodyPr>
+          <a:lstStyle/>
+          <a:p>
+            <a:pPr algn="ctr"/>
+            <a:r>
+              <a:rPr sz="1200" b="1" i="0">
+                <a:solidFill>
+                  <a:srgbClr val="FFFFFF"/>
+                </a:solidFill>
+                <a:latin typeface="Arial"/>
+              </a:rPr>
+              <a:t>2.000</a:t>
+            </a:r>
+          </a:p>
+        </p:txBody>
+      </p:sp>
+      <p:sp>
+        <p:nvSpPr>
+          <p:cNvPr id="18" name="TextBox 17"/>
+          <p:cNvSpPr txBox="1"/>
+          <p:nvPr/>
+        </p:nvSpPr>
+        <p:spPr>
+          <a:xfrm>
+            <a:off x="850392" y="3063240"/>
+            <a:ext cx="2971800" cy="1920240"/>
+          </a:xfrm>
+          <a:prstGeom prst="rect">
+            <a:avLst/>
+          </a:prstGeom>
+          <a:noFill/>
+        </p:spPr>
+        <p:txBody>
+          <a:bodyPr wrap="square" lIns="45720" rIns="45720" tIns="27432" bIns="27432" anchor="t">
+            <a:spAutoFit/>
+          </a:bodyPr>
+          <a:lstStyle/>
+          <a:p>
+            <a:pPr algn="l">
+              <a:spcAft>
+                <a:spcPts val="600"/>
+              </a:spcAft>
+            </a:pPr>
+            <a:r>
+              <a:rPr sz="1300" b="0" i="0">
+                <a:solidFill>
+                  <a:srgbClr val="17212B"/>
+                </a:solidFill>
+                <a:latin typeface="Arial"/>
+              </a:rPr>
+              <a:t>División 80/20 estratificada: ambas partes conservan 3,39 % de fallas.</a:t>
+            </a:r>
+          </a:p>
+          <a:p>
+            <a:pPr algn="l">
+              <a:spcAft>
+                <a:spcPts val="600"/>
+              </a:spcAft>
+            </a:pPr>
+            <a:r>
+              <a:rPr sz="1300" b="0" i="0">
+                <a:solidFill>
+                  <a:srgbClr val="17212B"/>
+                </a:solidFill>
+                <a:latin typeface="Arial"/>
+              </a:rPr>
+              <a:t>Semilla 42 para repetir la misma división.</a:t>
+            </a:r>
+          </a:p>
+          <a:p>
+            <a:pPr algn="l">
+              <a:spcAft>
+                <a:spcPts val="600"/>
+              </a:spcAft>
+            </a:pPr>
+            <a:r>
+              <a:rPr sz="1300" b="0" i="0">
+                <a:solidFill>
+                  <a:srgbClr val="17212B"/>
+                </a:solidFill>
+                <a:latin typeface="Arial"/>
+              </a:rPr>
+              <a:t>Medianas, IQR y categorías se aprenden solo de entrenamiento.</a:t>
+            </a:r>
+          </a:p>
+        </p:txBody>
+      </p:sp>
+      <p:graphicFrame>
+        <p:nvGraphicFramePr>
+          <p:cNvPr id="19" name="Table 18"/>
+          <p:cNvGraphicFramePr>
+            <a:graphicFrameLocks noGrp="1"/>
+          </p:cNvGraphicFramePr>
+          <p:nvPr/>
+        </p:nvGraphicFramePr>
+        <p:xfrm>
+          <a:off x="4553712" y="2331720"/>
+          <a:ext cx="2971800" cy="1280160"/>
+        </p:xfrm>
+        <a:graphic>
+          <a:graphicData uri="http://schemas.openxmlformats.org/drawingml/2006/table">
+            <a:tbl>
+              <a:tblPr firstRow="0" bandRow="0">
+                <a:tableStyleId>{5C22544A-7EE6-4342-B048-85BDC9FD1C3A}</a:tableStyleId>
+              </a:tblPr>
+              <a:tblGrid>
+                <a:gridCol w="742950"/>
+                <a:gridCol w="742950"/>
+                <a:gridCol w="742950"/>
+                <a:gridCol w="742950"/>
+              </a:tblGrid>
+              <a:tr h="320040">
+                <a:tc>
+                  <a:txBody>
+                    <a:bodyPr/>
+                    <a:lstStyle/>
+                    <a:p>
+                      <a:pPr algn="ctr"/>
+                      <a:r>
+                        <a:rPr sz="1200" b="1">
+                          <a:solidFill>
+                            <a:srgbClr val="17212B"/>
+                          </a:solidFill>
+                          <a:latin typeface="Arial"/>
+                        </a:rPr>
+                        <a:t>Type</a:t>
+                      </a:r>
+                    </a:p>
+                  </a:txBody>
+                  <a:tcPr marL="27432" marR="27432" marT="18288" marB="18288">
+                    <a:solidFill>
+                      <a:srgbClr val="EAF2F8"/>
+                    </a:solidFill>
+                  </a:tcPr>
+                </a:tc>
+                <a:tc>
+                  <a:txBody>
+                    <a:bodyPr/>
+                    <a:lstStyle/>
+                    <a:p>
+                      <a:pPr algn="ctr"/>
+                      <a:r>
+                        <a:rPr sz="1200" b="1">
+                          <a:solidFill>
+                            <a:srgbClr val="17212B"/>
+                          </a:solidFill>
+                          <a:latin typeface="Arial"/>
+                        </a:rPr>
+                        <a:t>Type_H</a:t>
+                      </a:r>
+                    </a:p>
+                  </a:txBody>
+                  <a:tcPr marL="27432" marR="27432" marT="18288" marB="18288">
+                    <a:solidFill>
+                      <a:srgbClr val="EAF2F8"/>
+                    </a:solidFill>
+                  </a:tcPr>
+                </a:tc>
+                <a:tc>
+                  <a:txBody>
+                    <a:bodyPr/>
+                    <a:lstStyle/>
+                    <a:p>
+                      <a:pPr algn="ctr"/>
+                      <a:r>
+                        <a:rPr sz="1200" b="1">
+                          <a:solidFill>
+                            <a:srgbClr val="17212B"/>
+                          </a:solidFill>
+                          <a:latin typeface="Arial"/>
+                        </a:rPr>
+                        <a:t>Type_L</a:t>
+                      </a:r>
+                    </a:p>
+                  </a:txBody>
+                  <a:tcPr marL="27432" marR="27432" marT="18288" marB="18288">
+                    <a:solidFill>
+                      <a:srgbClr val="EAF2F8"/>
+                    </a:solidFill>
+                  </a:tcPr>
+                </a:tc>
+                <a:tc>
+                  <a:txBody>
+                    <a:bodyPr/>
+                    <a:lstStyle/>
+                    <a:p>
+                      <a:pPr algn="ctr"/>
+                      <a:r>
+                        <a:rPr sz="1200" b="1">
+                          <a:solidFill>
+                            <a:srgbClr val="17212B"/>
+                          </a:solidFill>
+                          <a:latin typeface="Arial"/>
+                        </a:rPr>
+                        <a:t>Type_M</a:t>
+                      </a:r>
+                    </a:p>
+                  </a:txBody>
+                  <a:tcPr marL="27432" marR="27432" marT="18288" marB="18288">
+                    <a:solidFill>
+                      <a:srgbClr val="EAF2F8"/>
+                    </a:solidFill>
+                  </a:tcPr>
+                </a:tc>
+              </a:tr>
+              <a:tr h="320040">
+                <a:tc>
+                  <a:txBody>
+                    <a:bodyPr/>
+                    <a:lstStyle/>
+                    <a:p>
+                      <a:pPr algn="ctr"/>
+                      <a:r>
+                        <a:rPr sz="1200" b="1">
+                          <a:solidFill>
+                            <a:srgbClr val="17212B"/>
+                          </a:solidFill>
+                          <a:latin typeface="Arial"/>
+                        </a:rPr>
+                        <a:t>L</a:t>
+                      </a:r>
+                    </a:p>
+                  </a:txBody>
+                  <a:tcPr marL="27432" marR="27432" marT="18288" marB="18288">
+                    <a:solidFill>
+                      <a:srgbClr val="FFFFFF"/>
+                    </a:solidFill>
+                  </a:tcPr>
+                </a:tc>
+                <a:tc>
+                  <a:txBody>
+                    <a:bodyPr/>
+                    <a:lstStyle/>
+                    <a:p>
+                      <a:pPr algn="ctr"/>
+                      <a:r>
+                        <a:rPr sz="1200" b="0">
+                          <a:solidFill>
+                            <a:srgbClr val="17212B"/>
+                          </a:solidFill>
+                          <a:latin typeface="Arial"/>
+                        </a:rPr>
+                        <a:t>0</a:t>
+                      </a:r>
+                    </a:p>
+                  </a:txBody>
+                  <a:tcPr marL="27432" marR="27432" marT="18288" marB="18288">
+                    <a:solidFill>
+                      <a:srgbClr val="FFFFFF"/>
+                    </a:solidFill>
+                  </a:tcPr>
+                </a:tc>
+                <a:tc>
+                  <a:txBody>
+                    <a:bodyPr/>
+                    <a:lstStyle/>
+                    <a:p>
+                      <a:pPr algn="ctr"/>
+                      <a:r>
+                        <a:rPr sz="1200" b="1">
+                          <a:solidFill>
+                            <a:srgbClr val="C94C4C"/>
+                          </a:solidFill>
+                          <a:latin typeface="Arial"/>
+                        </a:rPr>
+                        <a:t>1</a:t>
+                      </a:r>
+                    </a:p>
+                  </a:txBody>
+                  <a:tcPr marL="27432" marR="27432" marT="18288" marB="18288">
+                    <a:solidFill>
+                      <a:srgbClr val="FFFFFF"/>
+                    </a:solidFill>
+                  </a:tcPr>
+                </a:tc>
+                <a:tc>
+                  <a:txBody>
+                    <a:bodyPr/>
+                    <a:lstStyle/>
+                    <a:p>
+                      <a:pPr algn="ctr"/>
+                      <a:r>
+                        <a:rPr sz="1200" b="0">
+                          <a:solidFill>
+                            <a:srgbClr val="17212B"/>
+                          </a:solidFill>
+                          <a:latin typeface="Arial"/>
+                        </a:rPr>
+                        <a:t>0</a:t>
+                      </a:r>
+                    </a:p>
+                  </a:txBody>
+                  <a:tcPr marL="27432" marR="27432" marT="18288" marB="18288">
+                    <a:solidFill>
+                      <a:srgbClr val="FFFFFF"/>
+                    </a:solidFill>
+                  </a:tcPr>
+                </a:tc>
+              </a:tr>
+              <a:tr h="320040">
+                <a:tc>
+                  <a:txBody>
+                    <a:bodyPr/>
+                    <a:lstStyle/>
+                    <a:p>
+                      <a:pPr algn="ctr"/>
+                      <a:r>
+                        <a:rPr sz="1200" b="1">
+                          <a:solidFill>
+                            <a:srgbClr val="17212B"/>
+                          </a:solidFill>
+                          <a:latin typeface="Arial"/>
+                        </a:rPr>
+                        <a:t>M</a:t>
+                      </a:r>
+                    </a:p>
+                  </a:txBody>
+                  <a:tcPr marL="27432" marR="27432" marT="18288" marB="18288">
+                    <a:solidFill>
+                      <a:srgbClr val="FFFFFF"/>
+                    </a:solidFill>
+                  </a:tcPr>
+                </a:tc>
+                <a:tc>
+                  <a:txBody>
+                    <a:bodyPr/>
+                    <a:lstStyle/>
+                    <a:p>
+                      <a:pPr algn="ctr"/>
+                      <a:r>
+                        <a:rPr sz="1200" b="0">
+                          <a:solidFill>
+                            <a:srgbClr val="17212B"/>
+                          </a:solidFill>
+                          <a:latin typeface="Arial"/>
+                        </a:rPr>
+                        <a:t>0</a:t>
+                      </a:r>
+                    </a:p>
+                  </a:txBody>
+                  <a:tcPr marL="27432" marR="27432" marT="18288" marB="18288">
+                    <a:solidFill>
+                      <a:srgbClr val="FFFFFF"/>
+                    </a:solidFill>
+                  </a:tcPr>
+                </a:tc>
+                <a:tc>
+                  <a:txBody>
+                    <a:bodyPr/>
+                    <a:lstStyle/>
+                    <a:p>
+                      <a:pPr algn="ctr"/>
+                      <a:r>
+                        <a:rPr sz="1200" b="0">
+                          <a:solidFill>
+                            <a:srgbClr val="17212B"/>
+                          </a:solidFill>
+                          <a:latin typeface="Arial"/>
+                        </a:rPr>
+                        <a:t>0</a:t>
+                      </a:r>
+                    </a:p>
+                  </a:txBody>
+                  <a:tcPr marL="27432" marR="27432" marT="18288" marB="18288">
+                    <a:solidFill>
+                      <a:srgbClr val="FFFFFF"/>
+                    </a:solidFill>
+                  </a:tcPr>
+                </a:tc>
+                <a:tc>
+                  <a:txBody>
+                    <a:bodyPr/>
+                    <a:lstStyle/>
+                    <a:p>
+                      <a:pPr algn="ctr"/>
+                      <a:r>
+                        <a:rPr sz="1200" b="1">
+                          <a:solidFill>
+                            <a:srgbClr val="C94C4C"/>
+                          </a:solidFill>
+                          <a:latin typeface="Arial"/>
+                        </a:rPr>
+                        <a:t>1</a:t>
+                      </a:r>
+                    </a:p>
+                  </a:txBody>
+                  <a:tcPr marL="27432" marR="27432" marT="18288" marB="18288">
+                    <a:solidFill>
+                      <a:srgbClr val="FFFFFF"/>
+                    </a:solidFill>
+                  </a:tcPr>
+                </a:tc>
+              </a:tr>
+              <a:tr h="320040">
+                <a:tc>
+                  <a:txBody>
+                    <a:bodyPr/>
+                    <a:lstStyle/>
+                    <a:p>
+                      <a:pPr algn="ctr"/>
+                      <a:r>
+                        <a:rPr sz="1200" b="1">
+                          <a:solidFill>
+                            <a:srgbClr val="17212B"/>
+                          </a:solidFill>
+                          <a:latin typeface="Arial"/>
+                        </a:rPr>
+                        <a:t>H</a:t>
+                      </a:r>
+                    </a:p>
+                  </a:txBody>
+                  <a:tcPr marL="27432" marR="27432" marT="18288" marB="18288">
+                    <a:solidFill>
+                      <a:srgbClr val="FFFFFF"/>
+                    </a:solidFill>
+                  </a:tcPr>
+                </a:tc>
+                <a:tc>
+                  <a:txBody>
+                    <a:bodyPr/>
+                    <a:lstStyle/>
+                    <a:p>
+                      <a:pPr algn="ctr"/>
+                      <a:r>
+                        <a:rPr sz="1200" b="1">
+                          <a:solidFill>
+                            <a:srgbClr val="C94C4C"/>
+                          </a:solidFill>
+                          <a:latin typeface="Arial"/>
+                        </a:rPr>
+                        <a:t>1</a:t>
+                      </a:r>
+                    </a:p>
+                  </a:txBody>
+                  <a:tcPr marL="27432" marR="27432" marT="18288" marB="18288">
+                    <a:solidFill>
+                      <a:srgbClr val="FFFFFF"/>
+                    </a:solidFill>
+                  </a:tcPr>
+                </a:tc>
+                <a:tc>
+                  <a:txBody>
+                    <a:bodyPr/>
+                    <a:lstStyle/>
+                    <a:p>
+                      <a:pPr algn="ctr"/>
+                      <a:r>
+                        <a:rPr sz="1200" b="0">
+                          <a:solidFill>
+                            <a:srgbClr val="17212B"/>
+                          </a:solidFill>
+                          <a:latin typeface="Arial"/>
+                        </a:rPr>
+                        <a:t>0</a:t>
+                      </a:r>
+                    </a:p>
+                  </a:txBody>
+                  <a:tcPr marL="27432" marR="27432" marT="18288" marB="18288">
+                    <a:solidFill>
+                      <a:srgbClr val="FFFFFF"/>
+                    </a:solidFill>
+                  </a:tcPr>
+                </a:tc>
+                <a:tc>
+                  <a:txBody>
+                    <a:bodyPr/>
+                    <a:lstStyle/>
+                    <a:p>
+                      <a:pPr algn="ctr"/>
+                      <a:r>
+                        <a:rPr sz="1200" b="0">
+                          <a:solidFill>
+                            <a:srgbClr val="17212B"/>
+                          </a:solidFill>
+                          <a:latin typeface="Arial"/>
+                        </a:rPr>
+                        <a:t>0</a:t>
+                      </a:r>
+                    </a:p>
+                  </a:txBody>
+                  <a:tcPr marL="27432" marR="27432" marT="18288" marB="18288">
+                    <a:solidFill>
+                      <a:srgbClr val="FFFFFF"/>
+                    </a:solidFill>
+                  </a:tcPr>
+                </a:tc>
+              </a:tr>
+            </a:tbl>
+          </a:graphicData>
+        </a:graphic>
+      </p:graphicFrame>
+      <p:sp>
+        <p:nvSpPr>
+          <p:cNvPr id="20" name="TextBox 19"/>
+          <p:cNvSpPr txBox="1"/>
+          <p:nvPr/>
+        </p:nvSpPr>
+        <p:spPr>
+          <a:xfrm>
+            <a:off x="4553712" y="3749039"/>
+            <a:ext cx="2971800" cy="1280160"/>
+          </a:xfrm>
+          <a:prstGeom prst="rect">
+            <a:avLst/>
+          </a:prstGeom>
+          <a:noFill/>
+        </p:spPr>
+        <p:txBody>
+          <a:bodyPr wrap="square" lIns="45720" rIns="45720" tIns="27432" bIns="27432" anchor="t">
+            <a:spAutoFit/>
+          </a:bodyPr>
+          <a:lstStyle/>
+          <a:p>
+            <a:pPr algn="l">
+              <a:spcAft>
+                <a:spcPts val="600"/>
+              </a:spcAft>
+            </a:pPr>
+            <a:r>
+              <a:rPr sz="1300" b="0" i="0">
+                <a:solidFill>
+                  <a:srgbClr val="17212B"/>
+                </a:solidFill>
+                <a:latin typeface="Arial"/>
+              </a:rPr>
+              <a:t>Convierte la letra en columnas 0/1.</a:t>
+            </a:r>
+          </a:p>
+          <a:p>
+            <a:pPr algn="l">
+              <a:spcAft>
+                <a:spcPts val="600"/>
+              </a:spcAft>
+            </a:pPr>
+            <a:r>
+              <a:rPr sz="1300" b="0" i="0">
+                <a:solidFill>
+                  <a:srgbClr val="17212B"/>
+                </a:solidFill>
+                <a:latin typeface="Arial"/>
+              </a:rPr>
+              <a:t>No inventa un orden falso entre L, M y H.</a:t>
+            </a:r>
+          </a:p>
+        </p:txBody>
+      </p:sp>
+      <p:sp>
+        <p:nvSpPr>
+          <p:cNvPr id="21" name="Rounded Rectangle 20"/>
+          <p:cNvSpPr/>
+          <p:nvPr/>
+        </p:nvSpPr>
+        <p:spPr>
+          <a:xfrm>
+            <a:off x="8257031" y="2377440"/>
+            <a:ext cx="2971800" cy="685800"/>
+          </a:xfrm>
+          <a:prstGeom prst="roundRect">
+            <a:avLst>
+              <a:gd name="adj" fmla="val 8000"/>
+            </a:avLst>
+          </a:prstGeom>
+          <a:solidFill>
+            <a:srgbClr val="FFFFFF"/>
+          </a:solidFill>
+          <a:ln w="9525">
+            <a:solidFill>
+              <a:srgbClr val="D7DCE1"/>
+            </a:solidFill>
+          </a:ln>
+          <a:effectLst/>
+        </p:spPr>
+        <p:style>
+          <a:lnRef idx="1">
+            <a:schemeClr val="accent1"/>
+          </a:lnRef>
+          <a:fillRef idx="3">
+            <a:schemeClr val="accent1"/>
+          </a:fillRef>
+          <a:effectRef idx="2">
+            <a:schemeClr val="accent1"/>
+          </a:effectRef>
+          <a:fontRef idx="minor">
+            <a:schemeClr val="lt1"/>
+          </a:fontRef>
+        </p:style>
+        <p:txBody>
+          <a:bodyPr rtlCol="0" anchor="ctr"/>
+          <a:lstStyle/>
+          <a:p>
+            <a:pPr algn="ctr"/>
+          </a:p>
+        </p:txBody>
+      </p:sp>
+      <p:sp>
+        <p:nvSpPr>
+          <p:cNvPr id="22" name="TextBox 21"/>
+          <p:cNvSpPr txBox="1"/>
+          <p:nvPr/>
+        </p:nvSpPr>
+        <p:spPr>
+          <a:xfrm>
+            <a:off x="8257031" y="2377440"/>
+            <a:ext cx="2971800" cy="685800"/>
+          </a:xfrm>
+          <a:prstGeom prst="rect">
+            <a:avLst/>
+          </a:prstGeom>
+          <a:noFill/>
+        </p:spPr>
+        <p:txBody>
+          <a:bodyPr wrap="square" lIns="45720" rIns="45720" tIns="27432" bIns="27432" anchor="ctr">
+            <a:spAutoFit/>
+          </a:bodyPr>
+          <a:lstStyle/>
+          <a:p>
+            <a:pPr algn="ctr"/>
+            <a:r>
+              <a:rPr sz="1500" b="1" i="0">
+                <a:solidFill>
+                  <a:srgbClr val="356A96"/>
+                </a:solidFill>
+                <a:latin typeface="Courier New"/>
+              </a:rPr>
+              <a:t>(valor − mediana) / IQR</a:t>
+            </a:r>
+          </a:p>
+        </p:txBody>
+      </p:sp>
+      <p:sp>
+        <p:nvSpPr>
+          <p:cNvPr id="23" name="TextBox 22"/>
+          <p:cNvSpPr txBox="1"/>
+          <p:nvPr/>
+        </p:nvSpPr>
+        <p:spPr>
+          <a:xfrm>
+            <a:off x="8257031" y="3246120"/>
+            <a:ext cx="2971800" cy="1737360"/>
+          </a:xfrm>
+          <a:prstGeom prst="rect">
+            <a:avLst/>
+          </a:prstGeom>
+          <a:noFill/>
+        </p:spPr>
+        <p:txBody>
+          <a:bodyPr wrap="square" lIns="45720" rIns="45720" tIns="27432" bIns="27432" anchor="t">
+            <a:spAutoFit/>
+          </a:bodyPr>
+          <a:lstStyle/>
+          <a:p>
+            <a:pPr algn="l">
+              <a:spcAft>
+                <a:spcPts val="600"/>
+              </a:spcAft>
+            </a:pPr>
+            <a:r>
+              <a:rPr sz="1300" b="0" i="0">
+                <a:solidFill>
+                  <a:srgbClr val="17212B"/>
+                </a:solidFill>
+                <a:latin typeface="Arial"/>
+              </a:rPr>
+              <a:t>Se aplica a las 5 numéricas: temperaturas, velocidad, torque y desgaste.</a:t>
+            </a:r>
+          </a:p>
+          <a:p>
+            <a:pPr algn="l">
+              <a:spcAft>
+                <a:spcPts val="600"/>
+              </a:spcAft>
+            </a:pPr>
+            <a:r>
+              <a:rPr sz="1300" b="0" i="0">
+                <a:solidFill>
+                  <a:srgbClr val="17212B"/>
+                </a:solidFill>
+                <a:latin typeface="Arial"/>
+              </a:rPr>
+              <a:t>Mediana e IQR se afectan menos por valores extremos que la media.</a:t>
+            </a:r>
+          </a:p>
+        </p:txBody>
+      </p:sp>
+      <p:sp>
+        <p:nvSpPr>
+          <p:cNvPr id="24" name="TextBox 23"/>
+          <p:cNvSpPr txBox="1"/>
+          <p:nvPr/>
+        </p:nvSpPr>
+        <p:spPr>
+          <a:xfrm>
+            <a:off x="621792" y="5349240"/>
+            <a:ext cx="10881360" cy="411480"/>
+          </a:xfrm>
+          <a:prstGeom prst="rect">
+            <a:avLst/>
+          </a:prstGeom>
+          <a:noFill/>
+        </p:spPr>
+        <p:txBody>
+          <a:bodyPr wrap="square" lIns="45720" rIns="45720" tIns="27432" bIns="27432" anchor="t">
+            <a:spAutoFit/>
+          </a:bodyPr>
+          <a:lstStyle/>
+          <a:p>
+            <a:pPr algn="l"/>
+            <a:r>
+              <a:rPr sz="1400" b="1" i="0">
+                <a:solidFill>
+                  <a:srgbClr val="17212B"/>
+                </a:solidFill>
+                <a:latin typeface="Arial"/>
+              </a:rPr>
+              <a:t>Resultado: </a:t>
+            </a:r>
+            <a:r>
+              <a:rPr sz="1400" b="0" i="0">
+                <a:solidFill>
+                  <a:srgbClr val="17212B"/>
+                </a:solidFill>
+                <a:latin typeface="Arial"/>
+              </a:rPr>
+              <a:t>3 columnas de Type + 5 numéricas + Machine failure = 9 columnas, en entrenamiento y prueba.</a:t>
+            </a:r>
+          </a:p>
+        </p:txBody>
+      </p:sp>
+      <p:sp>
+        <p:nvSpPr>
+          <p:cNvPr id="25" name="TextBox 24"/>
+          <p:cNvSpPr txBox="1"/>
+          <p:nvPr/>
+        </p:nvSpPr>
+        <p:spPr>
+          <a:xfrm>
+            <a:off x="11334902" y="6305702"/>
+            <a:ext cx="400050" cy="228600"/>
+          </a:xfrm>
+          <a:prstGeom prst="rect">
+            <a:avLst/>
+          </a:prstGeom>
+          <a:noFill/>
+        </p:spPr>
+        <p:txBody>
+          <a:bodyPr wrap="square" lIns="45720" rIns="45720" tIns="27432" bIns="27432" anchor="t">
+            <a:spAutoFit/>
+          </a:bodyPr>
+          <a:lstStyle/>
+          <a:p>
+            <a:pPr algn="r"/>
+            <a:r>
+              <a:rPr sz="1050" b="0" i="0">
+                <a:solidFill>
+                  <a:srgbClr val="5B6570"/>
+                </a:solidFill>
+                <a:latin typeface="Arial"/>
+              </a:rPr>
+              <a:t>5</a:t>
+            </a:r>
+          </a:p>
+        </p:txBody>
+      </p:sp>
+    </p:spTree>
+  </p:cSld>
+  <p:clrMapOvr>
+    <a:masterClrMapping/>
+  </p:clrMapOvr>
+</p:sld>
+</file>
+
+<file path=ppt/slides/slide11.xml><?xml version="1.0" encoding="utf-8"?>
+<p:sld xmlns:a="http://schemas.openxmlformats.org/drawingml/2006/main" xmlns:p="http://schemas.openxmlformats.org/presentationml/2006/main" xmlns:r="http://schemas.openxmlformats.org/officeDocument/2006/relationships">
+  <p:cSld>
+    <p:bg>
+      <p:bgPr>
+        <a:solidFill>
+          <a:srgbClr val="FFFFFF"/>
+        </a:solidFill>
+        <a:effectLst/>
+      </p:bgPr>
+    </p:bg>
+    <p:spTree>
+      <p:nvGrpSpPr>
+        <p:cNvPr id="1" name=""/>
+        <p:cNvGrpSpPr/>
+        <p:nvPr/>
+      </p:nvGrpSpPr>
+      <p:grpSpPr/>
+      <p:sp>
+        <p:nvSpPr>
+          <p:cNvPr id="2" name="Rectangle 1"/>
+          <p:cNvSpPr/>
+          <p:nvPr/>
+        </p:nvSpPr>
+        <p:spPr>
+          <a:xfrm>
+            <a:off x="0" y="0"/>
+            <a:ext cx="171450" cy="6858000"/>
+          </a:xfrm>
+          <a:prstGeom prst="rect">
+            <a:avLst/>
+          </a:prstGeom>
+          <a:solidFill>
+            <a:srgbClr val="5B8DB8"/>
+          </a:solidFill>
+          <a:ln>
+            <a:noFill/>
+          </a:ln>
+          <a:effectLst/>
+        </p:spPr>
+        <p:style>
+          <a:lnRef idx="1">
+            <a:schemeClr val="accent1"/>
+          </a:lnRef>
+          <a:fillRef idx="3">
+            <a:schemeClr val="accent1"/>
+          </a:fillRef>
+          <a:effectRef idx="2">
+            <a:schemeClr val="accent1"/>
+          </a:effectRef>
+          <a:fontRef idx="minor">
+            <a:schemeClr val="lt1"/>
+          </a:fontRef>
+        </p:style>
+        <p:txBody>
+          <a:bodyPr rtlCol="0" anchor="ctr"/>
+          <a:lstStyle/>
+          <a:p>
+            <a:pPr algn="ctr"/>
+          </a:p>
+        </p:txBody>
+      </p:sp>
+      <p:sp>
+        <p:nvSpPr>
+          <p:cNvPr id="3" name="TextBox 2"/>
+          <p:cNvSpPr txBox="1"/>
+          <p:nvPr/>
+        </p:nvSpPr>
+        <p:spPr>
+          <a:xfrm>
+            <a:off x="552297" y="342900"/>
+            <a:ext cx="10570464" cy="493776"/>
+          </a:xfrm>
+          <a:prstGeom prst="rect">
+            <a:avLst/>
+          </a:prstGeom>
+          <a:noFill/>
+        </p:spPr>
+        <p:txBody>
+          <a:bodyPr wrap="square" lIns="45720" rIns="45720" tIns="27432" bIns="27432" anchor="t">
+            <a:spAutoFit/>
+          </a:bodyPr>
+          <a:lstStyle/>
+          <a:p>
+            <a:pPr algn="l"/>
+            <a:r>
+              <a:rPr sz="2550" b="1" i="0">
+                <a:solidFill>
+                  <a:srgbClr val="17212B"/>
+                </a:solidFill>
+                <a:latin typeface="Arial"/>
+              </a:rPr>
+              <a:t>El pipeline se reorganizó con programación orientada a objetos</a:t>
+            </a:r>
+          </a:p>
+        </p:txBody>
+      </p:sp>
+      <p:sp>
+        <p:nvSpPr>
+          <p:cNvPr id="4" name="TextBox 3"/>
+          <p:cNvSpPr txBox="1"/>
+          <p:nvPr/>
+        </p:nvSpPr>
+        <p:spPr>
+          <a:xfrm>
+            <a:off x="571500" y="838504"/>
+            <a:ext cx="10287000" cy="283464"/>
+          </a:xfrm>
+          <a:prstGeom prst="rect">
+            <a:avLst/>
+          </a:prstGeom>
+          <a:noFill/>
+        </p:spPr>
+        <p:txBody>
+          <a:bodyPr wrap="square" lIns="45720" rIns="45720" tIns="27432" bIns="27432" anchor="t">
+            <a:spAutoFit/>
+          </a:bodyPr>
+          <a:lstStyle/>
+          <a:p>
+            <a:pPr algn="l"/>
+            <a:r>
+              <a:rPr sz="1275" b="0" i="0">
+                <a:solidFill>
+                  <a:srgbClr val="5B6570"/>
+                </a:solidFill>
+                <a:latin typeface="Arial"/>
+              </a:rPr>
+              <a:t>Fase 3 · El mismo procesamiento de F2, ahora en clases y módulos reutilizables.</a:t>
+            </a:r>
+          </a:p>
+        </p:txBody>
+      </p:sp>
+      <p:sp>
+        <p:nvSpPr>
+          <p:cNvPr id="5" name="Rounded Rectangle 4"/>
+          <p:cNvSpPr/>
+          <p:nvPr/>
+        </p:nvSpPr>
+        <p:spPr>
+          <a:xfrm>
+            <a:off x="1874519" y="1508760"/>
+            <a:ext cx="3108960" cy="868680"/>
+          </a:xfrm>
+          <a:prstGeom prst="roundRect">
+            <a:avLst>
+              <a:gd name="adj" fmla="val 8000"/>
+            </a:avLst>
+          </a:prstGeom>
+          <a:solidFill>
+            <a:srgbClr val="EAF2F8"/>
+          </a:solidFill>
+          <a:ln w="9525">
+            <a:solidFill>
+              <a:srgbClr val="5B8DB8"/>
+            </a:solidFill>
+          </a:ln>
+          <a:effectLst/>
+        </p:spPr>
+        <p:style>
+          <a:lnRef idx="1">
+            <a:schemeClr val="accent1"/>
+          </a:lnRef>
+          <a:fillRef idx="3">
+            <a:schemeClr val="accent1"/>
+          </a:fillRef>
+          <a:effectRef idx="2">
+            <a:schemeClr val="accent1"/>
+          </a:effectRef>
+          <a:fontRef idx="minor">
+            <a:schemeClr val="lt1"/>
+          </a:fontRef>
+        </p:style>
+        <p:txBody>
+          <a:bodyPr rtlCol="0" anchor="ctr"/>
+          <a:lstStyle/>
+          <a:p>
+            <a:pPr algn="ctr"/>
+          </a:p>
+        </p:txBody>
+      </p:sp>
+      <p:sp>
+        <p:nvSpPr>
+          <p:cNvPr id="6" name="TextBox 5"/>
+          <p:cNvSpPr txBox="1"/>
+          <p:nvPr/>
+        </p:nvSpPr>
+        <p:spPr>
+          <a:xfrm>
+            <a:off x="1874519" y="1554480"/>
+            <a:ext cx="3108960" cy="411480"/>
+          </a:xfrm>
+          <a:prstGeom prst="rect">
+            <a:avLst/>
+          </a:prstGeom>
+          <a:noFill/>
+        </p:spPr>
+        <p:txBody>
+          <a:bodyPr wrap="square" lIns="45720" rIns="45720" tIns="27432" bIns="27432" anchor="t">
+            <a:spAutoFit/>
+          </a:bodyPr>
+          <a:lstStyle/>
+          <a:p>
+            <a:pPr algn="ctr"/>
+            <a:r>
+              <a:rPr sz="1550" b="1" i="0">
+                <a:solidFill>
+                  <a:srgbClr val="356A96"/>
+                </a:solidFill>
+                <a:latin typeface="Arial"/>
+              </a:rPr>
+              <a:t>Transformador</a:t>
+            </a:r>
+          </a:p>
+        </p:txBody>
+      </p:sp>
+      <p:sp>
+        <p:nvSpPr>
+          <p:cNvPr id="7" name="TextBox 6"/>
+          <p:cNvSpPr txBox="1"/>
+          <p:nvPr/>
+        </p:nvSpPr>
+        <p:spPr>
+          <a:xfrm>
+            <a:off x="1874519" y="1938528"/>
+            <a:ext cx="3108960" cy="365760"/>
+          </a:xfrm>
+          <a:prstGeom prst="rect">
+            <a:avLst/>
+          </a:prstGeom>
+          <a:noFill/>
+        </p:spPr>
+        <p:txBody>
+          <a:bodyPr wrap="square" lIns="45720" rIns="45720" tIns="27432" bIns="27432" anchor="t">
+            <a:spAutoFit/>
+          </a:bodyPr>
+          <a:lstStyle/>
+          <a:p>
+            <a:pPr algn="ctr"/>
+            <a:r>
+              <a:rPr sz="1200" b="0" i="0">
+                <a:solidFill>
+                  <a:srgbClr val="17212B"/>
+                </a:solidFill>
+                <a:latin typeface="Courier New"/>
+              </a:rPr>
+              <a:t>ajustar()  ·  transformar()</a:t>
+            </a:r>
+          </a:p>
+        </p:txBody>
+      </p:sp>
+      <p:sp>
+        <p:nvSpPr>
+          <p:cNvPr id="8" name="Rounded Rectangle 7"/>
+          <p:cNvSpPr/>
+          <p:nvPr/>
+        </p:nvSpPr>
+        <p:spPr>
+          <a:xfrm>
+            <a:off x="685800" y="3108960"/>
+            <a:ext cx="2560320" cy="685800"/>
+          </a:xfrm>
+          <a:prstGeom prst="roundRect">
+            <a:avLst>
+              <a:gd name="adj" fmla="val 8000"/>
+            </a:avLst>
+          </a:prstGeom>
+          <a:solidFill>
+            <a:srgbClr val="F5F7F8"/>
+          </a:solidFill>
+          <a:ln w="9525">
+            <a:solidFill>
+              <a:srgbClr val="D7DCE1"/>
+            </a:solidFill>
+          </a:ln>
+          <a:effectLst/>
+        </p:spPr>
+        <p:style>
+          <a:lnRef idx="1">
+            <a:schemeClr val="accent1"/>
+          </a:lnRef>
+          <a:fillRef idx="3">
+            <a:schemeClr val="accent1"/>
+          </a:fillRef>
+          <a:effectRef idx="2">
+            <a:schemeClr val="accent1"/>
+          </a:effectRef>
+          <a:fontRef idx="minor">
+            <a:schemeClr val="lt1"/>
+          </a:fontRef>
+        </p:style>
+        <p:txBody>
+          <a:bodyPr rtlCol="0" anchor="ctr"/>
+          <a:lstStyle/>
+          <a:p>
+            <a:pPr algn="ctr"/>
+          </a:p>
+        </p:txBody>
+      </p:sp>
+      <p:sp>
+        <p:nvSpPr>
+          <p:cNvPr id="9" name="TextBox 8"/>
+          <p:cNvSpPr txBox="1"/>
+          <p:nvPr/>
+        </p:nvSpPr>
+        <p:spPr>
+          <a:xfrm>
+            <a:off x="685800" y="3108960"/>
+            <a:ext cx="2560320" cy="685800"/>
+          </a:xfrm>
+          <a:prstGeom prst="rect">
+            <a:avLst/>
+          </a:prstGeom>
+          <a:noFill/>
+        </p:spPr>
+        <p:txBody>
+          <a:bodyPr wrap="square" lIns="45720" rIns="45720" tIns="27432" bIns="27432" anchor="ctr">
+            <a:spAutoFit/>
+          </a:bodyPr>
+          <a:lstStyle/>
+          <a:p>
+            <a:pPr algn="ctr"/>
+            <a:r>
+              <a:rPr sz="1400" b="1" i="0">
+                <a:solidFill>
+                  <a:srgbClr val="17212B"/>
+                </a:solidFill>
+                <a:latin typeface="Arial"/>
+              </a:rPr>
+              <a:t>CodificadorOneHot</a:t>
+            </a:r>
+          </a:p>
+        </p:txBody>
+      </p:sp>
+      <p:cxnSp>
+        <p:nvCxnSpPr>
+          <p:cNvPr id="10" name="Connector 9"/>
+          <p:cNvCxnSpPr/>
+          <p:nvPr/>
+        </p:nvCxnSpPr>
+        <p:spPr>
+          <a:xfrm flipV="1">
+            <a:off x="1965960" y="2377439"/>
+            <a:ext cx="1463040" cy="731521"/>
+          </a:xfrm>
+          <a:prstGeom prst="line">
+            <a:avLst/>
+          </a:prstGeom>
+          <a:ln w="15875">
+            <a:solidFill>
+              <a:srgbClr val="5B6570"/>
+            </a:solidFill>
+          </a:ln>
+        </p:spPr>
+        <p:style>
+          <a:lnRef idx="2">
+            <a:schemeClr val="accent1"/>
+          </a:lnRef>
+          <a:fillRef idx="0">
+            <a:schemeClr val="accent1"/>
+          </a:fillRef>
+          <a:effectRef idx="1">
+            <a:schemeClr val="accent1"/>
+          </a:effectRef>
+          <a:fontRef idx="minor">
+            <a:schemeClr val="tx1"/>
+          </a:fontRef>
+        </p:style>
+      </p:cxnSp>
+      <p:sp>
+        <p:nvSpPr>
+          <p:cNvPr id="11" name="Rounded Rectangle 10"/>
+          <p:cNvSpPr/>
+          <p:nvPr/>
+        </p:nvSpPr>
+        <p:spPr>
+          <a:xfrm>
+            <a:off x="3611880" y="3108960"/>
+            <a:ext cx="2560320" cy="685800"/>
+          </a:xfrm>
+          <a:prstGeom prst="roundRect">
+            <a:avLst>
+              <a:gd name="adj" fmla="val 8000"/>
+            </a:avLst>
+          </a:prstGeom>
+          <a:solidFill>
+            <a:srgbClr val="F5F7F8"/>
+          </a:solidFill>
+          <a:ln w="9525">
+            <a:solidFill>
+              <a:srgbClr val="D7DCE1"/>
+            </a:solidFill>
+          </a:ln>
+          <a:effectLst/>
+        </p:spPr>
+        <p:style>
+          <a:lnRef idx="1">
+            <a:schemeClr val="accent1"/>
+          </a:lnRef>
+          <a:fillRef idx="3">
+            <a:schemeClr val="accent1"/>
+          </a:fillRef>
+          <a:effectRef idx="2">
+            <a:schemeClr val="accent1"/>
+          </a:effectRef>
+          <a:fontRef idx="minor">
+            <a:schemeClr val="lt1"/>
+          </a:fontRef>
+        </p:style>
+        <p:txBody>
+          <a:bodyPr rtlCol="0" anchor="ctr"/>
+          <a:lstStyle/>
+          <a:p>
+            <a:pPr algn="ctr"/>
+          </a:p>
+        </p:txBody>
+      </p:sp>
+      <p:sp>
+        <p:nvSpPr>
+          <p:cNvPr id="12" name="TextBox 11"/>
+          <p:cNvSpPr txBox="1"/>
+          <p:nvPr/>
+        </p:nvSpPr>
+        <p:spPr>
+          <a:xfrm>
+            <a:off x="3611880" y="3108960"/>
+            <a:ext cx="2560320" cy="685800"/>
+          </a:xfrm>
+          <a:prstGeom prst="rect">
+            <a:avLst/>
+          </a:prstGeom>
+          <a:noFill/>
+        </p:spPr>
+        <p:txBody>
+          <a:bodyPr wrap="square" lIns="45720" rIns="45720" tIns="27432" bIns="27432" anchor="ctr">
+            <a:spAutoFit/>
+          </a:bodyPr>
+          <a:lstStyle/>
+          <a:p>
+            <a:pPr algn="ctr"/>
+            <a:r>
+              <a:rPr sz="1400" b="1" i="0">
+                <a:solidFill>
+                  <a:srgbClr val="17212B"/>
+                </a:solidFill>
+                <a:latin typeface="Arial"/>
+              </a:rPr>
+              <a:t>EscaladorRobusto</a:t>
+            </a:r>
+          </a:p>
+        </p:txBody>
+      </p:sp>
+      <p:cxnSp>
+        <p:nvCxnSpPr>
+          <p:cNvPr id="13" name="Connector 12"/>
+          <p:cNvCxnSpPr/>
+          <p:nvPr/>
+        </p:nvCxnSpPr>
+        <p:spPr>
+          <a:xfrm flipH="1" flipV="1">
+            <a:off x="3429000" y="2377439"/>
+            <a:ext cx="1463040" cy="731521"/>
+          </a:xfrm>
+          <a:prstGeom prst="line">
+            <a:avLst/>
+          </a:prstGeom>
+          <a:ln w="15875">
+            <a:solidFill>
+              <a:srgbClr val="5B6570"/>
+            </a:solidFill>
+          </a:ln>
+        </p:spPr>
+        <p:style>
+          <a:lnRef idx="2">
+            <a:schemeClr val="accent1"/>
+          </a:lnRef>
+          <a:fillRef idx="0">
+            <a:schemeClr val="accent1"/>
+          </a:fillRef>
+          <a:effectRef idx="1">
+            <a:schemeClr val="accent1"/>
+          </a:effectRef>
+          <a:fontRef idx="minor">
+            <a:schemeClr val="tx1"/>
+          </a:fontRef>
+        </p:style>
+      </p:cxnSp>
+      <p:sp>
+        <p:nvSpPr>
+          <p:cNvPr id="14" name="TextBox 13"/>
+          <p:cNvSpPr txBox="1"/>
+          <p:nvPr/>
+        </p:nvSpPr>
+        <p:spPr>
+          <a:xfrm>
+            <a:off x="4617720" y="2468880"/>
+            <a:ext cx="914400" cy="274320"/>
+          </a:xfrm>
+          <a:prstGeom prst="rect">
+            <a:avLst/>
+          </a:prstGeom>
+          <a:noFill/>
+        </p:spPr>
+        <p:txBody>
+          <a:bodyPr wrap="square" lIns="45720" rIns="45720" tIns="27432" bIns="27432" anchor="t">
+            <a:spAutoFit/>
+          </a:bodyPr>
+          <a:lstStyle/>
+          <a:p>
+            <a:pPr algn="l"/>
+            <a:r>
+              <a:rPr sz="1100" b="0" i="0">
+                <a:solidFill>
+                  <a:srgbClr val="5B6570"/>
+                </a:solidFill>
+                <a:latin typeface="Arial"/>
+              </a:rPr>
+              <a:t>hereda</a:t>
+            </a:r>
+          </a:p>
+        </p:txBody>
+      </p:sp>
+      <p:sp>
+        <p:nvSpPr>
+          <p:cNvPr id="15" name="Rounded Rectangle 14"/>
+          <p:cNvSpPr/>
+          <p:nvPr/>
+        </p:nvSpPr>
+        <p:spPr>
+          <a:xfrm>
+            <a:off x="685800" y="4160520"/>
+            <a:ext cx="5486400" cy="640080"/>
+          </a:xfrm>
+          <a:prstGeom prst="roundRect">
+            <a:avLst>
+              <a:gd name="adj" fmla="val 8000"/>
+            </a:avLst>
+          </a:prstGeom>
+          <a:solidFill>
+            <a:srgbClr val="FFFFFF"/>
+          </a:solidFill>
+          <a:ln w="9525">
+            <a:solidFill>
+              <a:srgbClr val="D7DCE1"/>
+            </a:solidFill>
+          </a:ln>
+          <a:effectLst/>
+        </p:spPr>
+        <p:style>
+          <a:lnRef idx="1">
+            <a:schemeClr val="accent1"/>
+          </a:lnRef>
+          <a:fillRef idx="3">
+            <a:schemeClr val="accent1"/>
+          </a:fillRef>
+          <a:effectRef idx="2">
+            <a:schemeClr val="accent1"/>
+          </a:effectRef>
+          <a:fontRef idx="minor">
+            <a:schemeClr val="lt1"/>
+          </a:fontRef>
+        </p:style>
+        <p:txBody>
+          <a:bodyPr rtlCol="0" anchor="ctr"/>
+          <a:lstStyle/>
+          <a:p>
+            <a:pPr algn="ctr"/>
+          </a:p>
+        </p:txBody>
+      </p:sp>
+      <p:sp>
+        <p:nvSpPr>
+          <p:cNvPr id="16" name="TextBox 15"/>
+          <p:cNvSpPr txBox="1"/>
+          <p:nvPr/>
+        </p:nvSpPr>
+        <p:spPr>
+          <a:xfrm>
+            <a:off x="822960" y="4160520"/>
+            <a:ext cx="5212080" cy="640080"/>
+          </a:xfrm>
+          <a:prstGeom prst="rect">
+            <a:avLst/>
+          </a:prstGeom>
+          <a:noFill/>
+        </p:spPr>
+        <p:txBody>
+          <a:bodyPr wrap="square" lIns="45720" rIns="45720" tIns="27432" bIns="27432" anchor="ctr">
+            <a:spAutoFit/>
+          </a:bodyPr>
+          <a:lstStyle/>
+          <a:p>
+            <a:pPr algn="l"/>
+            <a:r>
+              <a:rPr sz="1300" b="1" i="0">
+                <a:solidFill>
+                  <a:srgbClr val="17212B"/>
+                </a:solidFill>
+                <a:latin typeface="Arial"/>
+              </a:rPr>
+              <a:t>FabricaTransformadores</a:t>
+            </a:r>
+            <a:r>
+              <a:rPr sz="1300" b="0" i="0">
+                <a:solidFill>
+                  <a:srgbClr val="17212B"/>
+                </a:solidFill>
+                <a:latin typeface="Arial"/>
+              </a:rPr>
+              <a:t> crea el objeto según el tipo de variable</a:t>
+            </a:r>
+          </a:p>
+        </p:txBody>
+      </p:sp>
+      <p:sp>
+        <p:nvSpPr>
+          <p:cNvPr id="17" name="Rounded Rectangle 16"/>
+          <p:cNvSpPr/>
+          <p:nvPr/>
+        </p:nvSpPr>
+        <p:spPr>
+          <a:xfrm>
+            <a:off x="685800" y="4937760"/>
+            <a:ext cx="5486400" cy="640080"/>
+          </a:xfrm>
+          <a:prstGeom prst="roundRect">
+            <a:avLst>
+              <a:gd name="adj" fmla="val 8000"/>
+            </a:avLst>
+          </a:prstGeom>
+          <a:solidFill>
+            <a:srgbClr val="FFFFFF"/>
+          </a:solidFill>
+          <a:ln w="9525">
+            <a:solidFill>
+              <a:srgbClr val="D7DCE1"/>
+            </a:solidFill>
+          </a:ln>
+          <a:effectLst/>
+        </p:spPr>
+        <p:style>
+          <a:lnRef idx="1">
+            <a:schemeClr val="accent1"/>
+          </a:lnRef>
+          <a:fillRef idx="3">
+            <a:schemeClr val="accent1"/>
+          </a:fillRef>
+          <a:effectRef idx="2">
+            <a:schemeClr val="accent1"/>
+          </a:effectRef>
+          <a:fontRef idx="minor">
+            <a:schemeClr val="lt1"/>
+          </a:fontRef>
+        </p:style>
+        <p:txBody>
+          <a:bodyPr rtlCol="0" anchor="ctr"/>
+          <a:lstStyle/>
+          <a:p>
+            <a:pPr algn="ctr"/>
+          </a:p>
+        </p:txBody>
+      </p:sp>
+      <p:sp>
+        <p:nvSpPr>
+          <p:cNvPr id="18" name="TextBox 17"/>
+          <p:cNvSpPr txBox="1"/>
+          <p:nvPr/>
+        </p:nvSpPr>
+        <p:spPr>
+          <a:xfrm>
+            <a:off x="822960" y="4937760"/>
+            <a:ext cx="5212080" cy="640080"/>
+          </a:xfrm>
+          <a:prstGeom prst="rect">
+            <a:avLst/>
+          </a:prstGeom>
+          <a:noFill/>
+        </p:spPr>
+        <p:txBody>
+          <a:bodyPr wrap="square" lIns="45720" rIns="45720" tIns="27432" bIns="27432" anchor="ctr">
+            <a:spAutoFit/>
+          </a:bodyPr>
+          <a:lstStyle/>
+          <a:p>
+            <a:pPr algn="l"/>
+            <a:r>
+              <a:rPr sz="1300" b="1" i="0">
+                <a:solidFill>
+                  <a:srgbClr val="17212B"/>
+                </a:solidFill>
+                <a:latin typeface="Arial"/>
+              </a:rPr>
+              <a:t>Pipeline</a:t>
+            </a:r>
+            <a:r>
+              <a:rPr sz="1300" b="0" i="0">
+                <a:solidFill>
+                  <a:srgbClr val="17212B"/>
+                </a:solidFill>
+                <a:latin typeface="Arial"/>
+              </a:rPr>
+              <a:t> recorre los pasos con un ciclo: el flujo es lineal</a:t>
+            </a:r>
+          </a:p>
+        </p:txBody>
+      </p:sp>
+      <p:sp>
+        <p:nvSpPr>
+          <p:cNvPr id="19" name="TextBox 18"/>
+          <p:cNvSpPr txBox="1"/>
+          <p:nvPr/>
+        </p:nvSpPr>
+        <p:spPr>
+          <a:xfrm>
+            <a:off x="6720840" y="1508760"/>
+            <a:ext cx="4754880" cy="320040"/>
+          </a:xfrm>
+          <a:prstGeom prst="rect">
+            <a:avLst/>
+          </a:prstGeom>
+          <a:noFill/>
+        </p:spPr>
+        <p:txBody>
+          <a:bodyPr wrap="square" lIns="45720" rIns="45720" tIns="27432" bIns="27432" anchor="t">
+            <a:spAutoFit/>
+          </a:bodyPr>
+          <a:lstStyle/>
+          <a:p>
+            <a:pPr algn="l"/>
+            <a:r>
+              <a:rPr sz="1500" b="1" i="0">
+                <a:solidFill>
+                  <a:srgbClr val="356A96"/>
+                </a:solidFill>
+                <a:latin typeface="Arial"/>
+              </a:rPr>
+              <a:t>Herencia</a:t>
+            </a:r>
+          </a:p>
+        </p:txBody>
+      </p:sp>
+      <p:sp>
+        <p:nvSpPr>
+          <p:cNvPr id="20" name="TextBox 19"/>
+          <p:cNvSpPr txBox="1"/>
+          <p:nvPr/>
+        </p:nvSpPr>
+        <p:spPr>
+          <a:xfrm>
+            <a:off x="6720840" y="1837943"/>
+            <a:ext cx="4754880" cy="658368"/>
+          </a:xfrm>
+          <a:prstGeom prst="rect">
+            <a:avLst/>
+          </a:prstGeom>
+          <a:noFill/>
+        </p:spPr>
+        <p:txBody>
+          <a:bodyPr wrap="square" lIns="45720" rIns="45720" tIns="27432" bIns="27432" anchor="t">
+            <a:spAutoFit/>
+          </a:bodyPr>
+          <a:lstStyle/>
+          <a:p>
+            <a:pPr algn="l"/>
+            <a:r>
+              <a:rPr sz="1300" b="0" i="0">
+                <a:solidFill>
+                  <a:srgbClr val="17212B"/>
+                </a:solidFill>
+                <a:latin typeface="Arial"/>
+              </a:rPr>
+              <a:t>Las clases hijas reutilizan la validación y el control de estado de la clase base.</a:t>
+            </a:r>
+          </a:p>
+        </p:txBody>
+      </p:sp>
+      <p:sp>
+        <p:nvSpPr>
+          <p:cNvPr id="21" name="TextBox 20"/>
+          <p:cNvSpPr txBox="1"/>
+          <p:nvPr/>
+        </p:nvSpPr>
+        <p:spPr>
+          <a:xfrm>
+            <a:off x="6720840" y="2532888"/>
+            <a:ext cx="4754880" cy="320040"/>
+          </a:xfrm>
+          <a:prstGeom prst="rect">
+            <a:avLst/>
+          </a:prstGeom>
+          <a:noFill/>
+        </p:spPr>
+        <p:txBody>
+          <a:bodyPr wrap="square" lIns="45720" rIns="45720" tIns="27432" bIns="27432" anchor="t">
+            <a:spAutoFit/>
+          </a:bodyPr>
+          <a:lstStyle/>
+          <a:p>
+            <a:pPr algn="l"/>
+            <a:r>
+              <a:rPr sz="1500" b="1" i="0">
+                <a:solidFill>
+                  <a:srgbClr val="356A96"/>
+                </a:solidFill>
+                <a:latin typeface="Arial"/>
+              </a:rPr>
+              <a:t>Polimorfismo</a:t>
+            </a:r>
+          </a:p>
+        </p:txBody>
+      </p:sp>
+      <p:sp>
+        <p:nvSpPr>
+          <p:cNvPr id="22" name="TextBox 21"/>
+          <p:cNvSpPr txBox="1"/>
+          <p:nvPr/>
+        </p:nvSpPr>
+        <p:spPr>
+          <a:xfrm>
+            <a:off x="6720840" y="2862072"/>
+            <a:ext cx="4754880" cy="658368"/>
+          </a:xfrm>
+          <a:prstGeom prst="rect">
+            <a:avLst/>
+          </a:prstGeom>
+          <a:noFill/>
+        </p:spPr>
+        <p:txBody>
+          <a:bodyPr wrap="square" lIns="45720" rIns="45720" tIns="27432" bIns="27432" anchor="t">
+            <a:spAutoFit/>
+          </a:bodyPr>
+          <a:lstStyle/>
+          <a:p>
+            <a:pPr algn="l"/>
+            <a:r>
+              <a:rPr sz="1300" b="0" i="0">
+                <a:solidFill>
+                  <a:srgbClr val="17212B"/>
+                </a:solidFill>
+                <a:latin typeface="Arial"/>
+              </a:rPr>
+              <a:t>El pipeline llama ajustar() y transformar() de la misma forma en cada objeto.</a:t>
+            </a:r>
+          </a:p>
+        </p:txBody>
+      </p:sp>
+      <p:sp>
+        <p:nvSpPr>
+          <p:cNvPr id="23" name="TextBox 22"/>
+          <p:cNvSpPr txBox="1"/>
+          <p:nvPr/>
+        </p:nvSpPr>
+        <p:spPr>
+          <a:xfrm>
+            <a:off x="6720840" y="3557016"/>
+            <a:ext cx="4754880" cy="320040"/>
+          </a:xfrm>
+          <a:prstGeom prst="rect">
+            <a:avLst/>
+          </a:prstGeom>
+          <a:noFill/>
+        </p:spPr>
+        <p:txBody>
+          <a:bodyPr wrap="square" lIns="45720" rIns="45720" tIns="27432" bIns="27432" anchor="t">
+            <a:spAutoFit/>
+          </a:bodyPr>
+          <a:lstStyle/>
+          <a:p>
+            <a:pPr algn="l"/>
+            <a:r>
+              <a:rPr sz="1500" b="1" i="0">
+                <a:solidFill>
+                  <a:srgbClr val="356A96"/>
+                </a:solidFill>
+                <a:latin typeface="Arial"/>
+              </a:rPr>
+              <a:t>Encapsulamiento</a:t>
+            </a:r>
+          </a:p>
+        </p:txBody>
+      </p:sp>
+      <p:sp>
+        <p:nvSpPr>
+          <p:cNvPr id="24" name="TextBox 23"/>
+          <p:cNvSpPr txBox="1"/>
+          <p:nvPr/>
+        </p:nvSpPr>
+        <p:spPr>
+          <a:xfrm>
+            <a:off x="6720840" y="3886200"/>
+            <a:ext cx="4754880" cy="658368"/>
+          </a:xfrm>
+          <a:prstGeom prst="rect">
+            <a:avLst/>
+          </a:prstGeom>
+          <a:noFill/>
+        </p:spPr>
+        <p:txBody>
+          <a:bodyPr wrap="square" lIns="45720" rIns="45720" tIns="27432" bIns="27432" anchor="t">
+            <a:spAutoFit/>
+          </a:bodyPr>
+          <a:lstStyle/>
+          <a:p>
+            <a:pPr algn="l"/>
+            <a:r>
+              <a:rPr sz="1300" b="0" i="0">
+                <a:solidFill>
+                  <a:srgbClr val="17212B"/>
+                </a:solidFill>
+                <a:latin typeface="Arial"/>
+              </a:rPr>
+              <a:t>_parametros y _ajustado guardan lo aprendido. No se puede transformar sin ajustar.</a:t>
+            </a:r>
+          </a:p>
+        </p:txBody>
+      </p:sp>
+      <p:sp>
+        <p:nvSpPr>
+          <p:cNvPr id="25" name="TextBox 24"/>
+          <p:cNvSpPr txBox="1"/>
+          <p:nvPr/>
+        </p:nvSpPr>
+        <p:spPr>
+          <a:xfrm>
+            <a:off x="6720840" y="4581144"/>
+            <a:ext cx="4754880" cy="320040"/>
+          </a:xfrm>
+          <a:prstGeom prst="rect">
+            <a:avLst/>
+          </a:prstGeom>
+          <a:noFill/>
+        </p:spPr>
+        <p:txBody>
+          <a:bodyPr wrap="square" lIns="45720" rIns="45720" tIns="27432" bIns="27432" anchor="t">
+            <a:spAutoFit/>
+          </a:bodyPr>
+          <a:lstStyle/>
+          <a:p>
+            <a:pPr algn="l"/>
+            <a:r>
+              <a:rPr sz="1500" b="1" i="0">
+                <a:solidFill>
+                  <a:srgbClr val="356A96"/>
+                </a:solidFill>
+                <a:latin typeface="Arial"/>
+              </a:rPr>
+              <a:t>Patrón Factory</a:t>
+            </a:r>
+          </a:p>
+        </p:txBody>
+      </p:sp>
+      <p:sp>
+        <p:nvSpPr>
+          <p:cNvPr id="26" name="TextBox 25"/>
+          <p:cNvSpPr txBox="1"/>
+          <p:nvPr/>
+        </p:nvSpPr>
+        <p:spPr>
+          <a:xfrm>
+            <a:off x="6720840" y="4910328"/>
+            <a:ext cx="4754880" cy="658368"/>
+          </a:xfrm>
+          <a:prstGeom prst="rect">
+            <a:avLst/>
+          </a:prstGeom>
+          <a:noFill/>
+        </p:spPr>
+        <p:txBody>
+          <a:bodyPr wrap="square" lIns="45720" rIns="45720" tIns="27432" bIns="27432" anchor="t">
+            <a:spAutoFit/>
+          </a:bodyPr>
+          <a:lstStyle/>
+          <a:p>
+            <a:pPr algn="l"/>
+            <a:r>
+              <a:rPr sz="1300" b="0" i="0">
+                <a:solidFill>
+                  <a:srgbClr val="17212B"/>
+                </a:solidFill>
+                <a:latin typeface="Arial"/>
+              </a:rPr>
+              <a:t>La creación de objetos está en un solo lugar. Agregar un paso no obliga a reescribir el pipeline.</a:t>
+            </a:r>
+          </a:p>
+        </p:txBody>
+      </p:sp>
+      <p:sp>
+        <p:nvSpPr>
+          <p:cNvPr id="27" name="TextBox 26"/>
+          <p:cNvSpPr txBox="1"/>
+          <p:nvPr/>
+        </p:nvSpPr>
+        <p:spPr>
+          <a:xfrm>
+            <a:off x="685800" y="5852160"/>
+            <a:ext cx="10515600" cy="274320"/>
+          </a:xfrm>
+          <a:prstGeom prst="rect">
+            <a:avLst/>
+          </a:prstGeom>
+          <a:noFill/>
+        </p:spPr>
+        <p:txBody>
+          <a:bodyPr wrap="square" lIns="45720" rIns="45720" tIns="27432" bIns="27432" anchor="t">
+            <a:spAutoFit/>
+          </a:bodyPr>
+          <a:lstStyle/>
+          <a:p>
+            <a:pPr algn="l"/>
+            <a:r>
+              <a:rPr sz="1100" b="0" i="0">
+                <a:solidFill>
+                  <a:srgbClr val="5B6570"/>
+                </a:solidFill>
+                <a:latin typeface="Courier New"/>
+              </a:rPr>
+              <a:t>Módulos: carga.py · transformadores.py · pipeline.py · fabrica.py · medicion.py</a:t>
+            </a:r>
+          </a:p>
+        </p:txBody>
+      </p:sp>
+      <p:sp>
+        <p:nvSpPr>
+          <p:cNvPr id="28" name="TextBox 27"/>
+          <p:cNvSpPr txBox="1"/>
+          <p:nvPr/>
+        </p:nvSpPr>
+        <p:spPr>
+          <a:xfrm>
+            <a:off x="11334902" y="6305702"/>
+            <a:ext cx="400050" cy="228600"/>
+          </a:xfrm>
+          <a:prstGeom prst="rect">
+            <a:avLst/>
+          </a:prstGeom>
+          <a:noFill/>
+        </p:spPr>
+        <p:txBody>
+          <a:bodyPr wrap="square" lIns="45720" rIns="45720" tIns="27432" bIns="27432" anchor="t">
+            <a:spAutoFit/>
+          </a:bodyPr>
+          <a:lstStyle/>
+          <a:p>
+            <a:pPr algn="r"/>
+            <a:r>
+              <a:rPr sz="1050" b="0" i="0">
+                <a:solidFill>
+                  <a:srgbClr val="5B6570"/>
+                </a:solidFill>
+                <a:latin typeface="Arial"/>
+              </a:rPr>
+              <a:t>6</a:t>
+            </a:r>
+          </a:p>
+        </p:txBody>
+      </p:sp>
+    </p:spTree>
+  </p:cSld>
+  <p:clrMapOvr>
+    <a:masterClrMapping/>
+  </p:clrMapOvr>
+</p:sld>
+</file>
+
+<file path=ppt/slides/slide12.xml><?xml version="1.0" encoding="utf-8"?>
+<p:sld xmlns:a="http://schemas.openxmlformats.org/drawingml/2006/main" xmlns:p="http://schemas.openxmlformats.org/presentationml/2006/main" xmlns:r="http://schemas.openxmlformats.org/officeDocument/2006/relationships">
+  <p:cSld>
+    <p:bg>
+      <p:bgPr>
+        <a:solidFill>
+          <a:srgbClr val="FFFFFF"/>
+        </a:solidFill>
+        <a:effectLst/>
+      </p:bgPr>
+    </p:bg>
+    <p:spTree>
+      <p:nvGrpSpPr>
+        <p:cNvPr id="1" name=""/>
+        <p:cNvGrpSpPr/>
+        <p:nvPr/>
+      </p:nvGrpSpPr>
+      <p:grpSpPr/>
+      <p:sp>
+        <p:nvSpPr>
+          <p:cNvPr id="2" name="Rectangle 1"/>
+          <p:cNvSpPr/>
+          <p:nvPr/>
+        </p:nvSpPr>
+        <p:spPr>
+          <a:xfrm>
+            <a:off x="0" y="0"/>
+            <a:ext cx="171450" cy="6858000"/>
+          </a:xfrm>
+          <a:prstGeom prst="rect">
+            <a:avLst/>
+          </a:prstGeom>
+          <a:solidFill>
+            <a:srgbClr val="5B8DB8"/>
+          </a:solidFill>
+          <a:ln>
+            <a:noFill/>
+          </a:ln>
+          <a:effectLst/>
+        </p:spPr>
+        <p:style>
+          <a:lnRef idx="1">
+            <a:schemeClr val="accent1"/>
+          </a:lnRef>
+          <a:fillRef idx="3">
+            <a:schemeClr val="accent1"/>
+          </a:fillRef>
+          <a:effectRef idx="2">
+            <a:schemeClr val="accent1"/>
+          </a:effectRef>
+          <a:fontRef idx="minor">
+            <a:schemeClr val="lt1"/>
+          </a:fontRef>
+        </p:style>
+        <p:txBody>
+          <a:bodyPr rtlCol="0" anchor="ctr"/>
+          <a:lstStyle/>
+          <a:p>
+            <a:pPr algn="ctr"/>
+          </a:p>
+        </p:txBody>
+      </p:sp>
+      <p:sp>
+        <p:nvSpPr>
+          <p:cNvPr id="3" name="TextBox 2"/>
+          <p:cNvSpPr txBox="1"/>
+          <p:nvPr/>
+        </p:nvSpPr>
+        <p:spPr>
+          <a:xfrm>
+            <a:off x="552297" y="342900"/>
+            <a:ext cx="10570464" cy="493776"/>
+          </a:xfrm>
+          <a:prstGeom prst="rect">
+            <a:avLst/>
+          </a:prstGeom>
+          <a:noFill/>
+        </p:spPr>
+        <p:txBody>
+          <a:bodyPr wrap="square" lIns="45720" rIns="45720" tIns="27432" bIns="27432" anchor="t">
+            <a:spAutoFit/>
+          </a:bodyPr>
+          <a:lstStyle/>
+          <a:p>
+            <a:pPr algn="l"/>
+            <a:r>
+              <a:rPr sz="2550" b="1" i="0">
+                <a:solidFill>
+                  <a:srgbClr val="17212B"/>
+                </a:solidFill>
+                <a:latin typeface="Arial"/>
+              </a:rPr>
+              <a:t>Pruebas y eficiencia: comprobar antes de confiar</a:t>
+            </a:r>
+          </a:p>
+        </p:txBody>
+      </p:sp>
+      <p:sp>
+        <p:nvSpPr>
+          <p:cNvPr id="4" name="TextBox 3"/>
+          <p:cNvSpPr txBox="1"/>
+          <p:nvPr/>
+        </p:nvSpPr>
+        <p:spPr>
+          <a:xfrm>
+            <a:off x="571500" y="838504"/>
+            <a:ext cx="10287000" cy="283464"/>
+          </a:xfrm>
+          <a:prstGeom prst="rect">
+            <a:avLst/>
+          </a:prstGeom>
+          <a:noFill/>
+        </p:spPr>
+        <p:txBody>
+          <a:bodyPr wrap="square" lIns="45720" rIns="45720" tIns="27432" bIns="27432" anchor="t">
+            <a:spAutoFit/>
+          </a:bodyPr>
+          <a:lstStyle/>
+          <a:p>
+            <a:pPr algn="l"/>
+            <a:r>
+              <a:rPr sz="1275" b="0" i="0">
+                <a:solidFill>
+                  <a:srgbClr val="5B6570"/>
+                </a:solidFill>
+                <a:latin typeface="Arial"/>
+              </a:rPr>
+              <a:t>Fase 3 · El cambio de diseño solo se aceptó después de verificar que daba el mismo resultado.</a:t>
+            </a:r>
+          </a:p>
+        </p:txBody>
+      </p:sp>
+      <p:sp>
+        <p:nvSpPr>
+          <p:cNvPr id="5" name="Rounded Rectangle 4"/>
+          <p:cNvSpPr/>
+          <p:nvPr/>
+        </p:nvSpPr>
+        <p:spPr>
+          <a:xfrm>
+            <a:off x="685800" y="1508760"/>
+            <a:ext cx="1508760" cy="731520"/>
+          </a:xfrm>
+          <a:prstGeom prst="roundRect">
+            <a:avLst>
+              <a:gd name="adj" fmla="val 8000"/>
+            </a:avLst>
+          </a:prstGeom>
+          <a:solidFill>
+            <a:srgbClr val="EAF2F8"/>
+          </a:solidFill>
+          <a:ln>
+            <a:noFill/>
+          </a:ln>
+          <a:effectLst/>
+        </p:spPr>
+        <p:style>
+          <a:lnRef idx="1">
+            <a:schemeClr val="accent1"/>
+          </a:lnRef>
+          <a:fillRef idx="3">
+            <a:schemeClr val="accent1"/>
+          </a:fillRef>
+          <a:effectRef idx="2">
+            <a:schemeClr val="accent1"/>
+          </a:effectRef>
+          <a:fontRef idx="minor">
+            <a:schemeClr val="lt1"/>
+          </a:fontRef>
+        </p:style>
+        <p:txBody>
+          <a:bodyPr rtlCol="0" anchor="ctr"/>
+          <a:lstStyle/>
+          <a:p>
+            <a:pPr algn="ctr"/>
+          </a:p>
+        </p:txBody>
+      </p:sp>
+      <p:sp>
+        <p:nvSpPr>
+          <p:cNvPr id="6" name="TextBox 5"/>
+          <p:cNvSpPr txBox="1"/>
+          <p:nvPr/>
+        </p:nvSpPr>
+        <p:spPr>
+          <a:xfrm>
+            <a:off x="685800" y="1508760"/>
+            <a:ext cx="1508760" cy="731520"/>
+          </a:xfrm>
+          <a:prstGeom prst="rect">
+            <a:avLst/>
+          </a:prstGeom>
+          <a:noFill/>
+        </p:spPr>
+        <p:txBody>
+          <a:bodyPr wrap="square" lIns="45720" rIns="45720" tIns="27432" bIns="27432" anchor="ctr">
+            <a:spAutoFit/>
+          </a:bodyPr>
+          <a:lstStyle/>
+          <a:p>
+            <a:pPr algn="ctr"/>
+            <a:r>
+              <a:rPr sz="1300" b="1" i="0">
+                <a:solidFill>
+                  <a:srgbClr val="356A96"/>
+                </a:solidFill>
+                <a:latin typeface="Arial"/>
+              </a:rPr>
+              <a:t>Normal</a:t>
+            </a:r>
+          </a:p>
+        </p:txBody>
+      </p:sp>
+      <p:sp>
+        <p:nvSpPr>
+          <p:cNvPr id="7" name="TextBox 6"/>
+          <p:cNvSpPr txBox="1"/>
+          <p:nvPr/>
+        </p:nvSpPr>
+        <p:spPr>
+          <a:xfrm>
+            <a:off x="2331720" y="1508760"/>
+            <a:ext cx="3383280" cy="731520"/>
+          </a:xfrm>
+          <a:prstGeom prst="rect">
+            <a:avLst/>
+          </a:prstGeom>
+          <a:noFill/>
+        </p:spPr>
+        <p:txBody>
+          <a:bodyPr wrap="square" lIns="45720" rIns="45720" tIns="27432" bIns="27432" anchor="ctr">
+            <a:spAutoFit/>
+          </a:bodyPr>
+          <a:lstStyle/>
+          <a:p>
+            <a:pPr algn="l"/>
+            <a:r>
+              <a:rPr sz="1300" b="0" i="0">
+                <a:solidFill>
+                  <a:srgbClr val="17212B"/>
+                </a:solidFill>
+                <a:latin typeface="Arial"/>
+              </a:rPr>
+              <a:t>Pipeline completo: dimensiones, columnas y sin nulos.</a:t>
+            </a:r>
+          </a:p>
+        </p:txBody>
+      </p:sp>
+      <p:sp>
+        <p:nvSpPr>
+          <p:cNvPr id="8" name="Rounded Rectangle 7"/>
+          <p:cNvSpPr/>
+          <p:nvPr/>
+        </p:nvSpPr>
+        <p:spPr>
+          <a:xfrm>
+            <a:off x="685800" y="2468880"/>
+            <a:ext cx="1508760" cy="731520"/>
+          </a:xfrm>
+          <a:prstGeom prst="roundRect">
+            <a:avLst>
+              <a:gd name="adj" fmla="val 8000"/>
+            </a:avLst>
+          </a:prstGeom>
+          <a:solidFill>
+            <a:srgbClr val="EAF2F8"/>
+          </a:solidFill>
+          <a:ln>
+            <a:noFill/>
+          </a:ln>
+          <a:effectLst/>
+        </p:spPr>
+        <p:style>
+          <a:lnRef idx="1">
+            <a:schemeClr val="accent1"/>
+          </a:lnRef>
+          <a:fillRef idx="3">
+            <a:schemeClr val="accent1"/>
+          </a:fillRef>
+          <a:effectRef idx="2">
+            <a:schemeClr val="accent1"/>
+          </a:effectRef>
+          <a:fontRef idx="minor">
+            <a:schemeClr val="lt1"/>
+          </a:fontRef>
+        </p:style>
+        <p:txBody>
+          <a:bodyPr rtlCol="0" anchor="ctr"/>
+          <a:lstStyle/>
+          <a:p>
+            <a:pPr algn="ctr"/>
+          </a:p>
+        </p:txBody>
+      </p:sp>
+      <p:sp>
+        <p:nvSpPr>
+          <p:cNvPr id="9" name="TextBox 8"/>
+          <p:cNvSpPr txBox="1"/>
+          <p:nvPr/>
+        </p:nvSpPr>
+        <p:spPr>
+          <a:xfrm>
+            <a:off x="685800" y="2468880"/>
+            <a:ext cx="1508760" cy="731520"/>
+          </a:xfrm>
+          <a:prstGeom prst="rect">
+            <a:avLst/>
+          </a:prstGeom>
+          <a:noFill/>
+        </p:spPr>
+        <p:txBody>
+          <a:bodyPr wrap="square" lIns="45720" rIns="45720" tIns="27432" bIns="27432" anchor="ctr">
+            <a:spAutoFit/>
+          </a:bodyPr>
+          <a:lstStyle/>
+          <a:p>
+            <a:pPr algn="ctr"/>
+            <a:r>
+              <a:rPr sz="1300" b="1" i="0">
+                <a:solidFill>
+                  <a:srgbClr val="356A96"/>
+                </a:solidFill>
+                <a:latin typeface="Arial"/>
+              </a:rPr>
+              <a:t>Límite</a:t>
+            </a:r>
+          </a:p>
+        </p:txBody>
+      </p:sp>
+      <p:sp>
+        <p:nvSpPr>
+          <p:cNvPr id="10" name="TextBox 9"/>
+          <p:cNvSpPr txBox="1"/>
+          <p:nvPr/>
+        </p:nvSpPr>
+        <p:spPr>
+          <a:xfrm>
+            <a:off x="2331720" y="2468880"/>
+            <a:ext cx="3383280" cy="731520"/>
+          </a:xfrm>
+          <a:prstGeom prst="rect">
+            <a:avLst/>
+          </a:prstGeom>
+          <a:noFill/>
+        </p:spPr>
+        <p:txBody>
+          <a:bodyPr wrap="square" lIns="45720" rIns="45720" tIns="27432" bIns="27432" anchor="ctr">
+            <a:spAutoFit/>
+          </a:bodyPr>
+          <a:lstStyle/>
+          <a:p>
+            <a:pPr algn="l"/>
+            <a:r>
+              <a:rPr sz="1300" b="0" i="0">
+                <a:solidFill>
+                  <a:srgbClr val="17212B"/>
+                </a:solidFill>
+                <a:latin typeface="Arial"/>
+              </a:rPr>
+              <a:t>Entrada mínima de una fila, sin perder registros.</a:t>
+            </a:r>
+          </a:p>
+        </p:txBody>
+      </p:sp>
+      <p:sp>
+        <p:nvSpPr>
+          <p:cNvPr id="11" name="Rounded Rectangle 10"/>
+          <p:cNvSpPr/>
+          <p:nvPr/>
+        </p:nvSpPr>
+        <p:spPr>
+          <a:xfrm>
+            <a:off x="685800" y="3429000"/>
+            <a:ext cx="1508760" cy="731520"/>
+          </a:xfrm>
+          <a:prstGeom prst="roundRect">
+            <a:avLst>
+              <a:gd name="adj" fmla="val 8000"/>
+            </a:avLst>
+          </a:prstGeom>
+          <a:solidFill>
+            <a:srgbClr val="EAF2F8"/>
+          </a:solidFill>
+          <a:ln>
+            <a:noFill/>
+          </a:ln>
+          <a:effectLst/>
+        </p:spPr>
+        <p:style>
+          <a:lnRef idx="1">
+            <a:schemeClr val="accent1"/>
+          </a:lnRef>
+          <a:fillRef idx="3">
+            <a:schemeClr val="accent1"/>
+          </a:fillRef>
+          <a:effectRef idx="2">
+            <a:schemeClr val="accent1"/>
+          </a:effectRef>
+          <a:fontRef idx="minor">
+            <a:schemeClr val="lt1"/>
+          </a:fontRef>
+        </p:style>
+        <p:txBody>
+          <a:bodyPr rtlCol="0" anchor="ctr"/>
+          <a:lstStyle/>
+          <a:p>
+            <a:pPr algn="ctr"/>
+          </a:p>
+        </p:txBody>
+      </p:sp>
+      <p:sp>
+        <p:nvSpPr>
+          <p:cNvPr id="12" name="TextBox 11"/>
+          <p:cNvSpPr txBox="1"/>
+          <p:nvPr/>
+        </p:nvSpPr>
+        <p:spPr>
+          <a:xfrm>
+            <a:off x="685800" y="3429000"/>
+            <a:ext cx="1508760" cy="731520"/>
+          </a:xfrm>
+          <a:prstGeom prst="rect">
+            <a:avLst/>
+          </a:prstGeom>
+          <a:noFill/>
+        </p:spPr>
+        <p:txBody>
+          <a:bodyPr wrap="square" lIns="45720" rIns="45720" tIns="27432" bIns="27432" anchor="ctr">
+            <a:spAutoFit/>
+          </a:bodyPr>
+          <a:lstStyle/>
+          <a:p>
+            <a:pPr algn="ctr"/>
+            <a:r>
+              <a:rPr sz="1300" b="1" i="0">
+                <a:solidFill>
+                  <a:srgbClr val="356A96"/>
+                </a:solidFill>
+                <a:latin typeface="Arial"/>
+              </a:rPr>
+              <a:t>Excepción</a:t>
+            </a:r>
+          </a:p>
+        </p:txBody>
+      </p:sp>
+      <p:sp>
+        <p:nvSpPr>
+          <p:cNvPr id="13" name="TextBox 12"/>
+          <p:cNvSpPr txBox="1"/>
+          <p:nvPr/>
+        </p:nvSpPr>
+        <p:spPr>
+          <a:xfrm>
+            <a:off x="2331720" y="3429000"/>
+            <a:ext cx="3383280" cy="731520"/>
+          </a:xfrm>
+          <a:prstGeom prst="rect">
+            <a:avLst/>
+          </a:prstGeom>
+          <a:noFill/>
+        </p:spPr>
+        <p:txBody>
+          <a:bodyPr wrap="square" lIns="45720" rIns="45720" tIns="27432" bIns="27432" anchor="ctr">
+            <a:spAutoFit/>
+          </a:bodyPr>
+          <a:lstStyle/>
+          <a:p>
+            <a:pPr algn="l"/>
+            <a:r>
+              <a:rPr sz="1300" b="0" i="0">
+                <a:solidFill>
+                  <a:srgbClr val="17212B"/>
+                </a:solidFill>
+                <a:latin typeface="Arial"/>
+              </a:rPr>
+              <a:t>Transformar sin ajustar o usar una categoría nueva: error controlado.</a:t>
+            </a:r>
+          </a:p>
+        </p:txBody>
+      </p:sp>
+      <p:sp>
+        <p:nvSpPr>
+          <p:cNvPr id="14" name="Rounded Rectangle 13"/>
+          <p:cNvSpPr/>
+          <p:nvPr/>
+        </p:nvSpPr>
+        <p:spPr>
+          <a:xfrm>
+            <a:off x="685800" y="4389120"/>
+            <a:ext cx="1508760" cy="731520"/>
+          </a:xfrm>
+          <a:prstGeom prst="roundRect">
+            <a:avLst>
+              <a:gd name="adj" fmla="val 8000"/>
+            </a:avLst>
+          </a:prstGeom>
+          <a:solidFill>
+            <a:srgbClr val="E8F2EC"/>
+          </a:solidFill>
+          <a:ln>
+            <a:noFill/>
+          </a:ln>
+          <a:effectLst/>
+        </p:spPr>
+        <p:style>
+          <a:lnRef idx="1">
+            <a:schemeClr val="accent1"/>
+          </a:lnRef>
+          <a:fillRef idx="3">
+            <a:schemeClr val="accent1"/>
+          </a:fillRef>
+          <a:effectRef idx="2">
+            <a:schemeClr val="accent1"/>
+          </a:effectRef>
+          <a:fontRef idx="minor">
+            <a:schemeClr val="lt1"/>
+          </a:fontRef>
+        </p:style>
+        <p:txBody>
+          <a:bodyPr rtlCol="0" anchor="ctr"/>
+          <a:lstStyle/>
+          <a:p>
+            <a:pPr algn="ctr"/>
+          </a:p>
+        </p:txBody>
+      </p:sp>
+      <p:sp>
+        <p:nvSpPr>
+          <p:cNvPr id="15" name="TextBox 14"/>
+          <p:cNvSpPr txBox="1"/>
+          <p:nvPr/>
+        </p:nvSpPr>
+        <p:spPr>
+          <a:xfrm>
+            <a:off x="685800" y="4389120"/>
+            <a:ext cx="1508760" cy="731520"/>
+          </a:xfrm>
+          <a:prstGeom prst="rect">
+            <a:avLst/>
+          </a:prstGeom>
+          <a:noFill/>
+        </p:spPr>
+        <p:txBody>
+          <a:bodyPr wrap="square" lIns="45720" rIns="45720" tIns="27432" bIns="27432" anchor="ctr">
+            <a:spAutoFit/>
+          </a:bodyPr>
+          <a:lstStyle/>
+          <a:p>
+            <a:pPr algn="ctr"/>
+            <a:r>
+              <a:rPr sz="1300" b="1" i="0">
+                <a:solidFill>
+                  <a:srgbClr val="447A5A"/>
+                </a:solidFill>
+                <a:latin typeface="Arial"/>
+              </a:rPr>
+              <a:t>Equivalencia</a:t>
+            </a:r>
+          </a:p>
+        </p:txBody>
+      </p:sp>
+      <p:sp>
+        <p:nvSpPr>
+          <p:cNvPr id="16" name="TextBox 15"/>
+          <p:cNvSpPr txBox="1"/>
+          <p:nvPr/>
+        </p:nvSpPr>
+        <p:spPr>
+          <a:xfrm>
+            <a:off x="2331720" y="4389120"/>
+            <a:ext cx="3383280" cy="731520"/>
+          </a:xfrm>
+          <a:prstGeom prst="rect">
+            <a:avLst/>
+          </a:prstGeom>
+          <a:noFill/>
+        </p:spPr>
+        <p:txBody>
+          <a:bodyPr wrap="square" lIns="45720" rIns="45720" tIns="27432" bIns="27432" anchor="ctr">
+            <a:spAutoFit/>
+          </a:bodyPr>
+          <a:lstStyle/>
+          <a:p>
+            <a:pPr algn="l"/>
+            <a:r>
+              <a:rPr sz="1300" b="0" i="0">
+                <a:solidFill>
+                  <a:srgbClr val="17212B"/>
+                </a:solidFill>
+                <a:latin typeface="Arial"/>
+              </a:rPr>
+              <a:t>assert_frame_equal: las salidas de F3 son iguales a las de F2.</a:t>
+            </a:r>
+          </a:p>
+        </p:txBody>
+      </p:sp>
+      <p:graphicFrame>
+        <p:nvGraphicFramePr>
+          <p:cNvPr id="17" name="Table 16"/>
+          <p:cNvGraphicFramePr>
+            <a:graphicFrameLocks noGrp="1"/>
+          </p:cNvGraphicFramePr>
+          <p:nvPr/>
+        </p:nvGraphicFramePr>
+        <p:xfrm>
+          <a:off x="6263640" y="1508760"/>
+          <a:ext cx="5257798" cy="1920240"/>
+        </p:xfrm>
+        <a:graphic>
+          <a:graphicData uri="http://schemas.openxmlformats.org/drawingml/2006/table">
+            <a:tbl>
+              <a:tblPr firstRow="1" bandRow="0">
+                <a:tableStyleId>{5C22544A-7EE6-4342-B048-85BDC9FD1C3A}</a:tableStyleId>
+              </a:tblPr>
+              <a:tblGrid>
+                <a:gridCol w="1508760"/>
+                <a:gridCol w="1874519"/>
+                <a:gridCol w="1874519"/>
+              </a:tblGrid>
+              <a:tr h="384048">
+                <a:tc>
+                  <a:txBody>
+                    <a:bodyPr/>
+                    <a:lstStyle/>
+                    <a:p>
+                      <a:pPr algn="ctr"/>
+                      <a:r>
+                        <a:rPr sz="1300" b="1">
+                          <a:solidFill>
+                            <a:srgbClr val="17212B"/>
+                          </a:solidFill>
+                          <a:latin typeface="Arial"/>
+                        </a:rPr>
+                        <a:t>Filas</a:t>
+                      </a:r>
+                    </a:p>
+                  </a:txBody>
+                  <a:tcPr>
+                    <a:solidFill>
+                      <a:srgbClr val="EAF2F8"/>
+                    </a:solidFill>
+                  </a:tcPr>
+                </a:tc>
+                <a:tc>
+                  <a:txBody>
+                    <a:bodyPr/>
+                    <a:lstStyle/>
+                    <a:p>
+                      <a:pPr algn="ctr"/>
+                      <a:r>
+                        <a:rPr sz="1300" b="1">
+                          <a:solidFill>
+                            <a:srgbClr val="17212B"/>
+                          </a:solidFill>
+                          <a:latin typeface="Arial"/>
+                        </a:rPr>
+                        <a:t>Funcional (ms)</a:t>
+                      </a:r>
+                    </a:p>
+                  </a:txBody>
+                  <a:tcPr>
+                    <a:solidFill>
+                      <a:srgbClr val="EAF2F8"/>
+                    </a:solidFill>
+                  </a:tcPr>
+                </a:tc>
+                <a:tc>
+                  <a:txBody>
+                    <a:bodyPr/>
+                    <a:lstStyle/>
+                    <a:p>
+                      <a:pPr algn="ctr"/>
+                      <a:r>
+                        <a:rPr sz="1300" b="1">
+                          <a:solidFill>
+                            <a:srgbClr val="17212B"/>
+                          </a:solidFill>
+                          <a:latin typeface="Arial"/>
+                        </a:rPr>
+                        <a:t>POO (ms)</a:t>
+                      </a:r>
+                    </a:p>
+                  </a:txBody>
+                  <a:tcPr>
+                    <a:solidFill>
+                      <a:srgbClr val="EAF2F8"/>
+                    </a:solidFill>
+                  </a:tcPr>
+                </a:tc>
+              </a:tr>
+              <a:tr h="384048">
+                <a:tc>
+                  <a:txBody>
+                    <a:bodyPr/>
+                    <a:lstStyle/>
+                    <a:p>
+                      <a:pPr algn="ctr"/>
+                      <a:r>
+                        <a:rPr sz="1300" b="0">
+                          <a:solidFill>
+                            <a:srgbClr val="17212B"/>
+                          </a:solidFill>
+                          <a:latin typeface="Arial"/>
+                        </a:rPr>
+                        <a:t>1.000</a:t>
+                      </a:r>
+                    </a:p>
+                  </a:txBody>
+                  <a:tcPr>
+                    <a:solidFill>
+                      <a:srgbClr val="FFFFFF"/>
+                    </a:solidFill>
+                  </a:tcPr>
+                </a:tc>
+                <a:tc>
+                  <a:txBody>
+                    <a:bodyPr/>
+                    <a:lstStyle/>
+                    <a:p>
+                      <a:pPr algn="ctr"/>
+                      <a:r>
+                        <a:rPr sz="1300" b="0">
+                          <a:solidFill>
+                            <a:srgbClr val="17212B"/>
+                          </a:solidFill>
+                          <a:latin typeface="Arial"/>
+                        </a:rPr>
+                        <a:t>3,16</a:t>
+                      </a:r>
+                    </a:p>
+                  </a:txBody>
+                  <a:tcPr>
+                    <a:solidFill>
+                      <a:srgbClr val="FFFFFF"/>
+                    </a:solidFill>
+                  </a:tcPr>
+                </a:tc>
+                <a:tc>
+                  <a:txBody>
+                    <a:bodyPr/>
+                    <a:lstStyle/>
+                    <a:p>
+                      <a:pPr algn="ctr"/>
+                      <a:r>
+                        <a:rPr sz="1300" b="0">
+                          <a:solidFill>
+                            <a:srgbClr val="17212B"/>
+                          </a:solidFill>
+                          <a:latin typeface="Arial"/>
+                        </a:rPr>
+                        <a:t>9,42</a:t>
+                      </a:r>
+                    </a:p>
+                  </a:txBody>
+                  <a:tcPr>
+                    <a:solidFill>
+                      <a:srgbClr val="FFFFFF"/>
+                    </a:solidFill>
+                  </a:tcPr>
+                </a:tc>
+              </a:tr>
+              <a:tr h="384048">
+                <a:tc>
+                  <a:txBody>
+                    <a:bodyPr/>
+                    <a:lstStyle/>
+                    <a:p>
+                      <a:pPr algn="ctr"/>
+                      <a:r>
+                        <a:rPr sz="1300" b="0">
+                          <a:solidFill>
+                            <a:srgbClr val="17212B"/>
+                          </a:solidFill>
+                          <a:latin typeface="Arial"/>
+                        </a:rPr>
+                        <a:t>5.000</a:t>
+                      </a:r>
+                    </a:p>
+                  </a:txBody>
+                  <a:tcPr>
+                    <a:solidFill>
+                      <a:srgbClr val="FFFFFF"/>
+                    </a:solidFill>
+                  </a:tcPr>
+                </a:tc>
+                <a:tc>
+                  <a:txBody>
+                    <a:bodyPr/>
+                    <a:lstStyle/>
+                    <a:p>
+                      <a:pPr algn="ctr"/>
+                      <a:r>
+                        <a:rPr sz="1300" b="0">
+                          <a:solidFill>
+                            <a:srgbClr val="17212B"/>
+                          </a:solidFill>
+                          <a:latin typeface="Arial"/>
+                        </a:rPr>
+                        <a:t>4,46</a:t>
+                      </a:r>
+                    </a:p>
+                  </a:txBody>
+                  <a:tcPr>
+                    <a:solidFill>
+                      <a:srgbClr val="FFFFFF"/>
+                    </a:solidFill>
+                  </a:tcPr>
+                </a:tc>
+                <a:tc>
+                  <a:txBody>
+                    <a:bodyPr/>
+                    <a:lstStyle/>
+                    <a:p>
+                      <a:pPr algn="ctr"/>
+                      <a:r>
+                        <a:rPr sz="1300" b="0">
+                          <a:solidFill>
+                            <a:srgbClr val="17212B"/>
+                          </a:solidFill>
+                          <a:latin typeface="Arial"/>
+                        </a:rPr>
+                        <a:t>18,31</a:t>
+                      </a:r>
+                    </a:p>
+                  </a:txBody>
+                  <a:tcPr>
+                    <a:solidFill>
+                      <a:srgbClr val="FFFFFF"/>
+                    </a:solidFill>
+                  </a:tcPr>
+                </a:tc>
+              </a:tr>
+              <a:tr h="384048">
+                <a:tc>
+                  <a:txBody>
+                    <a:bodyPr/>
+                    <a:lstStyle/>
+                    <a:p>
+                      <a:pPr algn="ctr"/>
+                      <a:r>
+                        <a:rPr sz="1300" b="0">
+                          <a:solidFill>
+                            <a:srgbClr val="17212B"/>
+                          </a:solidFill>
+                          <a:latin typeface="Arial"/>
+                        </a:rPr>
+                        <a:t>10.000</a:t>
+                      </a:r>
+                    </a:p>
+                  </a:txBody>
+                  <a:tcPr>
+                    <a:solidFill>
+                      <a:srgbClr val="FFFFFF"/>
+                    </a:solidFill>
+                  </a:tcPr>
+                </a:tc>
+                <a:tc>
+                  <a:txBody>
+                    <a:bodyPr/>
+                    <a:lstStyle/>
+                    <a:p>
+                      <a:pPr algn="ctr"/>
+                      <a:r>
+                        <a:rPr sz="1300" b="0">
+                          <a:solidFill>
+                            <a:srgbClr val="17212B"/>
+                          </a:solidFill>
+                          <a:latin typeface="Arial"/>
+                        </a:rPr>
+                        <a:t>4,65</a:t>
+                      </a:r>
+                    </a:p>
+                  </a:txBody>
+                  <a:tcPr>
+                    <a:solidFill>
+                      <a:srgbClr val="FFFFFF"/>
+                    </a:solidFill>
+                  </a:tcPr>
+                </a:tc>
+                <a:tc>
+                  <a:txBody>
+                    <a:bodyPr/>
+                    <a:lstStyle/>
+                    <a:p>
+                      <a:pPr algn="ctr"/>
+                      <a:r>
+                        <a:rPr sz="1300" b="0">
+                          <a:solidFill>
+                            <a:srgbClr val="17212B"/>
+                          </a:solidFill>
+                          <a:latin typeface="Arial"/>
+                        </a:rPr>
+                        <a:t>12,75</a:t>
+                      </a:r>
+                    </a:p>
+                  </a:txBody>
+                  <a:tcPr>
+                    <a:solidFill>
+                      <a:srgbClr val="FFFFFF"/>
+                    </a:solidFill>
+                  </a:tcPr>
+                </a:tc>
+              </a:tr>
+              <a:tr h="384048">
+                <a:tc>
+                  <a:txBody>
+                    <a:bodyPr/>
+                    <a:lstStyle/>
+                    <a:p>
+                      <a:pPr algn="ctr"/>
+                      <a:r>
+                        <a:rPr sz="1300" b="0">
+                          <a:solidFill>
+                            <a:srgbClr val="17212B"/>
+                          </a:solidFill>
+                          <a:latin typeface="Arial"/>
+                        </a:rPr>
+                        <a:t>20.000</a:t>
+                      </a:r>
+                    </a:p>
+                  </a:txBody>
+                  <a:tcPr>
+                    <a:solidFill>
+                      <a:srgbClr val="FFFFFF"/>
+                    </a:solidFill>
+                  </a:tcPr>
+                </a:tc>
+                <a:tc>
+                  <a:txBody>
+                    <a:bodyPr/>
+                    <a:lstStyle/>
+                    <a:p>
+                      <a:pPr algn="ctr"/>
+                      <a:r>
+                        <a:rPr sz="1300" b="0">
+                          <a:solidFill>
+                            <a:srgbClr val="17212B"/>
+                          </a:solidFill>
+                          <a:latin typeface="Arial"/>
+                        </a:rPr>
+                        <a:t>6,89</a:t>
+                      </a:r>
+                    </a:p>
+                  </a:txBody>
+                  <a:tcPr>
+                    <a:solidFill>
+                      <a:srgbClr val="FFFFFF"/>
+                    </a:solidFill>
+                  </a:tcPr>
+                </a:tc>
+                <a:tc>
+                  <a:txBody>
+                    <a:bodyPr/>
+                    <a:lstStyle/>
+                    <a:p>
+                      <a:pPr algn="ctr"/>
+                      <a:r>
+                        <a:rPr sz="1300" b="0">
+                          <a:solidFill>
+                            <a:srgbClr val="17212B"/>
+                          </a:solidFill>
+                          <a:latin typeface="Arial"/>
+                        </a:rPr>
+                        <a:t>14,60</a:t>
+                      </a:r>
+                    </a:p>
+                  </a:txBody>
+                  <a:tcPr>
+                    <a:solidFill>
+                      <a:srgbClr val="FFFFFF"/>
+                    </a:solidFill>
+                  </a:tcPr>
+                </a:tc>
+              </a:tr>
+            </a:tbl>
+          </a:graphicData>
+        </a:graphic>
+      </p:graphicFrame>
+      <p:sp>
+        <p:nvSpPr>
+          <p:cNvPr id="18" name="TextBox 17"/>
+          <p:cNvSpPr txBox="1"/>
+          <p:nvPr/>
+        </p:nvSpPr>
+        <p:spPr>
+          <a:xfrm>
+            <a:off x="6263640" y="3520440"/>
+            <a:ext cx="5257800" cy="274320"/>
+          </a:xfrm>
+          <a:prstGeom prst="rect">
+            <a:avLst/>
+          </a:prstGeom>
+          <a:noFill/>
+        </p:spPr>
+        <p:txBody>
+          <a:bodyPr wrap="square" lIns="45720" rIns="45720" tIns="27432" bIns="27432" anchor="t">
+            <a:spAutoFit/>
+          </a:bodyPr>
+          <a:lstStyle/>
+          <a:p>
+            <a:pPr algn="ctr"/>
+            <a:r>
+              <a:rPr sz="1050" b="0" i="0">
+                <a:solidFill>
+                  <a:srgbClr val="5B6570"/>
+                </a:solidFill>
+                <a:latin typeface="Arial"/>
+              </a:rPr>
+              <a:t>Menor tiempo entre repeticiones medido con timeit</a:t>
+            </a:r>
+          </a:p>
+        </p:txBody>
+      </p:sp>
+      <p:sp>
+        <p:nvSpPr>
+          <p:cNvPr id="19" name="TextBox 18"/>
+          <p:cNvSpPr txBox="1"/>
+          <p:nvPr/>
+        </p:nvSpPr>
+        <p:spPr>
+          <a:xfrm>
+            <a:off x="6263640" y="3931920"/>
+            <a:ext cx="5257800" cy="1554480"/>
+          </a:xfrm>
+          <a:prstGeom prst="rect">
+            <a:avLst/>
+          </a:prstGeom>
+          <a:noFill/>
+        </p:spPr>
+        <p:txBody>
+          <a:bodyPr wrap="square" lIns="45720" rIns="45720" tIns="27432" bIns="27432" anchor="t">
+            <a:spAutoFit/>
+          </a:bodyPr>
+          <a:lstStyle/>
+          <a:p>
+            <a:pPr algn="l">
+              <a:spcAft>
+                <a:spcPts val="800"/>
+              </a:spcAft>
+            </a:pPr>
+            <a:r>
+              <a:rPr sz="1300" b="1" i="0">
+                <a:solidFill>
+                  <a:srgbClr val="17212B"/>
+                </a:solidFill>
+                <a:latin typeface="Courier New"/>
+              </a:rPr>
+              <a:t>tracemalloc</a:t>
+            </a:r>
+            <a:r>
+              <a:rPr sz="1300" b="0" i="0">
+                <a:solidFill>
+                  <a:srgbClr val="17212B"/>
+                </a:solidFill>
+                <a:latin typeface="Arial"/>
+              </a:rPr>
+              <a:t> midió la memoria máxima: 0,663 MiB funcional y 1,239 MiB POO.</a:t>
+            </a:r>
+          </a:p>
+          <a:p>
+            <a:pPr algn="l">
+              <a:spcAft>
+                <a:spcPts val="800"/>
+              </a:spcAft>
+            </a:pPr>
+            <a:r>
+              <a:rPr sz="1300" b="1" i="0">
+                <a:solidFill>
+                  <a:srgbClr val="17212B"/>
+                </a:solidFill>
+                <a:latin typeface="Arial"/>
+              </a:rPr>
+              <a:t>Decisión: </a:t>
+            </a:r>
+            <a:r>
+              <a:rPr sz="1300" b="0" i="0">
+                <a:solidFill>
+                  <a:srgbClr val="17212B"/>
+                </a:solidFill>
+                <a:latin typeface="Arial"/>
+              </a:rPr>
+              <a:t>la versión funcional fue más rápida, pero se conservó la POO por ser más fácil de probar y extender. Ambas crecen de forma lineal, O(n).</a:t>
+            </a:r>
+          </a:p>
+        </p:txBody>
+      </p:sp>
+      <p:sp>
+        <p:nvSpPr>
+          <p:cNvPr id="20" name="TextBox 19"/>
+          <p:cNvSpPr txBox="1"/>
+          <p:nvPr/>
+        </p:nvSpPr>
+        <p:spPr>
+          <a:xfrm>
+            <a:off x="11334902" y="6305702"/>
+            <a:ext cx="400050" cy="228600"/>
+          </a:xfrm>
+          <a:prstGeom prst="rect">
+            <a:avLst/>
+          </a:prstGeom>
+          <a:noFill/>
+        </p:spPr>
+        <p:txBody>
+          <a:bodyPr wrap="square" lIns="45720" rIns="45720" tIns="27432" bIns="27432" anchor="t">
+            <a:spAutoFit/>
+          </a:bodyPr>
+          <a:lstStyle/>
+          <a:p>
+            <a:pPr algn="r"/>
+            <a:r>
+              <a:rPr sz="1050" b="0" i="0">
+                <a:solidFill>
+                  <a:srgbClr val="5B6570"/>
+                </a:solidFill>
+                <a:latin typeface="Arial"/>
+              </a:rPr>
+              <a:t>7</a:t>
+            </a:r>
+          </a:p>
+        </p:txBody>
+      </p:sp>
+    </p:spTree>
+  </p:cSld>
+  <p:clrMapOvr>
+    <a:masterClrMapping/>
+  </p:clrMapOvr>
+</p:sld>
+</file>
+
+<file path=ppt/slides/slide13.xml><?xml version="1.0" encoding="utf-8"?>
+<p:sld xmlns:a="http://schemas.openxmlformats.org/drawingml/2006/main" xmlns:p="http://schemas.openxmlformats.org/presentationml/2006/main" xmlns:r="http://schemas.openxmlformats.org/officeDocument/2006/relationships">
+  <p:cSld>
+    <p:bg>
+      <p:bgPr>
+        <a:solidFill>
+          <a:srgbClr val="FFFFFF"/>
+        </a:solidFill>
+        <a:effectLst/>
+      </p:bgPr>
+    </p:bg>
+    <p:spTree>
+      <p:nvGrpSpPr>
+        <p:cNvPr id="1" name=""/>
+        <p:cNvGrpSpPr/>
+        <p:nvPr/>
+      </p:nvGrpSpPr>
+      <p:grpSpPr/>
+      <p:sp>
+        <p:nvSpPr>
+          <p:cNvPr id="2" name="Rectangle 1"/>
+          <p:cNvSpPr/>
+          <p:nvPr/>
+        </p:nvSpPr>
+        <p:spPr>
+          <a:xfrm>
+            <a:off x="0" y="0"/>
+            <a:ext cx="171450" cy="6858000"/>
+          </a:xfrm>
+          <a:prstGeom prst="rect">
+            <a:avLst/>
+          </a:prstGeom>
+          <a:solidFill>
+            <a:srgbClr val="5B8DB8"/>
+          </a:solidFill>
+          <a:ln>
+            <a:noFill/>
+          </a:ln>
+          <a:effectLst/>
+        </p:spPr>
+        <p:style>
+          <a:lnRef idx="1">
+            <a:schemeClr val="accent1"/>
+          </a:lnRef>
+          <a:fillRef idx="3">
+            <a:schemeClr val="accent1"/>
+          </a:fillRef>
+          <a:effectRef idx="2">
+            <a:schemeClr val="accent1"/>
+          </a:effectRef>
+          <a:fontRef idx="minor">
+            <a:schemeClr val="lt1"/>
+          </a:fontRef>
+        </p:style>
+        <p:txBody>
+          <a:bodyPr rtlCol="0" anchor="ctr"/>
+          <a:lstStyle/>
+          <a:p>
+            <a:pPr algn="ctr"/>
+          </a:p>
+        </p:txBody>
+      </p:sp>
+      <p:sp>
+        <p:nvSpPr>
+          <p:cNvPr id="3" name="TextBox 2"/>
+          <p:cNvSpPr txBox="1"/>
+          <p:nvPr/>
+        </p:nvSpPr>
+        <p:spPr>
+          <a:xfrm>
+            <a:off x="552297" y="342900"/>
+            <a:ext cx="10570464" cy="493776"/>
+          </a:xfrm>
+          <a:prstGeom prst="rect">
+            <a:avLst/>
+          </a:prstGeom>
+          <a:noFill/>
+        </p:spPr>
+        <p:txBody>
+          <a:bodyPr wrap="square" lIns="45720" rIns="45720" tIns="27432" bIns="27432" anchor="t">
+            <a:spAutoFit/>
+          </a:bodyPr>
+          <a:lstStyle/>
+          <a:p>
+            <a:pPr algn="l"/>
+            <a:r>
+              <a:rPr sz="2550" b="1" i="0">
+                <a:solidFill>
+                  <a:srgbClr val="17212B"/>
+                </a:solidFill>
+                <a:latin typeface="Arial"/>
+              </a:rPr>
+              <a:t>Fase 4: volver a valores que una persona pueda leer</a:t>
+            </a:r>
+          </a:p>
+        </p:txBody>
+      </p:sp>
+      <p:sp>
+        <p:nvSpPr>
+          <p:cNvPr id="4" name="TextBox 3"/>
+          <p:cNvSpPr txBox="1"/>
+          <p:nvPr/>
+        </p:nvSpPr>
+        <p:spPr>
+          <a:xfrm>
+            <a:off x="571500" y="838504"/>
+            <a:ext cx="10287000" cy="283464"/>
+          </a:xfrm>
+          <a:prstGeom prst="rect">
+            <a:avLst/>
+          </a:prstGeom>
+          <a:noFill/>
+        </p:spPr>
+        <p:txBody>
+          <a:bodyPr wrap="square" lIns="45720" rIns="45720" tIns="27432" bIns="27432" anchor="t">
+            <a:spAutoFit/>
+          </a:bodyPr>
+          <a:lstStyle/>
+          <a:p>
+            <a:pPr algn="l"/>
+            <a:r>
+              <a:rPr sz="1275" b="0" i="0">
+                <a:solidFill>
+                  <a:srgbClr val="5B6570"/>
+                </a:solidFill>
+                <a:latin typeface="Arial"/>
+              </a:rPr>
+              <a:t>Los datos de F3 sirven al código, pero están escalados y Type aparece repartido en tres columnas.</a:t>
+            </a:r>
+          </a:p>
+        </p:txBody>
+      </p:sp>
+      <p:sp>
+        <p:nvSpPr>
+          <p:cNvPr id="5" name="Rounded Rectangle 4"/>
+          <p:cNvSpPr/>
+          <p:nvPr/>
+        </p:nvSpPr>
+        <p:spPr>
+          <a:xfrm>
+            <a:off x="685800" y="1691640"/>
+            <a:ext cx="3108960" cy="914400"/>
+          </a:xfrm>
+          <a:prstGeom prst="roundRect">
+            <a:avLst>
+              <a:gd name="adj" fmla="val 8000"/>
+            </a:avLst>
+          </a:prstGeom>
+          <a:solidFill>
+            <a:srgbClr val="F5F7F8"/>
+          </a:solidFill>
+          <a:ln w="9525">
+            <a:solidFill>
+              <a:srgbClr val="D7DCE1"/>
+            </a:solidFill>
+          </a:ln>
+          <a:effectLst/>
+        </p:spPr>
+        <p:style>
+          <a:lnRef idx="1">
+            <a:schemeClr val="accent1"/>
+          </a:lnRef>
+          <a:fillRef idx="3">
+            <a:schemeClr val="accent1"/>
+          </a:fillRef>
+          <a:effectRef idx="2">
+            <a:schemeClr val="accent1"/>
+          </a:effectRef>
+          <a:fontRef idx="minor">
+            <a:schemeClr val="lt1"/>
+          </a:fontRef>
+        </p:style>
+        <p:txBody>
+          <a:bodyPr rtlCol="0" anchor="ctr"/>
+          <a:lstStyle/>
+          <a:p>
+            <a:pPr algn="ctr"/>
+          </a:p>
+        </p:txBody>
+      </p:sp>
+      <p:sp>
+        <p:nvSpPr>
+          <p:cNvPr id="6" name="TextBox 5"/>
+          <p:cNvSpPr txBox="1"/>
+          <p:nvPr/>
+        </p:nvSpPr>
+        <p:spPr>
+          <a:xfrm>
+            <a:off x="685800" y="1691640"/>
+            <a:ext cx="3108960" cy="914400"/>
+          </a:xfrm>
+          <a:prstGeom prst="rect">
+            <a:avLst/>
+          </a:prstGeom>
+          <a:noFill/>
+        </p:spPr>
+        <p:txBody>
+          <a:bodyPr wrap="square" lIns="45720" rIns="45720" tIns="27432" bIns="27432" anchor="ctr">
+            <a:spAutoFit/>
+          </a:bodyPr>
+          <a:lstStyle/>
+          <a:p>
+            <a:pPr algn="ctr"/>
+            <a:r>
+              <a:rPr sz="1400" b="1" i="0">
+                <a:solidFill>
+                  <a:srgbClr val="17212B"/>
+                </a:solidFill>
+                <a:latin typeface="Arial"/>
+              </a:rPr>
+              <a:t>Valor escalado</a:t>
+            </a:r>
+          </a:p>
+        </p:txBody>
+      </p:sp>
+      <p:sp>
+        <p:nvSpPr>
+          <p:cNvPr id="7" name="Right Arrow 6"/>
+          <p:cNvSpPr/>
+          <p:nvPr/>
+        </p:nvSpPr>
+        <p:spPr>
+          <a:xfrm>
+            <a:off x="3977639" y="2029968"/>
+            <a:ext cx="365760" cy="237744"/>
+          </a:xfrm>
+          <a:prstGeom prst="rightArrow">
+            <a:avLst/>
+          </a:prstGeom>
+          <a:solidFill>
+            <a:srgbClr val="5B6570"/>
+          </a:solidFill>
+          <a:ln>
+            <a:noFill/>
+          </a:ln>
+          <a:effectLst/>
+        </p:spPr>
+        <p:style>
+          <a:lnRef idx="1">
+            <a:schemeClr val="accent1"/>
+          </a:lnRef>
+          <a:fillRef idx="3">
+            <a:schemeClr val="accent1"/>
+          </a:fillRef>
+          <a:effectRef idx="2">
+            <a:schemeClr val="accent1"/>
+          </a:effectRef>
+          <a:fontRef idx="minor">
+            <a:schemeClr val="lt1"/>
+          </a:fontRef>
+        </p:style>
+        <p:txBody>
+          <a:bodyPr rtlCol="0" anchor="ctr"/>
+          <a:lstStyle/>
+          <a:p>
+            <a:pPr algn="ctr"/>
+          </a:p>
+        </p:txBody>
+      </p:sp>
+      <p:sp>
+        <p:nvSpPr>
+          <p:cNvPr id="8" name="Rounded Rectangle 7"/>
+          <p:cNvSpPr/>
+          <p:nvPr/>
+        </p:nvSpPr>
+        <p:spPr>
+          <a:xfrm>
+            <a:off x="4526280" y="1691640"/>
+            <a:ext cx="2743200" cy="914400"/>
+          </a:xfrm>
+          <a:prstGeom prst="roundRect">
+            <a:avLst>
+              <a:gd name="adj" fmla="val 8000"/>
+            </a:avLst>
+          </a:prstGeom>
+          <a:solidFill>
+            <a:srgbClr val="EAF2F8"/>
+          </a:solidFill>
+          <a:ln w="9525">
+            <a:solidFill>
+              <a:srgbClr val="5B8DB8"/>
+            </a:solidFill>
+          </a:ln>
+          <a:effectLst/>
+        </p:spPr>
+        <p:style>
+          <a:lnRef idx="1">
+            <a:schemeClr val="accent1"/>
+          </a:lnRef>
+          <a:fillRef idx="3">
+            <a:schemeClr val="accent1"/>
+          </a:fillRef>
+          <a:effectRef idx="2">
+            <a:schemeClr val="accent1"/>
+          </a:effectRef>
+          <a:fontRef idx="minor">
+            <a:schemeClr val="lt1"/>
+          </a:fontRef>
+        </p:style>
+        <p:txBody>
+          <a:bodyPr rtlCol="0" anchor="ctr"/>
+          <a:lstStyle/>
+          <a:p>
+            <a:pPr algn="ctr"/>
+          </a:p>
+        </p:txBody>
+      </p:sp>
+      <p:sp>
+        <p:nvSpPr>
+          <p:cNvPr id="9" name="TextBox 8"/>
+          <p:cNvSpPr txBox="1"/>
+          <p:nvPr/>
+        </p:nvSpPr>
+        <p:spPr>
+          <a:xfrm>
+            <a:off x="4526280" y="1691640"/>
+            <a:ext cx="2743200" cy="914400"/>
+          </a:xfrm>
+          <a:prstGeom prst="rect">
+            <a:avLst/>
+          </a:prstGeom>
+          <a:noFill/>
+        </p:spPr>
+        <p:txBody>
+          <a:bodyPr wrap="square" lIns="45720" rIns="45720" tIns="27432" bIns="27432" anchor="ctr">
+            <a:spAutoFit/>
+          </a:bodyPr>
+          <a:lstStyle/>
+          <a:p>
+            <a:pPr algn="ctr"/>
+            <a:r>
+              <a:rPr sz="1400" b="1" i="0">
+                <a:solidFill>
+                  <a:srgbClr val="356A96"/>
+                </a:solidFill>
+                <a:latin typeface="Courier New"/>
+              </a:rPr>
+              <a:t>× IQR + mediana</a:t>
+            </a:r>
+          </a:p>
+        </p:txBody>
+      </p:sp>
+      <p:sp>
+        <p:nvSpPr>
+          <p:cNvPr id="10" name="Right Arrow 9"/>
+          <p:cNvSpPr/>
+          <p:nvPr/>
+        </p:nvSpPr>
+        <p:spPr>
+          <a:xfrm>
+            <a:off x="7452360" y="2029968"/>
+            <a:ext cx="365760" cy="237744"/>
+          </a:xfrm>
+          <a:prstGeom prst="rightArrow">
+            <a:avLst/>
+          </a:prstGeom>
+          <a:solidFill>
+            <a:srgbClr val="5B6570"/>
+          </a:solidFill>
+          <a:ln>
+            <a:noFill/>
+          </a:ln>
+          <a:effectLst/>
+        </p:spPr>
+        <p:style>
+          <a:lnRef idx="1">
+            <a:schemeClr val="accent1"/>
+          </a:lnRef>
+          <a:fillRef idx="3">
+            <a:schemeClr val="accent1"/>
+          </a:fillRef>
+          <a:effectRef idx="2">
+            <a:schemeClr val="accent1"/>
+          </a:effectRef>
+          <a:fontRef idx="minor">
+            <a:schemeClr val="lt1"/>
+          </a:fontRef>
+        </p:style>
+        <p:txBody>
+          <a:bodyPr rtlCol="0" anchor="ctr"/>
+          <a:lstStyle/>
+          <a:p>
+            <a:pPr algn="ctr"/>
+          </a:p>
+        </p:txBody>
+      </p:sp>
+      <p:sp>
+        <p:nvSpPr>
+          <p:cNvPr id="11" name="Rounded Rectangle 10"/>
+          <p:cNvSpPr/>
+          <p:nvPr/>
+        </p:nvSpPr>
+        <p:spPr>
+          <a:xfrm>
+            <a:off x="8001000" y="1691640"/>
+            <a:ext cx="3474720" cy="914400"/>
+          </a:xfrm>
+          <a:prstGeom prst="roundRect">
+            <a:avLst>
+              <a:gd name="adj" fmla="val 8000"/>
+            </a:avLst>
+          </a:prstGeom>
+          <a:solidFill>
+            <a:srgbClr val="F9EAEA"/>
+          </a:solidFill>
+          <a:ln w="9525">
+            <a:solidFill>
+              <a:srgbClr val="C94C4C"/>
+            </a:solidFill>
+          </a:ln>
+          <a:effectLst/>
+        </p:spPr>
+        <p:style>
+          <a:lnRef idx="1">
+            <a:schemeClr val="accent1"/>
+          </a:lnRef>
+          <a:fillRef idx="3">
+            <a:schemeClr val="accent1"/>
+          </a:fillRef>
+          <a:effectRef idx="2">
+            <a:schemeClr val="accent1"/>
+          </a:effectRef>
+          <a:fontRef idx="minor">
+            <a:schemeClr val="lt1"/>
+          </a:fontRef>
+        </p:style>
+        <p:txBody>
+          <a:bodyPr rtlCol="0" anchor="ctr"/>
+          <a:lstStyle/>
+          <a:p>
+            <a:pPr algn="ctr"/>
+          </a:p>
+        </p:txBody>
+      </p:sp>
+      <p:sp>
+        <p:nvSpPr>
+          <p:cNvPr id="12" name="TextBox 11"/>
+          <p:cNvSpPr txBox="1"/>
+          <p:nvPr/>
+        </p:nvSpPr>
+        <p:spPr>
+          <a:xfrm>
+            <a:off x="8001000" y="1691640"/>
+            <a:ext cx="3474720" cy="914400"/>
+          </a:xfrm>
+          <a:prstGeom prst="rect">
+            <a:avLst/>
+          </a:prstGeom>
+          <a:noFill/>
+        </p:spPr>
+        <p:txBody>
+          <a:bodyPr wrap="square" lIns="45720" rIns="45720" tIns="27432" bIns="27432" anchor="ctr">
+            <a:spAutoFit/>
+          </a:bodyPr>
+          <a:lstStyle/>
+          <a:p>
+            <a:pPr algn="ctr"/>
+            <a:r>
+              <a:rPr sz="1600" b="1" i="0">
+                <a:solidFill>
+                  <a:srgbClr val="C94C4C"/>
+                </a:solidFill>
+                <a:latin typeface="Arial"/>
+              </a:rPr>
+              <a:t>rpm · Nm · min · K</a:t>
+            </a:r>
+          </a:p>
+        </p:txBody>
+      </p:sp>
+      <p:sp>
+        <p:nvSpPr>
+          <p:cNvPr id="13" name="Rounded Rectangle 12"/>
+          <p:cNvSpPr/>
+          <p:nvPr/>
+        </p:nvSpPr>
+        <p:spPr>
+          <a:xfrm>
+            <a:off x="685800" y="3017520"/>
+            <a:ext cx="3108960" cy="914400"/>
+          </a:xfrm>
+          <a:prstGeom prst="roundRect">
+            <a:avLst>
+              <a:gd name="adj" fmla="val 8000"/>
+            </a:avLst>
+          </a:prstGeom>
+          <a:solidFill>
+            <a:srgbClr val="F5F7F8"/>
+          </a:solidFill>
+          <a:ln w="9525">
+            <a:solidFill>
+              <a:srgbClr val="D7DCE1"/>
+            </a:solidFill>
+          </a:ln>
+          <a:effectLst/>
+        </p:spPr>
+        <p:style>
+          <a:lnRef idx="1">
+            <a:schemeClr val="accent1"/>
+          </a:lnRef>
+          <a:fillRef idx="3">
+            <a:schemeClr val="accent1"/>
+          </a:fillRef>
+          <a:effectRef idx="2">
+            <a:schemeClr val="accent1"/>
+          </a:effectRef>
+          <a:fontRef idx="minor">
+            <a:schemeClr val="lt1"/>
+          </a:fontRef>
+        </p:style>
+        <p:txBody>
+          <a:bodyPr rtlCol="0" anchor="ctr"/>
+          <a:lstStyle/>
+          <a:p>
+            <a:pPr algn="ctr"/>
+          </a:p>
+        </p:txBody>
+      </p:sp>
+      <p:sp>
+        <p:nvSpPr>
+          <p:cNvPr id="14" name="TextBox 13"/>
+          <p:cNvSpPr txBox="1"/>
+          <p:nvPr/>
+        </p:nvSpPr>
+        <p:spPr>
+          <a:xfrm>
+            <a:off x="685800" y="3017520"/>
+            <a:ext cx="3108960" cy="914400"/>
+          </a:xfrm>
+          <a:prstGeom prst="rect">
+            <a:avLst/>
+          </a:prstGeom>
+          <a:noFill/>
+        </p:spPr>
+        <p:txBody>
+          <a:bodyPr wrap="square" lIns="45720" rIns="45720" tIns="27432" bIns="27432" anchor="ctr">
+            <a:spAutoFit/>
+          </a:bodyPr>
+          <a:lstStyle/>
+          <a:p>
+            <a:pPr algn="ctr"/>
+            <a:r>
+              <a:rPr sz="1400" b="1" i="0">
+                <a:solidFill>
+                  <a:srgbClr val="17212B"/>
+                </a:solidFill>
+                <a:latin typeface="Arial"/>
+              </a:rPr>
+              <a:t>Type_H 0 · Type_L 1 · Type_M 0</a:t>
+            </a:r>
+          </a:p>
+        </p:txBody>
+      </p:sp>
+      <p:sp>
+        <p:nvSpPr>
+          <p:cNvPr id="15" name="Right Arrow 14"/>
+          <p:cNvSpPr/>
+          <p:nvPr/>
+        </p:nvSpPr>
+        <p:spPr>
+          <a:xfrm>
+            <a:off x="3977639" y="3355848"/>
+            <a:ext cx="365760" cy="237744"/>
+          </a:xfrm>
+          <a:prstGeom prst="rightArrow">
+            <a:avLst/>
+          </a:prstGeom>
+          <a:solidFill>
+            <a:srgbClr val="5B6570"/>
+          </a:solidFill>
+          <a:ln>
+            <a:noFill/>
+          </a:ln>
+          <a:effectLst/>
+        </p:spPr>
+        <p:style>
+          <a:lnRef idx="1">
+            <a:schemeClr val="accent1"/>
+          </a:lnRef>
+          <a:fillRef idx="3">
+            <a:schemeClr val="accent1"/>
+          </a:fillRef>
+          <a:effectRef idx="2">
+            <a:schemeClr val="accent1"/>
+          </a:effectRef>
+          <a:fontRef idx="minor">
+            <a:schemeClr val="lt1"/>
+          </a:fontRef>
+        </p:style>
+        <p:txBody>
+          <a:bodyPr rtlCol="0" anchor="ctr"/>
+          <a:lstStyle/>
+          <a:p>
+            <a:pPr algn="ctr"/>
+          </a:p>
+        </p:txBody>
+      </p:sp>
+      <p:sp>
+        <p:nvSpPr>
+          <p:cNvPr id="16" name="Rounded Rectangle 15"/>
+          <p:cNvSpPr/>
+          <p:nvPr/>
+        </p:nvSpPr>
+        <p:spPr>
+          <a:xfrm>
+            <a:off x="4526280" y="3017520"/>
+            <a:ext cx="2743200" cy="914400"/>
+          </a:xfrm>
+          <a:prstGeom prst="roundRect">
+            <a:avLst>
+              <a:gd name="adj" fmla="val 8000"/>
+            </a:avLst>
+          </a:prstGeom>
+          <a:solidFill>
+            <a:srgbClr val="EAF2F8"/>
+          </a:solidFill>
+          <a:ln w="9525">
+            <a:solidFill>
+              <a:srgbClr val="5B8DB8"/>
+            </a:solidFill>
+          </a:ln>
+          <a:effectLst/>
+        </p:spPr>
+        <p:style>
+          <a:lnRef idx="1">
+            <a:schemeClr val="accent1"/>
+          </a:lnRef>
+          <a:fillRef idx="3">
+            <a:schemeClr val="accent1"/>
+          </a:fillRef>
+          <a:effectRef idx="2">
+            <a:schemeClr val="accent1"/>
+          </a:effectRef>
+          <a:fontRef idx="minor">
+            <a:schemeClr val="lt1"/>
+          </a:fontRef>
+        </p:style>
+        <p:txBody>
+          <a:bodyPr rtlCol="0" anchor="ctr"/>
+          <a:lstStyle/>
+          <a:p>
+            <a:pPr algn="ctr"/>
+          </a:p>
+        </p:txBody>
+      </p:sp>
+      <p:sp>
+        <p:nvSpPr>
+          <p:cNvPr id="17" name="TextBox 16"/>
+          <p:cNvSpPr txBox="1"/>
+          <p:nvPr/>
+        </p:nvSpPr>
+        <p:spPr>
+          <a:xfrm>
+            <a:off x="4526280" y="3017520"/>
+            <a:ext cx="2743200" cy="914400"/>
+          </a:xfrm>
+          <a:prstGeom prst="rect">
+            <a:avLst/>
+          </a:prstGeom>
+          <a:noFill/>
+        </p:spPr>
+        <p:txBody>
+          <a:bodyPr wrap="square" lIns="45720" rIns="45720" tIns="27432" bIns="27432" anchor="ctr">
+            <a:spAutoFit/>
+          </a:bodyPr>
+          <a:lstStyle/>
+          <a:p>
+            <a:pPr algn="ctr"/>
+            <a:r>
+              <a:rPr sz="1400" b="1" i="0">
+                <a:solidFill>
+                  <a:srgbClr val="356A96"/>
+                </a:solidFill>
+                <a:latin typeface="Arial"/>
+              </a:rPr>
+              <a:t>columna activa</a:t>
+            </a:r>
+          </a:p>
+        </p:txBody>
+      </p:sp>
+      <p:sp>
+        <p:nvSpPr>
+          <p:cNvPr id="18" name="Right Arrow 17"/>
+          <p:cNvSpPr/>
+          <p:nvPr/>
+        </p:nvSpPr>
+        <p:spPr>
+          <a:xfrm>
+            <a:off x="7452360" y="3355848"/>
+            <a:ext cx="365760" cy="237744"/>
+          </a:xfrm>
+          <a:prstGeom prst="rightArrow">
+            <a:avLst/>
+          </a:prstGeom>
+          <a:solidFill>
+            <a:srgbClr val="5B6570"/>
+          </a:solidFill>
+          <a:ln>
+            <a:noFill/>
+          </a:ln>
+          <a:effectLst/>
+        </p:spPr>
+        <p:style>
+          <a:lnRef idx="1">
+            <a:schemeClr val="accent1"/>
+          </a:lnRef>
+          <a:fillRef idx="3">
+            <a:schemeClr val="accent1"/>
+          </a:fillRef>
+          <a:effectRef idx="2">
+            <a:schemeClr val="accent1"/>
+          </a:effectRef>
+          <a:fontRef idx="minor">
+            <a:schemeClr val="lt1"/>
+          </a:fontRef>
+        </p:style>
+        <p:txBody>
+          <a:bodyPr rtlCol="0" anchor="ctr"/>
+          <a:lstStyle/>
+          <a:p>
+            <a:pPr algn="ctr"/>
+          </a:p>
+        </p:txBody>
+      </p:sp>
+      <p:sp>
+        <p:nvSpPr>
+          <p:cNvPr id="19" name="Rounded Rectangle 18"/>
+          <p:cNvSpPr/>
+          <p:nvPr/>
+        </p:nvSpPr>
+        <p:spPr>
+          <a:xfrm>
+            <a:off x="8001000" y="3017520"/>
+            <a:ext cx="3474720" cy="914400"/>
+          </a:xfrm>
+          <a:prstGeom prst="roundRect">
+            <a:avLst>
+              <a:gd name="adj" fmla="val 8000"/>
+            </a:avLst>
+          </a:prstGeom>
+          <a:solidFill>
+            <a:srgbClr val="F9EAEA"/>
+          </a:solidFill>
+          <a:ln w="9525">
+            <a:solidFill>
+              <a:srgbClr val="C94C4C"/>
+            </a:solidFill>
+          </a:ln>
+          <a:effectLst/>
+        </p:spPr>
+        <p:style>
+          <a:lnRef idx="1">
+            <a:schemeClr val="accent1"/>
+          </a:lnRef>
+          <a:fillRef idx="3">
+            <a:schemeClr val="accent1"/>
+          </a:fillRef>
+          <a:effectRef idx="2">
+            <a:schemeClr val="accent1"/>
+          </a:effectRef>
+          <a:fontRef idx="minor">
+            <a:schemeClr val="lt1"/>
+          </a:fontRef>
+        </p:style>
+        <p:txBody>
+          <a:bodyPr rtlCol="0" anchor="ctr"/>
+          <a:lstStyle/>
+          <a:p>
+            <a:pPr algn="ctr"/>
+          </a:p>
+        </p:txBody>
+      </p:sp>
+      <p:sp>
+        <p:nvSpPr>
+          <p:cNvPr id="20" name="TextBox 19"/>
+          <p:cNvSpPr txBox="1"/>
+          <p:nvPr/>
+        </p:nvSpPr>
+        <p:spPr>
+          <a:xfrm>
+            <a:off x="8001000" y="3017520"/>
+            <a:ext cx="3474720" cy="914400"/>
+          </a:xfrm>
+          <a:prstGeom prst="rect">
+            <a:avLst/>
+          </a:prstGeom>
+          <a:noFill/>
+        </p:spPr>
+        <p:txBody>
+          <a:bodyPr wrap="square" lIns="45720" rIns="45720" tIns="27432" bIns="27432" anchor="ctr">
+            <a:spAutoFit/>
+          </a:bodyPr>
+          <a:lstStyle/>
+          <a:p>
+            <a:pPr algn="ctr"/>
+            <a:r>
+              <a:rPr sz="1600" b="1" i="0">
+                <a:solidFill>
+                  <a:srgbClr val="C94C4C"/>
+                </a:solidFill>
+                <a:latin typeface="Arial"/>
+              </a:rPr>
+              <a:t>L</a:t>
+            </a:r>
+          </a:p>
+        </p:txBody>
+      </p:sp>
+      <p:sp>
+        <p:nvSpPr>
+          <p:cNvPr id="21" name="TextBox 20"/>
+          <p:cNvSpPr txBox="1"/>
+          <p:nvPr/>
+        </p:nvSpPr>
+        <p:spPr>
+          <a:xfrm>
+            <a:off x="685800" y="4526280"/>
+            <a:ext cx="10789920" cy="1097280"/>
+          </a:xfrm>
+          <a:prstGeom prst="rect">
+            <a:avLst/>
+          </a:prstGeom>
+          <a:noFill/>
+        </p:spPr>
+        <p:txBody>
+          <a:bodyPr wrap="square" lIns="45720" rIns="45720" tIns="27432" bIns="27432" anchor="t">
+            <a:spAutoFit/>
+          </a:bodyPr>
+          <a:lstStyle/>
+          <a:p>
+            <a:pPr algn="l">
+              <a:spcAft>
+                <a:spcPts val="800"/>
+              </a:spcAft>
+            </a:pPr>
+            <a:r>
+              <a:rPr sz="1500" b="1" i="0">
+                <a:solidFill>
+                  <a:srgbClr val="17212B"/>
+                </a:solidFill>
+                <a:latin typeface="Arial"/>
+              </a:rPr>
+              <a:t>Comprobación: </a:t>
+            </a:r>
+            <a:r>
+              <a:rPr sz="1500" b="0" i="0">
+                <a:solidFill>
+                  <a:srgbClr val="17212B"/>
+                </a:solidFill>
+                <a:latin typeface="Arial"/>
+              </a:rPr>
+              <a:t>las 10.000 filas reconstruidas coinciden con el archivo original de F1.</a:t>
+            </a:r>
+          </a:p>
+          <a:p>
+            <a:pPr algn="l">
+              <a:spcAft>
+                <a:spcPts val="800"/>
+              </a:spcAft>
+            </a:pPr>
+            <a:r>
+              <a:rPr sz="1500" b="1" i="0">
+                <a:solidFill>
+                  <a:srgbClr val="17212B"/>
+                </a:solidFill>
+                <a:latin typeface="Arial"/>
+              </a:rPr>
+              <a:t>Aprendizaje: </a:t>
+            </a:r>
+            <a:r>
+              <a:rPr sz="1500" b="0" i="0">
+                <a:solidFill>
+                  <a:srgbClr val="17212B"/>
+                </a:solidFill>
+                <a:latin typeface="Arial"/>
+              </a:rPr>
+              <a:t>los datos para el código no son los mismos que se usan para graficar.</a:t>
+            </a:r>
+          </a:p>
+        </p:txBody>
+      </p:sp>
+      <p:sp>
+        <p:nvSpPr>
+          <p:cNvPr id="22" name="TextBox 21"/>
+          <p:cNvSpPr txBox="1"/>
+          <p:nvPr/>
+        </p:nvSpPr>
+        <p:spPr>
+          <a:xfrm>
+            <a:off x="11334902" y="6305702"/>
+            <a:ext cx="400050" cy="228600"/>
+          </a:xfrm>
+          <a:prstGeom prst="rect">
+            <a:avLst/>
+          </a:prstGeom>
+          <a:noFill/>
+        </p:spPr>
+        <p:txBody>
+          <a:bodyPr wrap="square" lIns="45720" rIns="45720" tIns="27432" bIns="27432" anchor="t">
+            <a:spAutoFit/>
+          </a:bodyPr>
+          <a:lstStyle/>
+          <a:p>
+            <a:pPr algn="r"/>
+            <a:r>
+              <a:rPr sz="1050" b="0" i="0">
+                <a:solidFill>
+                  <a:srgbClr val="5B6570"/>
+                </a:solidFill>
+                <a:latin typeface="Arial"/>
+              </a:rPr>
+              <a:t>8</a:t>
+            </a:r>
+          </a:p>
+        </p:txBody>
+      </p:sp>
+    </p:spTree>
+  </p:cSld>
+  <p:clrMapOvr>
+    <a:masterClrMapping/>
+  </p:clrMapOvr>
+</p:sld>
+</file>
+
+<file path=ppt/slides/slide14.xml><?xml version="1.0" encoding="utf-8"?>
+<p:sld xmlns:a="http://schemas.openxmlformats.org/drawingml/2006/main" xmlns:p="http://schemas.openxmlformats.org/presentationml/2006/main" xmlns:r="http://schemas.openxmlformats.org/officeDocument/2006/relationships">
+  <p:cSld>
+    <p:bg>
+      <p:bgPr>
+        <a:solidFill>
+          <a:srgbClr val="FFFFFF"/>
+        </a:solidFill>
+        <a:effectLst/>
+      </p:bgPr>
+    </p:bg>
+    <p:spTree>
+      <p:nvGrpSpPr>
+        <p:cNvPr id="1" name=""/>
+        <p:cNvGrpSpPr/>
+        <p:nvPr/>
+      </p:nvGrpSpPr>
+      <p:grpSpPr/>
+      <p:sp>
+        <p:nvSpPr>
+          <p:cNvPr id="2" name="Rectangle 1"/>
+          <p:cNvSpPr/>
+          <p:nvPr/>
+        </p:nvSpPr>
+        <p:spPr>
+          <a:xfrm>
+            <a:off x="0" y="0"/>
+            <a:ext cx="171450" cy="6858000"/>
+          </a:xfrm>
+          <a:prstGeom prst="rect">
+            <a:avLst/>
+          </a:prstGeom>
+          <a:solidFill>
+            <a:srgbClr val="5B8DB8"/>
+          </a:solidFill>
+          <a:ln>
+            <a:noFill/>
+          </a:ln>
+          <a:effectLst/>
+        </p:spPr>
+        <p:style>
+          <a:lnRef idx="1">
+            <a:schemeClr val="accent1"/>
+          </a:lnRef>
+          <a:fillRef idx="3">
+            <a:schemeClr val="accent1"/>
+          </a:fillRef>
+          <a:effectRef idx="2">
+            <a:schemeClr val="accent1"/>
+          </a:effectRef>
+          <a:fontRef idx="minor">
+            <a:schemeClr val="lt1"/>
+          </a:fontRef>
+        </p:style>
+        <p:txBody>
+          <a:bodyPr rtlCol="0" anchor="ctr"/>
+          <a:lstStyle/>
+          <a:p>
+            <a:pPr algn="ctr"/>
+          </a:p>
+        </p:txBody>
+      </p:sp>
+      <p:sp>
+        <p:nvSpPr>
+          <p:cNvPr id="3" name="TextBox 2"/>
+          <p:cNvSpPr txBox="1"/>
+          <p:nvPr/>
+        </p:nvSpPr>
+        <p:spPr>
+          <a:xfrm>
+            <a:off x="552297" y="342900"/>
+            <a:ext cx="10570464" cy="493776"/>
+          </a:xfrm>
+          <a:prstGeom prst="rect">
+            <a:avLst/>
+          </a:prstGeom>
+          <a:noFill/>
+        </p:spPr>
+        <p:txBody>
+          <a:bodyPr wrap="square" lIns="45720" rIns="45720" tIns="27432" bIns="27432" anchor="t">
+            <a:spAutoFit/>
+          </a:bodyPr>
+          <a:lstStyle/>
+          <a:p>
+            <a:pPr algn="l"/>
+            <a:r>
+              <a:rPr sz="2550" b="1" i="0">
+                <a:solidFill>
+                  <a:srgbClr val="17212B"/>
+                </a:solidFill>
+                <a:latin typeface="Arial"/>
+              </a:rPr>
+              <a:t>Lo que dejó el proceso</a:t>
+            </a:r>
+          </a:p>
+        </p:txBody>
+      </p:sp>
+      <p:sp>
+        <p:nvSpPr>
+          <p:cNvPr id="4" name="TextBox 3"/>
+          <p:cNvSpPr txBox="1"/>
+          <p:nvPr/>
+        </p:nvSpPr>
+        <p:spPr>
+          <a:xfrm>
+            <a:off x="571500" y="838504"/>
+            <a:ext cx="10287000" cy="283464"/>
+          </a:xfrm>
+          <a:prstGeom prst="rect">
+            <a:avLst/>
+          </a:prstGeom>
+          <a:noFill/>
+        </p:spPr>
+        <p:txBody>
+          <a:bodyPr wrap="square" lIns="45720" rIns="45720" tIns="27432" bIns="27432" anchor="t">
+            <a:spAutoFit/>
+          </a:bodyPr>
+          <a:lstStyle/>
+          <a:p>
+            <a:pPr algn="l"/>
+            <a:r>
+              <a:rPr sz="1275" b="0" i="0">
+                <a:solidFill>
+                  <a:srgbClr val="5B6570"/>
+                </a:solidFill>
+                <a:latin typeface="Arial"/>
+              </a:rPr>
+              <a:t>Aprendizajes técnicos que van más allá del resultado final.</a:t>
+            </a:r>
+          </a:p>
+        </p:txBody>
+      </p:sp>
+      <p:sp>
+        <p:nvSpPr>
+          <p:cNvPr id="5" name="Rounded Rectangle 4"/>
+          <p:cNvSpPr/>
+          <p:nvPr/>
+        </p:nvSpPr>
+        <p:spPr>
+          <a:xfrm>
+            <a:off x="621792" y="1463040"/>
+            <a:ext cx="3429000" cy="1828800"/>
+          </a:xfrm>
+          <a:prstGeom prst="roundRect">
+            <a:avLst>
+              <a:gd name="adj" fmla="val 8000"/>
+            </a:avLst>
+          </a:prstGeom>
+          <a:solidFill>
+            <a:srgbClr val="F5F7F8"/>
+          </a:solidFill>
+          <a:ln w="9525">
+            <a:solidFill>
+              <a:srgbClr val="D7DCE1"/>
+            </a:solidFill>
+          </a:ln>
+          <a:effectLst/>
+        </p:spPr>
+        <p:style>
+          <a:lnRef idx="1">
+            <a:schemeClr val="accent1"/>
+          </a:lnRef>
+          <a:fillRef idx="3">
+            <a:schemeClr val="accent1"/>
+          </a:fillRef>
+          <a:effectRef idx="2">
+            <a:schemeClr val="accent1"/>
+          </a:effectRef>
+          <a:fontRef idx="minor">
+            <a:schemeClr val="lt1"/>
+          </a:fontRef>
+        </p:style>
+        <p:txBody>
+          <a:bodyPr rtlCol="0" anchor="ctr"/>
+          <a:lstStyle/>
+          <a:p>
+            <a:pPr algn="ctr"/>
+          </a:p>
+        </p:txBody>
+      </p:sp>
+      <p:sp>
+        <p:nvSpPr>
+          <p:cNvPr id="6" name="Oval 5"/>
+          <p:cNvSpPr/>
+          <p:nvPr/>
+        </p:nvSpPr>
+        <p:spPr>
+          <a:xfrm>
+            <a:off x="822960" y="1664208"/>
+            <a:ext cx="384048" cy="384048"/>
+          </a:xfrm>
+          <a:prstGeom prst="ellipse">
+            <a:avLst/>
+          </a:prstGeom>
+          <a:solidFill>
+            <a:srgbClr val="5B8DB8"/>
+          </a:solidFill>
+          <a:ln>
+            <a:noFill/>
+          </a:ln>
+          <a:effectLst/>
+        </p:spPr>
+        <p:style>
+          <a:lnRef idx="1">
+            <a:schemeClr val="accent1"/>
+          </a:lnRef>
+          <a:fillRef idx="3">
+            <a:schemeClr val="accent1"/>
+          </a:fillRef>
+          <a:effectRef idx="2">
+            <a:schemeClr val="accent1"/>
+          </a:effectRef>
+          <a:fontRef idx="minor">
+            <a:schemeClr val="lt1"/>
+          </a:fontRef>
+        </p:style>
+        <p:txBody>
+          <a:bodyPr rtlCol="0" anchor="ctr" wrap="square" lIns="0" rIns="0" tIns="27432" bIns="27432"/>
+          <a:lstStyle/>
+          <a:p>
+            <a:pPr algn="ctr"/>
+            <a:r>
+              <a:rPr sz="1400" b="1" i="0">
+                <a:solidFill>
+                  <a:srgbClr val="FFFFFF"/>
+                </a:solidFill>
+                <a:latin typeface="Arial"/>
+              </a:rPr>
+              <a:t>1</a:t>
+            </a:r>
+          </a:p>
+        </p:txBody>
+      </p:sp>
+      <p:sp>
+        <p:nvSpPr>
+          <p:cNvPr id="7" name="TextBox 6"/>
+          <p:cNvSpPr txBox="1"/>
+          <p:nvPr/>
+        </p:nvSpPr>
+        <p:spPr>
+          <a:xfrm>
+            <a:off x="822960" y="2148840"/>
+            <a:ext cx="3026664" cy="502920"/>
+          </a:xfrm>
+          <a:prstGeom prst="rect">
+            <a:avLst/>
+          </a:prstGeom>
+          <a:noFill/>
+        </p:spPr>
+        <p:txBody>
+          <a:bodyPr wrap="square" lIns="45720" rIns="45720" tIns="27432" bIns="27432" anchor="t">
+            <a:spAutoFit/>
+          </a:bodyPr>
+          <a:lstStyle/>
+          <a:p>
+            <a:pPr algn="l"/>
+            <a:r>
+              <a:rPr sz="1450" b="1" i="0">
+                <a:solidFill>
+                  <a:srgbClr val="17212B"/>
+                </a:solidFill>
+                <a:latin typeface="Arial"/>
+              </a:rPr>
+              <a:t>Dividir antes de transformar</a:t>
+            </a:r>
+          </a:p>
+        </p:txBody>
+      </p:sp>
+      <p:sp>
+        <p:nvSpPr>
+          <p:cNvPr id="8" name="TextBox 7"/>
+          <p:cNvSpPr txBox="1"/>
+          <p:nvPr/>
+        </p:nvSpPr>
+        <p:spPr>
+          <a:xfrm>
+            <a:off x="822960" y="2651760"/>
+            <a:ext cx="3026664" cy="594360"/>
+          </a:xfrm>
+          <a:prstGeom prst="rect">
+            <a:avLst/>
+          </a:prstGeom>
+          <a:noFill/>
+        </p:spPr>
+        <p:txBody>
+          <a:bodyPr wrap="square" lIns="45720" rIns="45720" tIns="27432" bIns="27432" anchor="t">
+            <a:spAutoFit/>
+          </a:bodyPr>
+          <a:lstStyle/>
+          <a:p>
+            <a:pPr algn="l"/>
+            <a:r>
+              <a:rPr sz="1250" b="0" i="0">
+                <a:solidFill>
+                  <a:srgbClr val="5B6570"/>
+                </a:solidFill>
+                <a:latin typeface="Arial"/>
+              </a:rPr>
+              <a:t>Evita que la prueba influya en medianas, IQR o categorías.</a:t>
+            </a:r>
+          </a:p>
+        </p:txBody>
+      </p:sp>
+      <p:sp>
+        <p:nvSpPr>
+          <p:cNvPr id="9" name="Rounded Rectangle 8"/>
+          <p:cNvSpPr/>
+          <p:nvPr/>
+        </p:nvSpPr>
+        <p:spPr>
+          <a:xfrm>
+            <a:off x="4325112" y="1463040"/>
+            <a:ext cx="3429000" cy="1828800"/>
+          </a:xfrm>
+          <a:prstGeom prst="roundRect">
+            <a:avLst>
+              <a:gd name="adj" fmla="val 8000"/>
+            </a:avLst>
+          </a:prstGeom>
+          <a:solidFill>
+            <a:srgbClr val="F5F7F8"/>
+          </a:solidFill>
+          <a:ln w="9525">
+            <a:solidFill>
+              <a:srgbClr val="D7DCE1"/>
+            </a:solidFill>
+          </a:ln>
+          <a:effectLst/>
+        </p:spPr>
+        <p:style>
+          <a:lnRef idx="1">
+            <a:schemeClr val="accent1"/>
+          </a:lnRef>
+          <a:fillRef idx="3">
+            <a:schemeClr val="accent1"/>
+          </a:fillRef>
+          <a:effectRef idx="2">
+            <a:schemeClr val="accent1"/>
+          </a:effectRef>
+          <a:fontRef idx="minor">
+            <a:schemeClr val="lt1"/>
+          </a:fontRef>
+        </p:style>
+        <p:txBody>
+          <a:bodyPr rtlCol="0" anchor="ctr"/>
+          <a:lstStyle/>
+          <a:p>
+            <a:pPr algn="ctr"/>
+          </a:p>
+        </p:txBody>
+      </p:sp>
+      <p:sp>
+        <p:nvSpPr>
+          <p:cNvPr id="10" name="Oval 9"/>
+          <p:cNvSpPr/>
+          <p:nvPr/>
+        </p:nvSpPr>
+        <p:spPr>
+          <a:xfrm>
+            <a:off x="4526279" y="1664208"/>
+            <a:ext cx="384048" cy="384048"/>
+          </a:xfrm>
+          <a:prstGeom prst="ellipse">
+            <a:avLst/>
+          </a:prstGeom>
+          <a:solidFill>
+            <a:srgbClr val="C94C4C"/>
+          </a:solidFill>
+          <a:ln>
+            <a:noFill/>
+          </a:ln>
+          <a:effectLst/>
+        </p:spPr>
+        <p:style>
+          <a:lnRef idx="1">
+            <a:schemeClr val="accent1"/>
+          </a:lnRef>
+          <a:fillRef idx="3">
+            <a:schemeClr val="accent1"/>
+          </a:fillRef>
+          <a:effectRef idx="2">
+            <a:schemeClr val="accent1"/>
+          </a:effectRef>
+          <a:fontRef idx="minor">
+            <a:schemeClr val="lt1"/>
+          </a:fontRef>
+        </p:style>
+        <p:txBody>
+          <a:bodyPr rtlCol="0" anchor="ctr" wrap="square" lIns="0" rIns="0" tIns="27432" bIns="27432"/>
+          <a:lstStyle/>
+          <a:p>
+            <a:pPr algn="ctr"/>
+            <a:r>
+              <a:rPr sz="1400" b="1" i="0">
+                <a:solidFill>
+                  <a:srgbClr val="FFFFFF"/>
+                </a:solidFill>
+                <a:latin typeface="Arial"/>
+              </a:rPr>
+              <a:t>2</a:t>
+            </a:r>
+          </a:p>
+        </p:txBody>
+      </p:sp>
+      <p:sp>
+        <p:nvSpPr>
+          <p:cNvPr id="11" name="TextBox 10"/>
+          <p:cNvSpPr txBox="1"/>
+          <p:nvPr/>
+        </p:nvSpPr>
+        <p:spPr>
+          <a:xfrm>
+            <a:off x="4526279" y="2148840"/>
+            <a:ext cx="3026664" cy="502920"/>
+          </a:xfrm>
+          <a:prstGeom prst="rect">
+            <a:avLst/>
+          </a:prstGeom>
+          <a:noFill/>
+        </p:spPr>
+        <p:txBody>
+          <a:bodyPr wrap="square" lIns="45720" rIns="45720" tIns="27432" bIns="27432" anchor="t">
+            <a:spAutoFit/>
+          </a:bodyPr>
+          <a:lstStyle/>
+          <a:p>
+            <a:pPr algn="l"/>
+            <a:r>
+              <a:rPr sz="1450" b="1" i="0">
+                <a:solidFill>
+                  <a:srgbClr val="17212B"/>
+                </a:solidFill>
+                <a:latin typeface="Arial"/>
+              </a:rPr>
+              <a:t>Un conjunto limpio también es un hallazgo</a:t>
+            </a:r>
+          </a:p>
+        </p:txBody>
+      </p:sp>
+      <p:sp>
+        <p:nvSpPr>
+          <p:cNvPr id="12" name="TextBox 11"/>
+          <p:cNvSpPr txBox="1"/>
+          <p:nvPr/>
+        </p:nvSpPr>
+        <p:spPr>
+          <a:xfrm>
+            <a:off x="4526279" y="2651760"/>
+            <a:ext cx="3026664" cy="594360"/>
+          </a:xfrm>
+          <a:prstGeom prst="rect">
+            <a:avLst/>
+          </a:prstGeom>
+          <a:noFill/>
+        </p:spPr>
+        <p:txBody>
+          <a:bodyPr wrap="square" lIns="45720" rIns="45720" tIns="27432" bIns="27432" anchor="t">
+            <a:spAutoFit/>
+          </a:bodyPr>
+          <a:lstStyle/>
+          <a:p>
+            <a:pPr algn="l"/>
+            <a:r>
+              <a:rPr sz="1250" b="0" i="0">
+                <a:solidFill>
+                  <a:srgbClr val="5B6570"/>
+                </a:solidFill>
+                <a:latin typeface="Arial"/>
+              </a:rPr>
+              <a:t>Se documentó la revisión en lugar de inventar errores.</a:t>
+            </a:r>
+          </a:p>
+        </p:txBody>
+      </p:sp>
+      <p:sp>
+        <p:nvSpPr>
+          <p:cNvPr id="13" name="Rounded Rectangle 12"/>
+          <p:cNvSpPr/>
+          <p:nvPr/>
+        </p:nvSpPr>
+        <p:spPr>
+          <a:xfrm>
+            <a:off x="8028431" y="1463040"/>
+            <a:ext cx="3429000" cy="1828800"/>
+          </a:xfrm>
+          <a:prstGeom prst="roundRect">
+            <a:avLst>
+              <a:gd name="adj" fmla="val 8000"/>
+            </a:avLst>
+          </a:prstGeom>
+          <a:solidFill>
+            <a:srgbClr val="F5F7F8"/>
+          </a:solidFill>
+          <a:ln w="9525">
+            <a:solidFill>
+              <a:srgbClr val="D7DCE1"/>
+            </a:solidFill>
+          </a:ln>
+          <a:effectLst/>
+        </p:spPr>
+        <p:style>
+          <a:lnRef idx="1">
+            <a:schemeClr val="accent1"/>
+          </a:lnRef>
+          <a:fillRef idx="3">
+            <a:schemeClr val="accent1"/>
+          </a:fillRef>
+          <a:effectRef idx="2">
+            <a:schemeClr val="accent1"/>
+          </a:effectRef>
+          <a:fontRef idx="minor">
+            <a:schemeClr val="lt1"/>
+          </a:fontRef>
+        </p:style>
+        <p:txBody>
+          <a:bodyPr rtlCol="0" anchor="ctr"/>
+          <a:lstStyle/>
+          <a:p>
+            <a:pPr algn="ctr"/>
+          </a:p>
+        </p:txBody>
+      </p:sp>
+      <p:sp>
+        <p:nvSpPr>
+          <p:cNvPr id="14" name="Oval 13"/>
+          <p:cNvSpPr/>
+          <p:nvPr/>
+        </p:nvSpPr>
+        <p:spPr>
+          <a:xfrm>
+            <a:off x="8229600" y="1664208"/>
+            <a:ext cx="384048" cy="384048"/>
+          </a:xfrm>
+          <a:prstGeom prst="ellipse">
+            <a:avLst/>
+          </a:prstGeom>
+          <a:solidFill>
+            <a:srgbClr val="5B8DB8"/>
+          </a:solidFill>
+          <a:ln>
+            <a:noFill/>
+          </a:ln>
+          <a:effectLst/>
+        </p:spPr>
+        <p:style>
+          <a:lnRef idx="1">
+            <a:schemeClr val="accent1"/>
+          </a:lnRef>
+          <a:fillRef idx="3">
+            <a:schemeClr val="accent1"/>
+          </a:fillRef>
+          <a:effectRef idx="2">
+            <a:schemeClr val="accent1"/>
+          </a:effectRef>
+          <a:fontRef idx="minor">
+            <a:schemeClr val="lt1"/>
+          </a:fontRef>
+        </p:style>
+        <p:txBody>
+          <a:bodyPr rtlCol="0" anchor="ctr" wrap="square" lIns="0" rIns="0" tIns="27432" bIns="27432"/>
+          <a:lstStyle/>
+          <a:p>
+            <a:pPr algn="ctr"/>
+            <a:r>
+              <a:rPr sz="1400" b="1" i="0">
+                <a:solidFill>
+                  <a:srgbClr val="FFFFFF"/>
+                </a:solidFill>
+                <a:latin typeface="Arial"/>
+              </a:rPr>
+              <a:t>3</a:t>
+            </a:r>
+          </a:p>
+        </p:txBody>
+      </p:sp>
+      <p:sp>
+        <p:nvSpPr>
+          <p:cNvPr id="15" name="TextBox 14"/>
+          <p:cNvSpPr txBox="1"/>
+          <p:nvPr/>
+        </p:nvSpPr>
+        <p:spPr>
+          <a:xfrm>
+            <a:off x="8229600" y="2148840"/>
+            <a:ext cx="3026664" cy="502920"/>
+          </a:xfrm>
+          <a:prstGeom prst="rect">
+            <a:avLst/>
+          </a:prstGeom>
+          <a:noFill/>
+        </p:spPr>
+        <p:txBody>
+          <a:bodyPr wrap="square" lIns="45720" rIns="45720" tIns="27432" bIns="27432" anchor="t">
+            <a:spAutoFit/>
+          </a:bodyPr>
+          <a:lstStyle/>
+          <a:p>
+            <a:pPr algn="l"/>
+            <a:r>
+              <a:rPr sz="1450" b="1" i="0">
+                <a:solidFill>
+                  <a:srgbClr val="17212B"/>
+                </a:solidFill>
+                <a:latin typeface="Arial"/>
+              </a:rPr>
+              <a:t>La exactitud engaña con pocas fallas</a:t>
+            </a:r>
+          </a:p>
+        </p:txBody>
+      </p:sp>
+      <p:sp>
+        <p:nvSpPr>
+          <p:cNvPr id="16" name="TextBox 15"/>
+          <p:cNvSpPr txBox="1"/>
+          <p:nvPr/>
+        </p:nvSpPr>
+        <p:spPr>
+          <a:xfrm>
+            <a:off x="8229600" y="2651760"/>
+            <a:ext cx="3026664" cy="594360"/>
+          </a:xfrm>
+          <a:prstGeom prst="rect">
+            <a:avLst/>
+          </a:prstGeom>
+          <a:noFill/>
+        </p:spPr>
+        <p:txBody>
+          <a:bodyPr wrap="square" lIns="45720" rIns="45720" tIns="27432" bIns="27432" anchor="t">
+            <a:spAutoFit/>
+          </a:bodyPr>
+          <a:lstStyle/>
+          <a:p>
+            <a:pPr algn="l"/>
+            <a:r>
+              <a:rPr sz="1250" b="0" i="0">
+                <a:solidFill>
+                  <a:srgbClr val="5B6570"/>
+                </a:solidFill>
+                <a:latin typeface="Arial"/>
+              </a:rPr>
+              <a:t>96,61 % sin detectar ninguna falla real.</a:t>
+            </a:r>
+          </a:p>
+        </p:txBody>
+      </p:sp>
+      <p:sp>
+        <p:nvSpPr>
+          <p:cNvPr id="17" name="Rounded Rectangle 16"/>
+          <p:cNvSpPr/>
+          <p:nvPr/>
+        </p:nvSpPr>
+        <p:spPr>
+          <a:xfrm>
+            <a:off x="621792" y="3566160"/>
+            <a:ext cx="3429000" cy="1828800"/>
+          </a:xfrm>
+          <a:prstGeom prst="roundRect">
+            <a:avLst>
+              <a:gd name="adj" fmla="val 8000"/>
+            </a:avLst>
+          </a:prstGeom>
+          <a:solidFill>
+            <a:srgbClr val="F5F7F8"/>
+          </a:solidFill>
+          <a:ln w="9525">
+            <a:solidFill>
+              <a:srgbClr val="D7DCE1"/>
+            </a:solidFill>
+          </a:ln>
+          <a:effectLst/>
+        </p:spPr>
+        <p:style>
+          <a:lnRef idx="1">
+            <a:schemeClr val="accent1"/>
+          </a:lnRef>
+          <a:fillRef idx="3">
+            <a:schemeClr val="accent1"/>
+          </a:fillRef>
+          <a:effectRef idx="2">
+            <a:schemeClr val="accent1"/>
+          </a:effectRef>
+          <a:fontRef idx="minor">
+            <a:schemeClr val="lt1"/>
+          </a:fontRef>
+        </p:style>
+        <p:txBody>
+          <a:bodyPr rtlCol="0" anchor="ctr"/>
+          <a:lstStyle/>
+          <a:p>
+            <a:pPr algn="ctr"/>
+          </a:p>
+        </p:txBody>
+      </p:sp>
+      <p:sp>
+        <p:nvSpPr>
+          <p:cNvPr id="18" name="Oval 17"/>
+          <p:cNvSpPr/>
+          <p:nvPr/>
+        </p:nvSpPr>
+        <p:spPr>
+          <a:xfrm>
+            <a:off x="822960" y="3767328"/>
+            <a:ext cx="384048" cy="384048"/>
+          </a:xfrm>
+          <a:prstGeom prst="ellipse">
+            <a:avLst/>
+          </a:prstGeom>
+          <a:solidFill>
+            <a:srgbClr val="C94C4C"/>
+          </a:solidFill>
+          <a:ln>
+            <a:noFill/>
+          </a:ln>
+          <a:effectLst/>
+        </p:spPr>
+        <p:style>
+          <a:lnRef idx="1">
+            <a:schemeClr val="accent1"/>
+          </a:lnRef>
+          <a:fillRef idx="3">
+            <a:schemeClr val="accent1"/>
+          </a:fillRef>
+          <a:effectRef idx="2">
+            <a:schemeClr val="accent1"/>
+          </a:effectRef>
+          <a:fontRef idx="minor">
+            <a:schemeClr val="lt1"/>
+          </a:fontRef>
+        </p:style>
+        <p:txBody>
+          <a:bodyPr rtlCol="0" anchor="ctr" wrap="square" lIns="0" rIns="0" tIns="27432" bIns="27432"/>
+          <a:lstStyle/>
+          <a:p>
+            <a:pPr algn="ctr"/>
+            <a:r>
+              <a:rPr sz="1400" b="1" i="0">
+                <a:solidFill>
+                  <a:srgbClr val="FFFFFF"/>
+                </a:solidFill>
+                <a:latin typeface="Arial"/>
+              </a:rPr>
+              <a:t>4</a:t>
+            </a:r>
+          </a:p>
+        </p:txBody>
+      </p:sp>
+      <p:sp>
+        <p:nvSpPr>
+          <p:cNvPr id="19" name="TextBox 18"/>
+          <p:cNvSpPr txBox="1"/>
+          <p:nvPr/>
+        </p:nvSpPr>
+        <p:spPr>
+          <a:xfrm>
+            <a:off x="822960" y="4251960"/>
+            <a:ext cx="3026664" cy="502920"/>
+          </a:xfrm>
+          <a:prstGeom prst="rect">
+            <a:avLst/>
+          </a:prstGeom>
+          <a:noFill/>
+        </p:spPr>
+        <p:txBody>
+          <a:bodyPr wrap="square" lIns="45720" rIns="45720" tIns="27432" bIns="27432" anchor="t">
+            <a:spAutoFit/>
+          </a:bodyPr>
+          <a:lstStyle/>
+          <a:p>
+            <a:pPr algn="l"/>
+            <a:r>
+              <a:rPr sz="1450" b="1" i="0">
+                <a:solidFill>
+                  <a:srgbClr val="17212B"/>
+                </a:solidFill>
+                <a:latin typeface="Arial"/>
+              </a:rPr>
+              <a:t>Probar la equivalencia</a:t>
+            </a:r>
+          </a:p>
+        </p:txBody>
+      </p:sp>
+      <p:sp>
+        <p:nvSpPr>
+          <p:cNvPr id="20" name="TextBox 19"/>
+          <p:cNvSpPr txBox="1"/>
+          <p:nvPr/>
+        </p:nvSpPr>
+        <p:spPr>
+          <a:xfrm>
+            <a:off x="822960" y="4754880"/>
+            <a:ext cx="3026664" cy="594360"/>
+          </a:xfrm>
+          <a:prstGeom prst="rect">
+            <a:avLst/>
+          </a:prstGeom>
+          <a:noFill/>
+        </p:spPr>
+        <p:txBody>
+          <a:bodyPr wrap="square" lIns="45720" rIns="45720" tIns="27432" bIns="27432" anchor="t">
+            <a:spAutoFit/>
+          </a:bodyPr>
+          <a:lstStyle/>
+          <a:p>
+            <a:pPr algn="l"/>
+            <a:r>
+              <a:rPr sz="1250" b="0" i="0">
+                <a:solidFill>
+                  <a:srgbClr val="5B6570"/>
+                </a:solidFill>
+                <a:latin typeface="Arial"/>
+              </a:rPr>
+              <a:t>assert_frame_equal mostró que el rediseño no cambió los datos.</a:t>
+            </a:r>
+          </a:p>
+        </p:txBody>
+      </p:sp>
+      <p:sp>
+        <p:nvSpPr>
+          <p:cNvPr id="21" name="Rounded Rectangle 20"/>
+          <p:cNvSpPr/>
+          <p:nvPr/>
+        </p:nvSpPr>
+        <p:spPr>
+          <a:xfrm>
+            <a:off x="4325112" y="3566160"/>
+            <a:ext cx="3429000" cy="1828800"/>
+          </a:xfrm>
+          <a:prstGeom prst="roundRect">
+            <a:avLst>
+              <a:gd name="adj" fmla="val 8000"/>
+            </a:avLst>
+          </a:prstGeom>
+          <a:solidFill>
+            <a:srgbClr val="F5F7F8"/>
+          </a:solidFill>
+          <a:ln w="9525">
+            <a:solidFill>
+              <a:srgbClr val="D7DCE1"/>
+            </a:solidFill>
+          </a:ln>
+          <a:effectLst/>
+        </p:spPr>
+        <p:style>
+          <a:lnRef idx="1">
+            <a:schemeClr val="accent1"/>
+          </a:lnRef>
+          <a:fillRef idx="3">
+            <a:schemeClr val="accent1"/>
+          </a:fillRef>
+          <a:effectRef idx="2">
+            <a:schemeClr val="accent1"/>
+          </a:effectRef>
+          <a:fontRef idx="minor">
+            <a:schemeClr val="lt1"/>
+          </a:fontRef>
+        </p:style>
+        <p:txBody>
+          <a:bodyPr rtlCol="0" anchor="ctr"/>
+          <a:lstStyle/>
+          <a:p>
+            <a:pPr algn="ctr"/>
+          </a:p>
+        </p:txBody>
+      </p:sp>
+      <p:sp>
+        <p:nvSpPr>
+          <p:cNvPr id="22" name="Oval 21"/>
+          <p:cNvSpPr/>
+          <p:nvPr/>
+        </p:nvSpPr>
+        <p:spPr>
+          <a:xfrm>
+            <a:off x="4526279" y="3767328"/>
+            <a:ext cx="384048" cy="384048"/>
+          </a:xfrm>
+          <a:prstGeom prst="ellipse">
+            <a:avLst/>
+          </a:prstGeom>
+          <a:solidFill>
+            <a:srgbClr val="5B8DB8"/>
+          </a:solidFill>
+          <a:ln>
+            <a:noFill/>
+          </a:ln>
+          <a:effectLst/>
+        </p:spPr>
+        <p:style>
+          <a:lnRef idx="1">
+            <a:schemeClr val="accent1"/>
+          </a:lnRef>
+          <a:fillRef idx="3">
+            <a:schemeClr val="accent1"/>
+          </a:fillRef>
+          <a:effectRef idx="2">
+            <a:schemeClr val="accent1"/>
+          </a:effectRef>
+          <a:fontRef idx="minor">
+            <a:schemeClr val="lt1"/>
+          </a:fontRef>
+        </p:style>
+        <p:txBody>
+          <a:bodyPr rtlCol="0" anchor="ctr" wrap="square" lIns="0" rIns="0" tIns="27432" bIns="27432"/>
+          <a:lstStyle/>
+          <a:p>
+            <a:pPr algn="ctr"/>
+            <a:r>
+              <a:rPr sz="1400" b="1" i="0">
+                <a:solidFill>
+                  <a:srgbClr val="FFFFFF"/>
+                </a:solidFill>
+                <a:latin typeface="Arial"/>
+              </a:rPr>
+              <a:t>5</a:t>
+            </a:r>
+          </a:p>
+        </p:txBody>
+      </p:sp>
+      <p:sp>
+        <p:nvSpPr>
+          <p:cNvPr id="23" name="TextBox 22"/>
+          <p:cNvSpPr txBox="1"/>
+          <p:nvPr/>
+        </p:nvSpPr>
+        <p:spPr>
+          <a:xfrm>
+            <a:off x="4526279" y="4251960"/>
+            <a:ext cx="3026664" cy="502920"/>
+          </a:xfrm>
+          <a:prstGeom prst="rect">
+            <a:avLst/>
+          </a:prstGeom>
+          <a:noFill/>
+        </p:spPr>
+        <p:txBody>
+          <a:bodyPr wrap="square" lIns="45720" rIns="45720" tIns="27432" bIns="27432" anchor="t">
+            <a:spAutoFit/>
+          </a:bodyPr>
+          <a:lstStyle/>
+          <a:p>
+            <a:pPr algn="l"/>
+            <a:r>
+              <a:rPr sz="1450" b="1" i="0">
+                <a:solidFill>
+                  <a:srgbClr val="17212B"/>
+                </a:solidFill>
+                <a:latin typeface="Arial"/>
+              </a:rPr>
+              <a:t>Lo más rápido no siempre conviene</a:t>
+            </a:r>
+          </a:p>
+        </p:txBody>
+      </p:sp>
+      <p:sp>
+        <p:nvSpPr>
+          <p:cNvPr id="24" name="TextBox 23"/>
+          <p:cNvSpPr txBox="1"/>
+          <p:nvPr/>
+        </p:nvSpPr>
+        <p:spPr>
+          <a:xfrm>
+            <a:off x="4526279" y="4754880"/>
+            <a:ext cx="3026664" cy="594360"/>
+          </a:xfrm>
+          <a:prstGeom prst="rect">
+            <a:avLst/>
+          </a:prstGeom>
+          <a:noFill/>
+        </p:spPr>
+        <p:txBody>
+          <a:bodyPr wrap="square" lIns="45720" rIns="45720" tIns="27432" bIns="27432" anchor="t">
+            <a:spAutoFit/>
+          </a:bodyPr>
+          <a:lstStyle/>
+          <a:p>
+            <a:pPr algn="l"/>
+            <a:r>
+              <a:rPr sz="1250" b="0" i="0">
+                <a:solidFill>
+                  <a:srgbClr val="5B6570"/>
+                </a:solidFill>
+                <a:latin typeface="Arial"/>
+              </a:rPr>
+              <a:t>La POO tardó más, pero se mantiene y extiende mejor.</a:t>
+            </a:r>
+          </a:p>
+        </p:txBody>
+      </p:sp>
+      <p:sp>
+        <p:nvSpPr>
+          <p:cNvPr id="25" name="Rounded Rectangle 24"/>
+          <p:cNvSpPr/>
+          <p:nvPr/>
+        </p:nvSpPr>
+        <p:spPr>
+          <a:xfrm>
+            <a:off x="8028431" y="3566160"/>
+            <a:ext cx="3429000" cy="1828800"/>
+          </a:xfrm>
+          <a:prstGeom prst="roundRect">
+            <a:avLst>
+              <a:gd name="adj" fmla="val 8000"/>
+            </a:avLst>
+          </a:prstGeom>
+          <a:solidFill>
+            <a:srgbClr val="F5F7F8"/>
+          </a:solidFill>
+          <a:ln w="9525">
+            <a:solidFill>
+              <a:srgbClr val="D7DCE1"/>
+            </a:solidFill>
+          </a:ln>
+          <a:effectLst/>
+        </p:spPr>
+        <p:style>
+          <a:lnRef idx="1">
+            <a:schemeClr val="accent1"/>
+          </a:lnRef>
+          <a:fillRef idx="3">
+            <a:schemeClr val="accent1"/>
+          </a:fillRef>
+          <a:effectRef idx="2">
+            <a:schemeClr val="accent1"/>
+          </a:effectRef>
+          <a:fontRef idx="minor">
+            <a:schemeClr val="lt1"/>
+          </a:fontRef>
+        </p:style>
+        <p:txBody>
+          <a:bodyPr rtlCol="0" anchor="ctr"/>
+          <a:lstStyle/>
+          <a:p>
+            <a:pPr algn="ctr"/>
+          </a:p>
+        </p:txBody>
+      </p:sp>
+      <p:sp>
+        <p:nvSpPr>
+          <p:cNvPr id="26" name="Oval 25"/>
+          <p:cNvSpPr/>
+          <p:nvPr/>
+        </p:nvSpPr>
+        <p:spPr>
+          <a:xfrm>
+            <a:off x="8229600" y="3767328"/>
+            <a:ext cx="384048" cy="384048"/>
+          </a:xfrm>
+          <a:prstGeom prst="ellipse">
+            <a:avLst/>
+          </a:prstGeom>
+          <a:solidFill>
+            <a:srgbClr val="C94C4C"/>
+          </a:solidFill>
+          <a:ln>
+            <a:noFill/>
+          </a:ln>
+          <a:effectLst/>
+        </p:spPr>
+        <p:style>
+          <a:lnRef idx="1">
+            <a:schemeClr val="accent1"/>
+          </a:lnRef>
+          <a:fillRef idx="3">
+            <a:schemeClr val="accent1"/>
+          </a:fillRef>
+          <a:effectRef idx="2">
+            <a:schemeClr val="accent1"/>
+          </a:effectRef>
+          <a:fontRef idx="minor">
+            <a:schemeClr val="lt1"/>
+          </a:fontRef>
+        </p:style>
+        <p:txBody>
+          <a:bodyPr rtlCol="0" anchor="ctr" wrap="square" lIns="0" rIns="0" tIns="27432" bIns="27432"/>
+          <a:lstStyle/>
+          <a:p>
+            <a:pPr algn="ctr"/>
+            <a:r>
+              <a:rPr sz="1400" b="1" i="0">
+                <a:solidFill>
+                  <a:srgbClr val="FFFFFF"/>
+                </a:solidFill>
+                <a:latin typeface="Arial"/>
+              </a:rPr>
+              <a:t>6</a:t>
+            </a:r>
+          </a:p>
+        </p:txBody>
+      </p:sp>
+      <p:sp>
+        <p:nvSpPr>
+          <p:cNvPr id="27" name="TextBox 26"/>
+          <p:cNvSpPr txBox="1"/>
+          <p:nvPr/>
+        </p:nvSpPr>
+        <p:spPr>
+          <a:xfrm>
+            <a:off x="8229600" y="4251960"/>
+            <a:ext cx="3026664" cy="502920"/>
+          </a:xfrm>
+          <a:prstGeom prst="rect">
+            <a:avLst/>
+          </a:prstGeom>
+          <a:noFill/>
+        </p:spPr>
+        <p:txBody>
+          <a:bodyPr wrap="square" lIns="45720" rIns="45720" tIns="27432" bIns="27432" anchor="t">
+            <a:spAutoFit/>
+          </a:bodyPr>
+          <a:lstStyle/>
+          <a:p>
+            <a:pPr algn="l"/>
+            <a:r>
+              <a:rPr sz="1450" b="1" i="0">
+                <a:solidFill>
+                  <a:srgbClr val="17212B"/>
+                </a:solidFill>
+                <a:latin typeface="Arial"/>
+              </a:rPr>
+              <a:t>Interpretar exige unidades reales</a:t>
+            </a:r>
+          </a:p>
+        </p:txBody>
+      </p:sp>
+      <p:sp>
+        <p:nvSpPr>
+          <p:cNvPr id="28" name="TextBox 27"/>
+          <p:cNvSpPr txBox="1"/>
+          <p:nvPr/>
+        </p:nvSpPr>
+        <p:spPr>
+          <a:xfrm>
+            <a:off x="8229600" y="4754880"/>
+            <a:ext cx="3026664" cy="594360"/>
+          </a:xfrm>
+          <a:prstGeom prst="rect">
+            <a:avLst/>
+          </a:prstGeom>
+          <a:noFill/>
+        </p:spPr>
+        <p:txBody>
+          <a:bodyPr wrap="square" lIns="45720" rIns="45720" tIns="27432" bIns="27432" anchor="t">
+            <a:spAutoFit/>
+          </a:bodyPr>
+          <a:lstStyle/>
+          <a:p>
+            <a:pPr algn="l"/>
+            <a:r>
+              <a:rPr sz="1250" b="0" i="0">
+                <a:solidFill>
+                  <a:srgbClr val="5B6570"/>
+                </a:solidFill>
+                <a:latin typeface="Arial"/>
+              </a:rPr>
+              <a:t>Los gráficos solo se entienden con rpm, Nm y minutos.</a:t>
+            </a:r>
+          </a:p>
+        </p:txBody>
+      </p:sp>
+      <p:sp>
+        <p:nvSpPr>
+          <p:cNvPr id="29" name="TextBox 28"/>
+          <p:cNvSpPr txBox="1"/>
+          <p:nvPr/>
+        </p:nvSpPr>
+        <p:spPr>
+          <a:xfrm>
+            <a:off x="11334902" y="6305702"/>
+            <a:ext cx="400050" cy="228600"/>
+          </a:xfrm>
+          <a:prstGeom prst="rect">
+            <a:avLst/>
+          </a:prstGeom>
+          <a:noFill/>
+        </p:spPr>
+        <p:txBody>
+          <a:bodyPr wrap="square" lIns="45720" rIns="45720" tIns="27432" bIns="27432" anchor="t">
+            <a:spAutoFit/>
+          </a:bodyPr>
+          <a:lstStyle/>
+          <a:p>
+            <a:pPr algn="r"/>
+            <a:r>
+              <a:rPr sz="1050" b="0" i="0">
+                <a:solidFill>
+                  <a:srgbClr val="5B6570"/>
+                </a:solidFill>
+                <a:latin typeface="Arial"/>
+              </a:rPr>
+              <a:t>12</a:t>
+            </a:r>
+          </a:p>
+        </p:txBody>
+      </p:sp>
+    </p:spTree>
+  </p:cSld>
+  <p:clrMapOvr>
+    <a:masterClrMapping/>
+  </p:clrMapOvr>
 </p:sld>
 </file>
 
@@ -2438,6 +8180,10 @@
             <a:noFill/>
           </a:ln>
         </p:spPr>
+        <p:txBody xmlns:a="http://schemas.openxmlformats.org/drawingml/2006/main">
+          <a:bodyPr/>
+          <a:p/>
+        </p:txBody>
       </p:sp>
       <p:sp>
         <p:nvSpPr>
@@ -2683,8 +8429,8 @@
         </p:nvSpPr>
         <p:spPr>
           <a:xfrm xmlns:a="http://schemas.openxmlformats.org/drawingml/2006/main">
-            <a:off x="685800" y="3476625"/>
-            <a:ext cx="4476750" cy="1047750"/>
+            <a:off x="685800" y="3383280"/>
+            <a:ext cx="4476750" cy="2560320"/>
           </a:xfrm>
           <a:prstGeom xmlns:a="http://schemas.openxmlformats.org/drawingml/2006/main" prst="rect">
             <a:avLst/>
@@ -2701,6 +8447,9 @@
           <a:lstStyle xmlns:a="http://schemas.openxmlformats.org/drawingml/2006/main"/>
           <a:p xmlns:a="http://schemas.openxmlformats.org/drawingml/2006/main">
             <a:pPr algn="l">
+              <a:spcAft>
+                <a:spcPts val="900"/>
+              </a:spcAft>
               <a:defRPr sz="1500" b="0">
                 <a:solidFill>
                   <a:srgbClr val="5B6570"/>
@@ -2711,15 +8460,100 @@
               </a:defRPr>
             </a:pPr>
             <a:r>
-              <a:rPr sz="1500" b="0">
-                <a:solidFill>
-                  <a:srgbClr val="5B6570"/>
+              <a:rPr sz="1400" b="1">
+                <a:solidFill>
+                  <a:srgbClr val="17212B"/>
                 </a:solidFill>
                 <a:latin typeface="Arial"/>
                 <a:ea typeface="Arial"/>
                 <a:cs typeface="Arial"/>
               </a:rPr>
-              <a:t>El conjunto reúne registros sintéticos de maquinaria industrial. Esta condición facilita la reproducibilidad, pero limita la generalización a operaciones reales.</a:t>
+              <a:t>Conjunto sintético:</a:t>
+            </a:r>
+            <a:r>
+              <a:rPr sz="1400" b="0">
+                <a:solidFill>
+                  <a:srgbClr val="5B6570"/>
+                </a:solidFill>
+                <a:latin typeface="Arial"/>
+                <a:ea typeface="Arial"/>
+                <a:cs typeface="Arial"/>
+              </a:rPr>
+              <a:t> datos generados por simulación para parecerse a una operación real. No provienen de sensores de una planta.</a:t>
+            </a:r>
+          </a:p>
+          <a:p xmlns:a="http://schemas.openxmlformats.org/drawingml/2006/main">
+            <a:pPr algn="l">
+              <a:spcAft>
+                <a:spcPts val="900"/>
+              </a:spcAft>
+              <a:defRPr sz="1500" b="0">
+                <a:solidFill>
+                  <a:srgbClr val="5B6570"/>
+                </a:solidFill>
+                <a:latin typeface="Arial"/>
+                <a:ea typeface="Arial"/>
+                <a:cs typeface="Arial"/>
+              </a:defRPr>
+            </a:pPr>
+            <a:r>
+              <a:rPr sz="1400" b="1">
+                <a:solidFill>
+                  <a:srgbClr val="17212B"/>
+                </a:solidFill>
+                <a:latin typeface="Arial"/>
+                <a:ea typeface="Arial"/>
+                <a:cs typeface="Arial"/>
+              </a:rPr>
+              <a:t>Type:</a:t>
+            </a:r>
+            <a:r>
+              <a:rPr sz="1400" b="0">
+                <a:solidFill>
+                  <a:srgbClr val="5B6570"/>
+                </a:solidFill>
+                <a:latin typeface="Arial"/>
+                <a:ea typeface="Arial"/>
+                <a:cs typeface="Arial"/>
+              </a:rPr>
+              <a:t> variante de calidad del producto. L baja (6.000), M media (2.997) y H alta (1.003).</a:t>
+            </a:r>
+          </a:p>
+          <a:p xmlns:a="http://schemas.openxmlformats.org/drawingml/2006/main">
+            <a:pPr algn="l">
+              <a:spcAft>
+                <a:spcPts val="900"/>
+              </a:spcAft>
+              <a:defRPr sz="1500" b="0">
+                <a:solidFill>
+                  <a:srgbClr val="5B6570"/>
+                </a:solidFill>
+                <a:latin typeface="Arial"/>
+                <a:ea typeface="Arial"/>
+                <a:cs typeface="Arial"/>
+              </a:defRPr>
+            </a:pPr>
+            <a:r>
+              <a:rPr sz="1400" b="1">
+                <a:solidFill>
+                  <a:srgbClr val="17212B"/>
+                </a:solidFill>
+                <a:latin typeface="Arial"/>
+                <a:ea typeface="Arial"/>
+                <a:cs typeface="Arial"/>
+              </a:rPr>
+              <a:t>Utilidad:</a:t>
+            </a:r>
+            <a:r>
+              <a:rPr sz="1400" b="0">
+                <a:solidFill>
+                  <a:srgbClr val="5B6570"/>
+                </a:solidFill>
+                <a:latin typeface="Arial"/>
+                <a:ea typeface="Arial"/>
+                <a:cs typeface="Arial"/>
+              </a:rPr>
+              <a:t> saber qué condiciones concentran fallas ayuda a decidir qué revisar primero.</a:t>
             </a:r>
           </a:p>
         </p:txBody>
@@ -4385,6 +10219,10 @@
             <a:noFill/>
           </a:ln>
         </p:spPr>
+        <p:txBody xmlns:a="http://schemas.openxmlformats.org/drawingml/2006/main">
+          <a:bodyPr/>
+          <a:p/>
+        </p:txBody>
       </p:sp>
       <p:sp>
         <p:nvSpPr>
@@ -4495,7 +10333,7 @@
                 <a:ea typeface="Arial"/>
                 <a:cs typeface="Arial"/>
               </a:rPr>
-              <a:t>4</a:t>
+              <a:t>9</a:t>
             </a:r>
           </a:p>
         </p:txBody>
@@ -4551,6 +10389,10 @@
             <a:noFill/>
           </a:ln>
         </p:spPr>
+        <p:txBody xmlns:a="http://schemas.openxmlformats.org/drawingml/2006/main">
+          <a:bodyPr/>
+          <a:p/>
+        </p:txBody>
       </p:sp>
       <p:sp>
         <p:nvSpPr>
@@ -4719,63 +10561,6 @@
                 <a:cs typeface="Arial"/>
               </a:rPr>
               <a:t>La diferencia describe este conjunto. No demuestra que el tipo de producto cause la falla.</a:t>
-            </a:r>
-          </a:p>
-        </p:txBody>
-      </p:sp>
-      <p:sp>
-        <p:nvSpPr>
-          <p:cNvPr id="9" name="">
-            <a:extLst xmlns:a="http://schemas.openxmlformats.org/drawingml/2006/main">
-              <a:ext uri="{FF2B5EF4-FFF2-40B4-BE49-F238E27FC236}">
-                <a16:creationId xmlns:a16="http://schemas.microsoft.com/office/drawing/2014/main" id="{361B13E7-AC03-4E3A-8803-A0CBE04F568A}"/>
-              </a:ext>
-            </a:extLst>
-          </p:cNvPr>
-          <p:cNvSpPr>
-            <a:spLocks xmlns:a="http://schemas.openxmlformats.org/drawingml/2006/main" noGrp="1"/>
-          </p:cNvSpPr>
-          <p:nvPr/>
-        </p:nvSpPr>
-        <p:spPr>
-          <a:xfrm xmlns:a="http://schemas.openxmlformats.org/drawingml/2006/main">
-            <a:off x="666750" y="5953125"/>
-            <a:ext cx="8572500" cy="238125"/>
-          </a:xfrm>
-          <a:prstGeom xmlns:a="http://schemas.openxmlformats.org/drawingml/2006/main" prst="rect">
-            <a:avLst/>
-          </a:prstGeom>
-          <a:noFill xmlns:a="http://schemas.openxmlformats.org/drawingml/2006/main"/>
-          <a:ln xmlns:a="http://schemas.openxmlformats.org/drawingml/2006/main" w="0">
-            <a:noFill/>
-          </a:ln>
-        </p:spPr>
-        <p:txBody>
-          <a:bodyPr xmlns:a="http://schemas.openxmlformats.org/drawingml/2006/main">
-            <a:noAutofit/>
-          </a:bodyPr>
-          <a:lstStyle xmlns:a="http://schemas.openxmlformats.org/drawingml/2006/main"/>
-          <a:p xmlns:a="http://schemas.openxmlformats.org/drawingml/2006/main">
-            <a:pPr algn="l">
-              <a:defRPr sz="1050" b="0">
-                <a:solidFill>
-                  <a:srgbClr val="5B6570"/>
-                </a:solidFill>
-                <a:latin typeface="Arial"/>
-                <a:ea typeface="Arial"/>
-                <a:cs typeface="Arial"/>
-              </a:defRPr>
-            </a:pPr>
-            <a:r>
-              <a:rPr sz="1050" b="0">
-                <a:solidFill>
-                  <a:srgbClr val="5B6570"/>
-                </a:solidFill>
-                <a:latin typeface="Arial"/>
-                <a:ea typeface="Arial"/>
-                <a:cs typeface="Arial"/>
-              </a:rPr>
-              <a:t>Fuente: elaboración propia con AI4I 2020.</a:t>
             </a:r>
           </a:p>
         </p:txBody>
@@ -4838,6 +10623,10 @@
             <a:noFill/>
           </a:ln>
         </p:spPr>
+        <p:txBody xmlns:a="http://schemas.openxmlformats.org/drawingml/2006/main">
+          <a:bodyPr/>
+          <a:p/>
+        </p:txBody>
       </p:sp>
       <p:sp>
         <p:nvSpPr>
@@ -4948,7 +10737,7 @@
                 <a:ea typeface="Arial"/>
                 <a:cs typeface="Arial"/>
               </a:rPr>
-              <a:t>5</a:t>
+              <a:t>10</a:t>
             </a:r>
           </a:p>
         </p:txBody>
@@ -4967,8 +10756,8 @@
         </p:blipFill>
         <p:spPr>
           <a:xfrm xmlns:a="http://schemas.openxmlformats.org/drawingml/2006/main">
-            <a:off x="3253844" y="1066800"/>
-            <a:ext cx="5627163" cy="4476750"/>
+            <a:off x="3366227" y="960120"/>
+            <a:ext cx="5459545" cy="4343400"/>
           </a:xfrm>
           <a:prstGeom xmlns:a="http://schemas.openxmlformats.org/drawingml/2006/main" prst="rect">
             <a:avLst/>
@@ -4991,8 +10780,8 @@
         </p:nvSpPr>
         <p:spPr>
           <a:xfrm xmlns:a="http://schemas.openxmlformats.org/drawingml/2006/main">
-            <a:off x="857250" y="5572125"/>
-            <a:ext cx="10287000" cy="476250"/>
+            <a:off x="667512" y="5440680"/>
+            <a:ext cx="10789920" cy="640080"/>
           </a:xfrm>
           <a:prstGeom xmlns:a="http://schemas.openxmlformats.org/drawingml/2006/main" prst="rect">
             <a:avLst/>
@@ -5028,63 +10817,6 @@
                 <a:cs typeface="Arial"/>
               </a:rPr>
               <a:t>La velocidad baja alcanza 12,16 %, el torque alto 11,50 % y el desgaste alto 8,14 %. La temperatura del proceso no presenta una tendencia monotónica clara.</a:t>
-            </a:r>
-          </a:p>
-        </p:txBody>
-      </p:sp>
-      <p:sp>
-        <p:nvSpPr>
-          <p:cNvPr id="6" name="">
-            <a:extLst xmlns:a="http://schemas.openxmlformats.org/drawingml/2006/main">
-              <a:ext uri="{FF2B5EF4-FFF2-40B4-BE49-F238E27FC236}">
-                <a16:creationId xmlns:a16="http://schemas.microsoft.com/office/drawing/2014/main" id="{E7BB33E3-B8AC-4627-96CE-A06969AF8A23}"/>
-              </a:ext>
-            </a:extLst>
-          </p:cNvPr>
-          <p:cNvSpPr>
-            <a:spLocks xmlns:a="http://schemas.openxmlformats.org/drawingml/2006/main" noGrp="1"/>
-          </p:cNvSpPr>
-          <p:nvPr/>
-        </p:nvSpPr>
-        <p:spPr>
-          <a:xfrm xmlns:a="http://schemas.openxmlformats.org/drawingml/2006/main">
-            <a:off x="666750" y="6210300"/>
-            <a:ext cx="8572500" cy="209550"/>
-          </a:xfrm>
-          <a:prstGeom xmlns:a="http://schemas.openxmlformats.org/drawingml/2006/main" prst="rect">
-            <a:avLst/>
-          </a:prstGeom>
-          <a:noFill xmlns:a="http://schemas.openxmlformats.org/drawingml/2006/main"/>
-          <a:ln xmlns:a="http://schemas.openxmlformats.org/drawingml/2006/main" w="0">
-            <a:noFill/>
-          </a:ln>
-        </p:spPr>
-        <p:txBody>
-          <a:bodyPr xmlns:a="http://schemas.openxmlformats.org/drawingml/2006/main">
-            <a:noAutofit/>
-          </a:bodyPr>
-          <a:lstStyle xmlns:a="http://schemas.openxmlformats.org/drawingml/2006/main"/>
-          <a:p xmlns:a="http://schemas.openxmlformats.org/drawingml/2006/main">
-            <a:pPr algn="l">
-              <a:defRPr sz="1050" b="0">
-                <a:solidFill>
-                  <a:srgbClr val="5B6570"/>
-                </a:solidFill>
-                <a:latin typeface="Arial"/>
-                <a:ea typeface="Arial"/>
-                <a:cs typeface="Arial"/>
-              </a:defRPr>
-            </a:pPr>
-            <a:r>
-              <a:rPr sz="1050" b="0">
-                <a:solidFill>
-                  <a:srgbClr val="5B6570"/>
-                </a:solidFill>
-                <a:latin typeface="Arial"/>
-                <a:ea typeface="Arial"/>
-                <a:cs typeface="Arial"/>
-              </a:rPr>
-              <a:t>Fuente: elaboración propia con AI4I 2020.</a:t>
             </a:r>
           </a:p>
         </p:txBody>
@@ -5147,6 +10879,10 @@
             <a:noFill/>
           </a:ln>
         </p:spPr>
+        <p:txBody xmlns:a="http://schemas.openxmlformats.org/drawingml/2006/main">
+          <a:bodyPr/>
+          <a:p/>
+        </p:txBody>
       </p:sp>
       <p:sp>
         <p:nvSpPr>
@@ -5257,7 +10993,7 @@
                 <a:ea typeface="Arial"/>
                 <a:cs typeface="Arial"/>
               </a:rPr>
-              <a:t>6</a:t>
+              <a:t>11</a:t>
             </a:r>
           </a:p>
         </p:txBody>
@@ -5529,8 +11265,8 @@
         </p:nvSpPr>
         <p:spPr>
           <a:xfrm xmlns:a="http://schemas.openxmlformats.org/drawingml/2006/main">
-            <a:off x="8620125" y="4429125"/>
-            <a:ext cx="2714625" cy="857250"/>
+            <a:off x="8620125" y="4434840"/>
+            <a:ext cx="2714625" cy="1371600"/>
           </a:xfrm>
           <a:prstGeom xmlns:a="http://schemas.openxmlformats.org/drawingml/2006/main" prst="rect">
             <a:avLst/>
@@ -5557,54 +11293,20 @@
               </a:defRPr>
             </a:pPr>
             <a:r>
-              <a:rPr sz="1425" b="0">
-                <a:solidFill>
-                  <a:srgbClr val="5B6570"/>
+              <a:rPr sz="1425" b="1">
+                <a:solidFill>
+                  <a:srgbClr val="356A96"/>
                 </a:solidFill>
                 <a:latin typeface="Arial"/>
                 <a:ea typeface="Arial"/>
                 <a:cs typeface="Arial"/>
               </a:rPr>
-              <a:t>La combinación señala un grupo de interés para revisión. El resultado no prueba causalidad.</a:t>
-            </a:r>
-          </a:p>
-        </p:txBody>
-      </p:sp>
-      <p:sp>
-        <p:nvSpPr>
-          <p:cNvPr id="9" name="">
-            <a:extLst xmlns:a="http://schemas.openxmlformats.org/drawingml/2006/main">
-              <a:ext uri="{FF2B5EF4-FFF2-40B4-BE49-F238E27FC236}">
-                <a16:creationId xmlns:a16="http://schemas.microsoft.com/office/drawing/2014/main" id="{65A6AF27-DE43-4C93-92A6-27F9A5D4A991}"/>
-              </a:ext>
-            </a:extLst>
-          </p:cNvPr>
-          <p:cNvSpPr>
-            <a:spLocks xmlns:a="http://schemas.openxmlformats.org/drawingml/2006/main" noGrp="1"/>
-          </p:cNvSpPr>
-          <p:nvPr/>
-        </p:nvSpPr>
-        <p:spPr>
-          <a:xfrm xmlns:a="http://schemas.openxmlformats.org/drawingml/2006/main">
-            <a:off x="666750" y="5953125"/>
-            <a:ext cx="8572500" cy="238125"/>
-          </a:xfrm>
-          <a:prstGeom xmlns:a="http://schemas.openxmlformats.org/drawingml/2006/main" prst="rect">
-            <a:avLst/>
-          </a:prstGeom>
-          <a:noFill xmlns:a="http://schemas.openxmlformats.org/drawingml/2006/main"/>
-          <a:ln xmlns:a="http://schemas.openxmlformats.org/drawingml/2006/main" w="0">
-            <a:noFill/>
-          </a:ln>
-        </p:spPr>
-        <p:txBody>
-          <a:bodyPr xmlns:a="http://schemas.openxmlformats.org/drawingml/2006/main">
-            <a:noAutofit/>
-          </a:bodyPr>
-          <a:lstStyle xmlns:a="http://schemas.openxmlformats.org/drawingml/2006/main"/>
+              <a:t>Se mantiene en prueba:</a:t>
+            </a:r>
+          </a:p>
           <a:p xmlns:a="http://schemas.openxmlformats.org/drawingml/2006/main">
             <a:pPr algn="l">
-              <a:defRPr sz="1050" b="0">
+              <a:defRPr sz="1425" b="0">
                 <a:solidFill>
                   <a:srgbClr val="5B6570"/>
                 </a:solidFill>
@@ -5614,15 +11316,61 @@
               </a:defRPr>
             </a:pPr>
             <a:r>
-              <a:rPr sz="1050" b="0">
-                <a:solidFill>
-                  <a:srgbClr val="5B6570"/>
+              <a:rPr sz="1425" b="0">
+                <a:solidFill>
+                  <a:srgbClr val="17212B"/>
                 </a:solidFill>
                 <a:latin typeface="Arial"/>
                 <a:ea typeface="Arial"/>
                 <a:cs typeface="Arial"/>
               </a:rPr>
-              <a:t>Fuente: elaboración propia con AI4I 2020.</a:t>
+              <a:t>Entrenamiento: 28,94 %</a:t>
+            </a:r>
+          </a:p>
+          <a:p xmlns:a="http://schemas.openxmlformats.org/drawingml/2006/main">
+            <a:pPr algn="l">
+              <a:defRPr sz="1425" b="0">
+                <a:solidFill>
+                  <a:srgbClr val="5B6570"/>
+                </a:solidFill>
+                <a:latin typeface="Arial"/>
+                <a:ea typeface="Arial"/>
+                <a:cs typeface="Arial"/>
+              </a:defRPr>
+            </a:pPr>
+            <a:r>
+              <a:rPr sz="1425" b="0">
+                <a:solidFill>
+                  <a:srgbClr val="17212B"/>
+                </a:solidFill>
+                <a:latin typeface="Arial"/>
+                <a:ea typeface="Arial"/>
+                <a:cs typeface="Arial"/>
+              </a:rPr>
+              <a:t>Prueba: 27,50 %</a:t>
+            </a:r>
+          </a:p>
+          <a:p xmlns:a="http://schemas.openxmlformats.org/drawingml/2006/main">
+            <a:pPr algn="l">
+              <a:defRPr sz="1425" b="0">
+                <a:solidFill>
+                  <a:srgbClr val="5B6570"/>
+                </a:solidFill>
+                <a:latin typeface="Arial"/>
+                <a:ea typeface="Arial"/>
+                <a:cs typeface="Arial"/>
+              </a:defRPr>
+            </a:pPr>
+            <a:r>
+              <a:rPr sz="1425" b="0">
+                <a:solidFill>
+                  <a:srgbClr val="17212B"/>
+                </a:solidFill>
+                <a:latin typeface="Arial"/>
+                <a:ea typeface="Arial"/>
+                <a:cs typeface="Arial"/>
+              </a:rPr>
+              <a:t>Resto: cerca de 2,4 %</a:t>
             </a:r>
           </a:p>
         </p:txBody>
@@ -5631,567 +11379,6 @@
     <p:extLst>
       <p:ext uri="{BB962C8B-B14F-4D97-AF65-F5344CB8AC3E}">
         <p14:creationId xmlns:p14="http://schemas.microsoft.com/office/powerpoint/2010/main" val="1501180871"/>
-      </p:ext>
-    </p:extLst>
-  </p:cSld>
-</p:sld>
-</file>
-
-<file path=ppt/slides/slide7.xml><?xml version="1.0" encoding="utf-8"?>
-<p:sld xmlns:p="http://schemas.openxmlformats.org/presentationml/2006/main">
-  <p:cSld>
-    <p:bg>
-      <p:bgPr>
-        <a:solidFill xmlns:a="http://schemas.openxmlformats.org/drawingml/2006/main">
-          <a:srgbClr val="FFFFFF"/>
-        </a:solidFill>
-      </p:bgPr>
-    </p:bg>
-    <p:spTree>
-      <p:nvGrpSpPr>
-        <p:cNvPr id="1" name=""/>
-        <p:cNvGrpSpPr/>
-        <p:nvPr/>
-      </p:nvGrpSpPr>
-      <p:grpSpPr>
-        <a:xfrm xmlns:a="http://schemas.openxmlformats.org/drawingml/2006/main"/>
-      </p:grpSpPr>
-      <p:sp>
-        <p:nvSpPr>
-          <p:cNvPr id="12" name="">
-            <a:extLst xmlns:a="http://schemas.openxmlformats.org/drawingml/2006/main">
-              <a:ext uri="{FF2B5EF4-FFF2-40B4-BE49-F238E27FC236}">
-                <a16:creationId xmlns:a16="http://schemas.microsoft.com/office/drawing/2014/main" id="{CEC111B6-D398-439E-AC5A-85182F65E10E}"/>
-              </a:ext>
-            </a:extLst>
-          </p:cNvPr>
-          <p:cNvSpPr>
-            <a:spLocks xmlns:a="http://schemas.openxmlformats.org/drawingml/2006/main" noGrp="1"/>
-          </p:cNvSpPr>
-          <p:nvPr/>
-        </p:nvSpPr>
-        <p:spPr>
-          <a:xfrm xmlns:a="http://schemas.openxmlformats.org/drawingml/2006/main">
-            <a:off x="0" y="0"/>
-            <a:ext cx="171450" cy="6858000"/>
-          </a:xfrm>
-          <a:prstGeom xmlns:a="http://schemas.openxmlformats.org/drawingml/2006/main" prst="rect">
-            <a:avLst/>
-          </a:prstGeom>
-          <a:solidFill xmlns:a="http://schemas.openxmlformats.org/drawingml/2006/main">
-            <a:srgbClr val="5B8DB8"/>
-          </a:solidFill>
-          <a:ln xmlns:a="http://schemas.openxmlformats.org/drawingml/2006/main" w="0">
-            <a:noFill/>
-          </a:ln>
-        </p:spPr>
-      </p:sp>
-      <p:sp>
-        <p:nvSpPr>
-          <p:cNvPr id="2" name="">
-            <a:extLst xmlns:a="http://schemas.openxmlformats.org/drawingml/2006/main">
-              <a:ext uri="{FF2B5EF4-FFF2-40B4-BE49-F238E27FC236}">
-                <a16:creationId xmlns:a16="http://schemas.microsoft.com/office/drawing/2014/main" id="{34A16426-2FF6-4E7B-A16D-1D2D4B4978AE}"/>
-              </a:ext>
-            </a:extLst>
-          </p:cNvPr>
-          <p:cNvSpPr>
-            <a:spLocks xmlns:a="http://schemas.openxmlformats.org/drawingml/2006/main" noGrp="1"/>
-          </p:cNvSpPr>
-          <p:nvPr/>
-        </p:nvSpPr>
-        <p:spPr>
-          <a:xfrm xmlns:a="http://schemas.openxmlformats.org/drawingml/2006/main">
-            <a:off x="552450" y="342900"/>
-            <a:ext cx="10572750" cy="495300"/>
-          </a:xfrm>
-          <a:prstGeom xmlns:a="http://schemas.openxmlformats.org/drawingml/2006/main" prst="rect">
-            <a:avLst/>
-          </a:prstGeom>
-          <a:noFill xmlns:a="http://schemas.openxmlformats.org/drawingml/2006/main"/>
-          <a:ln xmlns:a="http://schemas.openxmlformats.org/drawingml/2006/main" w="0">
-            <a:noFill/>
-          </a:ln>
-        </p:spPr>
-        <p:txBody>
-          <a:bodyPr xmlns:a="http://schemas.openxmlformats.org/drawingml/2006/main">
-            <a:noAutofit/>
-          </a:bodyPr>
-          <a:lstStyle xmlns:a="http://schemas.openxmlformats.org/drawingml/2006/main"/>
-          <a:p xmlns:a="http://schemas.openxmlformats.org/drawingml/2006/main">
-            <a:pPr algn="l">
-              <a:defRPr sz="2550" b="1">
-                <a:solidFill>
-                  <a:srgbClr val="17212B"/>
-                </a:solidFill>
-                <a:latin typeface="Arial"/>
-                <a:ea typeface="Arial"/>
-                <a:cs typeface="Arial"/>
-              </a:defRPr>
-            </a:pPr>
-            <a:r>
-              <a:rPr sz="2550" b="1">
-                <a:solidFill>
-                  <a:srgbClr val="17212B"/>
-                </a:solidFill>
-                <a:latin typeface="Arial"/>
-                <a:ea typeface="Arial"/>
-                <a:cs typeface="Arial"/>
-              </a:rPr>
-              <a:t>El perfil mantiene una diferencia similar en entrenamiento y prueba</a:t>
-            </a:r>
-          </a:p>
-        </p:txBody>
-      </p:sp>
-      <p:sp>
-        <p:nvSpPr>
-          <p:cNvPr id="3" name="">
-            <a:extLst xmlns:a="http://schemas.openxmlformats.org/drawingml/2006/main">
-              <a:ext uri="{FF2B5EF4-FFF2-40B4-BE49-F238E27FC236}">
-                <a16:creationId xmlns:a16="http://schemas.microsoft.com/office/drawing/2014/main" id="{2A020167-A9C7-47E3-94E6-4614A13883EE}"/>
-              </a:ext>
-            </a:extLst>
-          </p:cNvPr>
-          <p:cNvSpPr>
-            <a:spLocks xmlns:a="http://schemas.openxmlformats.org/drawingml/2006/main" noGrp="1"/>
-          </p:cNvSpPr>
-          <p:nvPr/>
-        </p:nvSpPr>
-        <p:spPr>
-          <a:xfrm xmlns:a="http://schemas.openxmlformats.org/drawingml/2006/main">
-            <a:off x="11334750" y="6305550"/>
-            <a:ext cx="400050" cy="228600"/>
-          </a:xfrm>
-          <a:prstGeom xmlns:a="http://schemas.openxmlformats.org/drawingml/2006/main" prst="rect">
-            <a:avLst/>
-          </a:prstGeom>
-          <a:noFill xmlns:a="http://schemas.openxmlformats.org/drawingml/2006/main"/>
-          <a:ln xmlns:a="http://schemas.openxmlformats.org/drawingml/2006/main" w="0">
-            <a:noFill/>
-          </a:ln>
-        </p:spPr>
-        <p:txBody>
-          <a:bodyPr xmlns:a="http://schemas.openxmlformats.org/drawingml/2006/main">
-            <a:noAutofit/>
-          </a:bodyPr>
-          <a:lstStyle xmlns:a="http://schemas.openxmlformats.org/drawingml/2006/main"/>
-          <a:p xmlns:a="http://schemas.openxmlformats.org/drawingml/2006/main">
-            <a:pPr algn="r">
-              <a:defRPr sz="1050" b="0">
-                <a:solidFill>
-                  <a:srgbClr val="5B6570"/>
-                </a:solidFill>
-                <a:latin typeface="Arial"/>
-                <a:ea typeface="Arial"/>
-                <a:cs typeface="Arial"/>
-              </a:defRPr>
-            </a:pPr>
-            <a:r>
-              <a:rPr sz="1050" b="0">
-                <a:solidFill>
-                  <a:srgbClr val="5B6570"/>
-                </a:solidFill>
-                <a:latin typeface="Arial"/>
-                <a:ea typeface="Arial"/>
-                <a:cs typeface="Arial"/>
-              </a:rPr>
-              <a:t>7</a:t>
-            </a:r>
-          </a:p>
-        </p:txBody>
-      </p:sp>
-      <p:graphicFrame>
-        <p:nvGraphicFramePr>
-          <p:cNvPr id="15" name="Chart"/>
-          <p:cNvGraphicFramePr/>
-          <p:nvPr/>
-        </p:nvGraphicFramePr>
-        <p:xfrm>
-          <a:off xmlns:a="http://schemas.openxmlformats.org/drawingml/2006/main" x="619125" y="1285875"/>
-          <a:ext xmlns:a="http://schemas.openxmlformats.org/drawingml/2006/main" cx="7524750" cy="4333875"/>
-        </p:xfrm>
-        <a:graphic xmlns:a="http://schemas.openxmlformats.org/drawingml/2006/main">
-          <a:graphicData uri="http://schemas.openxmlformats.org/drawingml/2006/chart">
-            <c:chart xmlns:r="http://schemas.openxmlformats.org/officeDocument/2006/relationships" xmlns:c="http://schemas.openxmlformats.org/drawingml/2006/chart" r:id="R7dc1b33c5d7e4c6e"/>
-          </a:graphicData>
-        </a:graphic>
-      </p:graphicFrame>
-      <p:sp>
-        <p:nvSpPr>
-          <p:cNvPr id="5" name="">
-            <a:extLst xmlns:a="http://schemas.openxmlformats.org/drawingml/2006/main">
-              <a:ext uri="{FF2B5EF4-FFF2-40B4-BE49-F238E27FC236}">
-                <a16:creationId xmlns:a16="http://schemas.microsoft.com/office/drawing/2014/main" id="{35965DC5-771C-47FB-98D3-46180E022A02}"/>
-              </a:ext>
-            </a:extLst>
-          </p:cNvPr>
-          <p:cNvSpPr>
-            <a:spLocks xmlns:a="http://schemas.openxmlformats.org/drawingml/2006/main" noGrp="1"/>
-          </p:cNvSpPr>
-          <p:nvPr/>
-        </p:nvSpPr>
-        <p:spPr>
-          <a:xfrm xmlns:a="http://schemas.openxmlformats.org/drawingml/2006/main">
-            <a:off x="8572500" y="1524000"/>
-            <a:ext cx="47625" cy="3000375"/>
-          </a:xfrm>
-          <a:prstGeom xmlns:a="http://schemas.openxmlformats.org/drawingml/2006/main" prst="rect">
-            <a:avLst/>
-          </a:prstGeom>
-          <a:solidFill xmlns:a="http://schemas.openxmlformats.org/drawingml/2006/main">
-            <a:srgbClr val="C94C4C"/>
-          </a:solidFill>
-          <a:ln xmlns:a="http://schemas.openxmlformats.org/drawingml/2006/main" w="0">
-            <a:noFill/>
-          </a:ln>
-        </p:spPr>
-      </p:sp>
-      <p:sp>
-        <p:nvSpPr>
-          <p:cNvPr id="6" name="">
-            <a:extLst xmlns:a="http://schemas.openxmlformats.org/drawingml/2006/main">
-              <a:ext uri="{FF2B5EF4-FFF2-40B4-BE49-F238E27FC236}">
-                <a16:creationId xmlns:a16="http://schemas.microsoft.com/office/drawing/2014/main" id="{B075ADC8-3577-4999-9ADF-6BE5E4F28E3F}"/>
-              </a:ext>
-            </a:extLst>
-          </p:cNvPr>
-          <p:cNvSpPr>
-            <a:spLocks xmlns:a="http://schemas.openxmlformats.org/drawingml/2006/main" noGrp="1"/>
-          </p:cNvSpPr>
-          <p:nvPr/>
-        </p:nvSpPr>
-        <p:spPr>
-          <a:xfrm xmlns:a="http://schemas.openxmlformats.org/drawingml/2006/main">
-            <a:off x="8905875" y="1524000"/>
-            <a:ext cx="2286000" cy="285750"/>
-          </a:xfrm>
-          <a:prstGeom xmlns:a="http://schemas.openxmlformats.org/drawingml/2006/main" prst="rect">
-            <a:avLst/>
-          </a:prstGeom>
-          <a:noFill xmlns:a="http://schemas.openxmlformats.org/drawingml/2006/main"/>
-          <a:ln xmlns:a="http://schemas.openxmlformats.org/drawingml/2006/main" w="0">
-            <a:noFill/>
-          </a:ln>
-        </p:spPr>
-        <p:txBody>
-          <a:bodyPr xmlns:a="http://schemas.openxmlformats.org/drawingml/2006/main">
-            <a:noAutofit/>
-          </a:bodyPr>
-          <a:lstStyle xmlns:a="http://schemas.openxmlformats.org/drawingml/2006/main"/>
-          <a:p xmlns:a="http://schemas.openxmlformats.org/drawingml/2006/main">
-            <a:pPr algn="l">
-              <a:defRPr sz="1350" b="1">
-                <a:solidFill>
-                  <a:srgbClr val="356A96"/>
-                </a:solidFill>
-                <a:latin typeface="Arial"/>
-                <a:ea typeface="Arial"/>
-                <a:cs typeface="Arial"/>
-              </a:defRPr>
-            </a:pPr>
-            <a:r>
-              <a:rPr sz="1350" b="1">
-                <a:solidFill>
-                  <a:srgbClr val="356A96"/>
-                </a:solidFill>
-                <a:latin typeface="Arial"/>
-                <a:ea typeface="Arial"/>
-                <a:cs typeface="Arial"/>
-              </a:rPr>
-              <a:t>Entrenamiento</a:t>
-            </a:r>
-          </a:p>
-        </p:txBody>
-      </p:sp>
-      <p:sp>
-        <p:nvSpPr>
-          <p:cNvPr id="7" name="">
-            <a:extLst xmlns:a="http://schemas.openxmlformats.org/drawingml/2006/main">
-              <a:ext uri="{FF2B5EF4-FFF2-40B4-BE49-F238E27FC236}">
-                <a16:creationId xmlns:a16="http://schemas.microsoft.com/office/drawing/2014/main" id="{C7EA0920-193C-4AE5-A346-C5115D6547AA}"/>
-              </a:ext>
-            </a:extLst>
-          </p:cNvPr>
-          <p:cNvSpPr>
-            <a:spLocks xmlns:a="http://schemas.openxmlformats.org/drawingml/2006/main" noGrp="1"/>
-          </p:cNvSpPr>
-          <p:nvPr/>
-        </p:nvSpPr>
-        <p:spPr>
-          <a:xfrm xmlns:a="http://schemas.openxmlformats.org/drawingml/2006/main">
-            <a:off x="8905875" y="1905000"/>
-            <a:ext cx="2619375" cy="571500"/>
-          </a:xfrm>
-          <a:prstGeom xmlns:a="http://schemas.openxmlformats.org/drawingml/2006/main" prst="rect">
-            <a:avLst/>
-          </a:prstGeom>
-          <a:noFill xmlns:a="http://schemas.openxmlformats.org/drawingml/2006/main"/>
-          <a:ln xmlns:a="http://schemas.openxmlformats.org/drawingml/2006/main" w="0">
-            <a:noFill/>
-          </a:ln>
-        </p:spPr>
-        <p:txBody>
-          <a:bodyPr xmlns:a="http://schemas.openxmlformats.org/drawingml/2006/main">
-            <a:noAutofit/>
-          </a:bodyPr>
-          <a:lstStyle xmlns:a="http://schemas.openxmlformats.org/drawingml/2006/main"/>
-          <a:p xmlns:a="http://schemas.openxmlformats.org/drawingml/2006/main">
-            <a:pPr algn="l">
-              <a:defRPr sz="2025" b="1">
-                <a:solidFill>
-                  <a:srgbClr val="17212B"/>
-                </a:solidFill>
-                <a:latin typeface="Arial"/>
-                <a:ea typeface="Arial"/>
-                <a:cs typeface="Arial"/>
-              </a:defRPr>
-            </a:pPr>
-            <a:r>
-              <a:rPr sz="2025" b="1">
-                <a:solidFill>
-                  <a:srgbClr val="17212B"/>
-                </a:solidFill>
-                <a:latin typeface="Arial"/>
-                <a:ea typeface="Arial"/>
-                <a:cs typeface="Arial"/>
-              </a:rPr>
-              <a:t>28,94 % frente a 2,48 %</a:t>
-            </a:r>
-          </a:p>
-        </p:txBody>
-      </p:sp>
-      <p:sp>
-        <p:nvSpPr>
-          <p:cNvPr id="8" name="">
-            <a:extLst xmlns:a="http://schemas.openxmlformats.org/drawingml/2006/main">
-              <a:ext uri="{FF2B5EF4-FFF2-40B4-BE49-F238E27FC236}">
-                <a16:creationId xmlns:a16="http://schemas.microsoft.com/office/drawing/2014/main" id="{E4222474-270E-468E-96DF-D6C876135A96}"/>
-              </a:ext>
-            </a:extLst>
-          </p:cNvPr>
-          <p:cNvSpPr>
-            <a:spLocks xmlns:a="http://schemas.openxmlformats.org/drawingml/2006/main" noGrp="1"/>
-          </p:cNvSpPr>
-          <p:nvPr/>
-        </p:nvSpPr>
-        <p:spPr>
-          <a:xfrm xmlns:a="http://schemas.openxmlformats.org/drawingml/2006/main">
-            <a:off x="8905875" y="2857500"/>
-            <a:ext cx="2286000" cy="285750"/>
-          </a:xfrm>
-          <a:prstGeom xmlns:a="http://schemas.openxmlformats.org/drawingml/2006/main" prst="rect">
-            <a:avLst/>
-          </a:prstGeom>
-          <a:noFill xmlns:a="http://schemas.openxmlformats.org/drawingml/2006/main"/>
-          <a:ln xmlns:a="http://schemas.openxmlformats.org/drawingml/2006/main" w="0">
-            <a:noFill/>
-          </a:ln>
-        </p:spPr>
-        <p:txBody>
-          <a:bodyPr xmlns:a="http://schemas.openxmlformats.org/drawingml/2006/main">
-            <a:noAutofit/>
-          </a:bodyPr>
-          <a:lstStyle xmlns:a="http://schemas.openxmlformats.org/drawingml/2006/main"/>
-          <a:p xmlns:a="http://schemas.openxmlformats.org/drawingml/2006/main">
-            <a:pPr algn="l">
-              <a:defRPr sz="1350" b="1">
-                <a:solidFill>
-                  <a:srgbClr val="356A96"/>
-                </a:solidFill>
-                <a:latin typeface="Arial"/>
-                <a:ea typeface="Arial"/>
-                <a:cs typeface="Arial"/>
-              </a:defRPr>
-            </a:pPr>
-            <a:r>
-              <a:rPr sz="1350" b="1">
-                <a:solidFill>
-                  <a:srgbClr val="356A96"/>
-                </a:solidFill>
-                <a:latin typeface="Arial"/>
-                <a:ea typeface="Arial"/>
-                <a:cs typeface="Arial"/>
-              </a:rPr>
-              <a:t>Prueba</a:t>
-            </a:r>
-          </a:p>
-        </p:txBody>
-      </p:sp>
-      <p:sp>
-        <p:nvSpPr>
-          <p:cNvPr id="9" name="">
-            <a:extLst xmlns:a="http://schemas.openxmlformats.org/drawingml/2006/main">
-              <a:ext uri="{FF2B5EF4-FFF2-40B4-BE49-F238E27FC236}">
-                <a16:creationId xmlns:a16="http://schemas.microsoft.com/office/drawing/2014/main" id="{405757CE-98E0-48F7-A04D-046923A385F0}"/>
-              </a:ext>
-            </a:extLst>
-          </p:cNvPr>
-          <p:cNvSpPr>
-            <a:spLocks xmlns:a="http://schemas.openxmlformats.org/drawingml/2006/main" noGrp="1"/>
-          </p:cNvSpPr>
-          <p:nvPr/>
-        </p:nvSpPr>
-        <p:spPr>
-          <a:xfrm xmlns:a="http://schemas.openxmlformats.org/drawingml/2006/main">
-            <a:off x="8905875" y="3238500"/>
-            <a:ext cx="2619375" cy="571500"/>
-          </a:xfrm>
-          <a:prstGeom xmlns:a="http://schemas.openxmlformats.org/drawingml/2006/main" prst="rect">
-            <a:avLst/>
-          </a:prstGeom>
-          <a:noFill xmlns:a="http://schemas.openxmlformats.org/drawingml/2006/main"/>
-          <a:ln xmlns:a="http://schemas.openxmlformats.org/drawingml/2006/main" w="0">
-            <a:noFill/>
-          </a:ln>
-        </p:spPr>
-        <p:txBody>
-          <a:bodyPr xmlns:a="http://schemas.openxmlformats.org/drawingml/2006/main">
-            <a:noAutofit/>
-          </a:bodyPr>
-          <a:lstStyle xmlns:a="http://schemas.openxmlformats.org/drawingml/2006/main"/>
-          <a:p xmlns:a="http://schemas.openxmlformats.org/drawingml/2006/main">
-            <a:pPr algn="l">
-              <a:defRPr sz="2025" b="1">
-                <a:solidFill>
-                  <a:srgbClr val="17212B"/>
-                </a:solidFill>
-                <a:latin typeface="Arial"/>
-                <a:ea typeface="Arial"/>
-                <a:cs typeface="Arial"/>
-              </a:defRPr>
-            </a:pPr>
-            <a:r>
-              <a:rPr sz="2025" b="1">
-                <a:solidFill>
-                  <a:srgbClr val="17212B"/>
-                </a:solidFill>
-                <a:latin typeface="Arial"/>
-                <a:ea typeface="Arial"/>
-                <a:cs typeface="Arial"/>
-              </a:rPr>
-              <a:t>27,50 % frente a 2,40 %</a:t>
-            </a:r>
-          </a:p>
-        </p:txBody>
-      </p:sp>
-      <p:sp>
-        <p:nvSpPr>
-          <p:cNvPr id="10" name="">
-            <a:extLst xmlns:a="http://schemas.openxmlformats.org/drawingml/2006/main">
-              <a:ext uri="{FF2B5EF4-FFF2-40B4-BE49-F238E27FC236}">
-                <a16:creationId xmlns:a16="http://schemas.microsoft.com/office/drawing/2014/main" id="{31A85856-BA18-40C8-B0A8-5DDA394861B3}"/>
-              </a:ext>
-            </a:extLst>
-          </p:cNvPr>
-          <p:cNvSpPr>
-            <a:spLocks xmlns:a="http://schemas.openxmlformats.org/drawingml/2006/main" noGrp="1"/>
-          </p:cNvSpPr>
-          <p:nvPr/>
-        </p:nvSpPr>
-        <p:spPr>
-          <a:xfrm xmlns:a="http://schemas.openxmlformats.org/drawingml/2006/main">
-            <a:off x="8905875" y="4238625"/>
-            <a:ext cx="2571750" cy="857250"/>
-          </a:xfrm>
-          <a:prstGeom xmlns:a="http://schemas.openxmlformats.org/drawingml/2006/main" prst="rect">
-            <a:avLst/>
-          </a:prstGeom>
-          <a:noFill xmlns:a="http://schemas.openxmlformats.org/drawingml/2006/main"/>
-          <a:ln xmlns:a="http://schemas.openxmlformats.org/drawingml/2006/main" w="0">
-            <a:noFill/>
-          </a:ln>
-        </p:spPr>
-        <p:txBody>
-          <a:bodyPr xmlns:a="http://schemas.openxmlformats.org/drawingml/2006/main">
-            <a:noAutofit/>
-          </a:bodyPr>
-          <a:lstStyle xmlns:a="http://schemas.openxmlformats.org/drawingml/2006/main"/>
-          <a:p xmlns:a="http://schemas.openxmlformats.org/drawingml/2006/main">
-            <a:pPr algn="l">
-              <a:defRPr sz="1425" b="0">
-                <a:solidFill>
-                  <a:srgbClr val="5B6570"/>
-                </a:solidFill>
-                <a:latin typeface="Arial"/>
-                <a:ea typeface="Arial"/>
-                <a:cs typeface="Arial"/>
-              </a:defRPr>
-            </a:pPr>
-            <a:r>
-              <a:rPr sz="1425" b="0">
-                <a:solidFill>
-                  <a:srgbClr val="5B6570"/>
-                </a:solidFill>
-                <a:latin typeface="Arial"/>
-                <a:ea typeface="Arial"/>
-                <a:cs typeface="Arial"/>
-              </a:rPr>
-              <a:t>La estabilidad respalda la asociación descriptiva. Todavía no mide capacidad predictiva.</a:t>
-            </a:r>
-          </a:p>
-        </p:txBody>
-      </p:sp>
-      <p:sp>
-        <p:nvSpPr>
-          <p:cNvPr id="11" name="">
-            <a:extLst xmlns:a="http://schemas.openxmlformats.org/drawingml/2006/main">
-              <a:ext uri="{FF2B5EF4-FFF2-40B4-BE49-F238E27FC236}">
-                <a16:creationId xmlns:a16="http://schemas.microsoft.com/office/drawing/2014/main" id="{A94A37D8-F2C7-4C82-8A71-316DBFCFBD51}"/>
-              </a:ext>
-            </a:extLst>
-          </p:cNvPr>
-          <p:cNvSpPr>
-            <a:spLocks xmlns:a="http://schemas.openxmlformats.org/drawingml/2006/main" noGrp="1"/>
-          </p:cNvSpPr>
-          <p:nvPr/>
-        </p:nvSpPr>
-        <p:spPr>
-          <a:xfrm xmlns:a="http://schemas.openxmlformats.org/drawingml/2006/main">
-            <a:off x="666750" y="5953125"/>
-            <a:ext cx="9334500" cy="238125"/>
-          </a:xfrm>
-          <a:prstGeom xmlns:a="http://schemas.openxmlformats.org/drawingml/2006/main" prst="rect">
-            <a:avLst/>
-          </a:prstGeom>
-          <a:noFill xmlns:a="http://schemas.openxmlformats.org/drawingml/2006/main"/>
-          <a:ln xmlns:a="http://schemas.openxmlformats.org/drawingml/2006/main" w="0">
-            <a:noFill/>
-          </a:ln>
-        </p:spPr>
-        <p:txBody>
-          <a:bodyPr xmlns:a="http://schemas.openxmlformats.org/drawingml/2006/main">
-            <a:noAutofit/>
-          </a:bodyPr>
-          <a:lstStyle xmlns:a="http://schemas.openxmlformats.org/drawingml/2006/main"/>
-          <a:p xmlns:a="http://schemas.openxmlformats.org/drawingml/2006/main">
-            <a:pPr algn="l">
-              <a:defRPr sz="1050" b="0">
-                <a:solidFill>
-                  <a:srgbClr val="5B6570"/>
-                </a:solidFill>
-                <a:latin typeface="Arial"/>
-                <a:ea typeface="Arial"/>
-                <a:cs typeface="Arial"/>
-              </a:defRPr>
-            </a:pPr>
-            <a:r>
-              <a:rPr sz="1050" b="0">
-                <a:solidFill>
-                  <a:srgbClr val="5B6570"/>
-                </a:solidFill>
-                <a:latin typeface="Arial"/>
-                <a:ea typeface="Arial"/>
-                <a:cs typeface="Arial"/>
-              </a:rPr>
-              <a:t>Fuente: elaboración propia con la partición 80/20 de la Fase 2.</a:t>
-            </a:r>
-          </a:p>
-        </p:txBody>
-      </p:sp>
-    </p:spTree>
-    <p:extLst>
-      <p:ext uri="{BB962C8B-B14F-4D97-AF65-F5344CB8AC3E}">
-        <p14:creationId xmlns:p14="http://schemas.microsoft.com/office/powerpoint/2010/main" val="1747120285"/>
       </p:ext>
     </p:extLst>
   </p:cSld>
@@ -6356,7 +11543,7 @@
                 <a:ea typeface="Arial"/>
                 <a:cs typeface="Arial"/>
               </a:rPr>
-              <a:t>8</a:t>
+              <a:t>13</a:t>
             </a:r>
           </a:p>
         </p:txBody>
@@ -6770,6 +11957,826 @@
       </p:ext>
     </p:extLst>
   </p:cSld>
+</p:sld>
+</file>
+
+<file path=ppt/slides/slide9.xml><?xml version="1.0" encoding="utf-8"?>
+<p:sld xmlns:a="http://schemas.openxmlformats.org/drawingml/2006/main" xmlns:p="http://schemas.openxmlformats.org/presentationml/2006/main" xmlns:r="http://schemas.openxmlformats.org/officeDocument/2006/relationships">
+  <p:cSld>
+    <p:bg>
+      <p:bgPr>
+        <a:solidFill>
+          <a:srgbClr val="FFFFFF"/>
+        </a:solidFill>
+        <a:effectLst/>
+      </p:bgPr>
+    </p:bg>
+    <p:spTree>
+      <p:nvGrpSpPr>
+        <p:cNvPr id="1" name=""/>
+        <p:cNvGrpSpPr/>
+        <p:nvPr/>
+      </p:nvGrpSpPr>
+      <p:grpSpPr/>
+      <p:sp>
+        <p:nvSpPr>
+          <p:cNvPr id="2" name="Rectangle 1"/>
+          <p:cNvSpPr/>
+          <p:nvPr/>
+        </p:nvSpPr>
+        <p:spPr>
+          <a:xfrm>
+            <a:off x="0" y="0"/>
+            <a:ext cx="171450" cy="6858000"/>
+          </a:xfrm>
+          <a:prstGeom prst="rect">
+            <a:avLst/>
+          </a:prstGeom>
+          <a:solidFill>
+            <a:srgbClr val="5B8DB8"/>
+          </a:solidFill>
+          <a:ln>
+            <a:noFill/>
+          </a:ln>
+          <a:effectLst/>
+        </p:spPr>
+        <p:style>
+          <a:lnRef idx="1">
+            <a:schemeClr val="accent1"/>
+          </a:lnRef>
+          <a:fillRef idx="3">
+            <a:schemeClr val="accent1"/>
+          </a:fillRef>
+          <a:effectRef idx="2">
+            <a:schemeClr val="accent1"/>
+          </a:effectRef>
+          <a:fontRef idx="minor">
+            <a:schemeClr val="lt1"/>
+          </a:fontRef>
+        </p:style>
+        <p:txBody>
+          <a:bodyPr rtlCol="0" anchor="ctr"/>
+          <a:lstStyle/>
+          <a:p>
+            <a:pPr algn="ctr"/>
+          </a:p>
+        </p:txBody>
+      </p:sp>
+      <p:sp>
+        <p:nvSpPr>
+          <p:cNvPr id="3" name="TextBox 2"/>
+          <p:cNvSpPr txBox="1"/>
+          <p:nvPr/>
+        </p:nvSpPr>
+        <p:spPr>
+          <a:xfrm>
+            <a:off x="552297" y="342900"/>
+            <a:ext cx="10570464" cy="493776"/>
+          </a:xfrm>
+          <a:prstGeom prst="rect">
+            <a:avLst/>
+          </a:prstGeom>
+          <a:noFill/>
+        </p:spPr>
+        <p:txBody>
+          <a:bodyPr wrap="square" lIns="45720" rIns="45720" tIns="27432" bIns="27432" anchor="t">
+            <a:spAutoFit/>
+          </a:bodyPr>
+          <a:lstStyle/>
+          <a:p>
+            <a:pPr algn="l"/>
+            <a:r>
+              <a:rPr sz="2550" b="1" i="0">
+                <a:solidFill>
+                  <a:srgbClr val="17212B"/>
+                </a:solidFill>
+                <a:latin typeface="Arial"/>
+              </a:rPr>
+              <a:t>Decisiones sobre los datos antes de transformar</a:t>
+            </a:r>
+          </a:p>
+        </p:txBody>
+      </p:sp>
+      <p:sp>
+        <p:nvSpPr>
+          <p:cNvPr id="4" name="TextBox 3"/>
+          <p:cNvSpPr txBox="1"/>
+          <p:nvPr/>
+        </p:nvSpPr>
+        <p:spPr>
+          <a:xfrm>
+            <a:off x="571500" y="838504"/>
+            <a:ext cx="10287000" cy="283464"/>
+          </a:xfrm>
+          <a:prstGeom prst="rect">
+            <a:avLst/>
+          </a:prstGeom>
+          <a:noFill/>
+        </p:spPr>
+        <p:txBody>
+          <a:bodyPr wrap="square" lIns="45720" rIns="45720" tIns="27432" bIns="27432" anchor="t">
+            <a:spAutoFit/>
+          </a:bodyPr>
+          <a:lstStyle/>
+          <a:p>
+            <a:pPr algn="l"/>
+            <a:r>
+              <a:rPr sz="1275" b="0" i="0">
+                <a:solidFill>
+                  <a:srgbClr val="5B6570"/>
+                </a:solidFill>
+                <a:latin typeface="Arial"/>
+              </a:rPr>
+              <a:t>Fase 2 · Cada decisión responde a lo que mostró el diagnóstico del conjunto.</a:t>
+            </a:r>
+          </a:p>
+        </p:txBody>
+      </p:sp>
+      <p:sp>
+        <p:nvSpPr>
+          <p:cNvPr id="5" name="Rounded Rectangle 4"/>
+          <p:cNvSpPr/>
+          <p:nvPr/>
+        </p:nvSpPr>
+        <p:spPr>
+          <a:xfrm>
+            <a:off x="621792" y="1463040"/>
+            <a:ext cx="3520440" cy="1874519"/>
+          </a:xfrm>
+          <a:prstGeom prst="roundRect">
+            <a:avLst>
+              <a:gd name="adj" fmla="val 8000"/>
+            </a:avLst>
+          </a:prstGeom>
+          <a:solidFill>
+            <a:srgbClr val="F5F7F8"/>
+          </a:solidFill>
+          <a:ln w="9525">
+            <a:solidFill>
+              <a:srgbClr val="D7DCE1"/>
+            </a:solidFill>
+          </a:ln>
+          <a:effectLst/>
+        </p:spPr>
+        <p:style>
+          <a:lnRef idx="1">
+            <a:schemeClr val="accent1"/>
+          </a:lnRef>
+          <a:fillRef idx="3">
+            <a:schemeClr val="accent1"/>
+          </a:fillRef>
+          <a:effectRef idx="2">
+            <a:schemeClr val="accent1"/>
+          </a:effectRef>
+          <a:fontRef idx="minor">
+            <a:schemeClr val="lt1"/>
+          </a:fontRef>
+        </p:style>
+        <p:txBody>
+          <a:bodyPr rtlCol="0" anchor="ctr"/>
+          <a:lstStyle/>
+          <a:p>
+            <a:pPr algn="ctr"/>
+          </a:p>
+        </p:txBody>
+      </p:sp>
+      <p:sp>
+        <p:nvSpPr>
+          <p:cNvPr id="6" name="TextBox 5"/>
+          <p:cNvSpPr txBox="1"/>
+          <p:nvPr/>
+        </p:nvSpPr>
+        <p:spPr>
+          <a:xfrm>
+            <a:off x="822960" y="1645920"/>
+            <a:ext cx="3118104" cy="365760"/>
+          </a:xfrm>
+          <a:prstGeom prst="rect">
+            <a:avLst/>
+          </a:prstGeom>
+          <a:noFill/>
+        </p:spPr>
+        <p:txBody>
+          <a:bodyPr wrap="square" lIns="45720" rIns="45720" tIns="27432" bIns="27432" anchor="t">
+            <a:spAutoFit/>
+          </a:bodyPr>
+          <a:lstStyle/>
+          <a:p>
+            <a:pPr algn="l"/>
+            <a:r>
+              <a:rPr sz="1650" b="1" i="0">
+                <a:solidFill>
+                  <a:srgbClr val="356A96"/>
+                </a:solidFill>
+                <a:latin typeface="Arial"/>
+              </a:rPr>
+              <a:t>No imputar ni eliminar filas</a:t>
+            </a:r>
+          </a:p>
+        </p:txBody>
+      </p:sp>
+      <p:sp>
+        <p:nvSpPr>
+          <p:cNvPr id="7" name="TextBox 6"/>
+          <p:cNvSpPr txBox="1"/>
+          <p:nvPr/>
+        </p:nvSpPr>
+        <p:spPr>
+          <a:xfrm>
+            <a:off x="822960" y="2103120"/>
+            <a:ext cx="3118104" cy="1143000"/>
+          </a:xfrm>
+          <a:prstGeom prst="rect">
+            <a:avLst/>
+          </a:prstGeom>
+          <a:noFill/>
+        </p:spPr>
+        <p:txBody>
+          <a:bodyPr wrap="square" lIns="45720" rIns="45720" tIns="27432" bIns="27432" anchor="t">
+            <a:spAutoFit/>
+          </a:bodyPr>
+          <a:lstStyle/>
+          <a:p>
+            <a:pPr algn="l"/>
+            <a:r>
+              <a:rPr sz="1400" b="0" i="0">
+                <a:solidFill>
+                  <a:srgbClr val="17212B"/>
+                </a:solidFill>
+                <a:latin typeface="Arial"/>
+              </a:rPr>
+              <a:t>Hubo 0 valores faltantes y 0 duplicados. Inventar errores habría alterado datos que estaban completos.</a:t>
+            </a:r>
+          </a:p>
+        </p:txBody>
+      </p:sp>
+      <p:sp>
+        <p:nvSpPr>
+          <p:cNvPr id="8" name="Rounded Rectangle 7"/>
+          <p:cNvSpPr/>
+          <p:nvPr/>
+        </p:nvSpPr>
+        <p:spPr>
+          <a:xfrm>
+            <a:off x="4416552" y="1463040"/>
+            <a:ext cx="3520440" cy="1874519"/>
+          </a:xfrm>
+          <a:prstGeom prst="roundRect">
+            <a:avLst>
+              <a:gd name="adj" fmla="val 8000"/>
+            </a:avLst>
+          </a:prstGeom>
+          <a:solidFill>
+            <a:srgbClr val="F5F7F8"/>
+          </a:solidFill>
+          <a:ln w="9525">
+            <a:solidFill>
+              <a:srgbClr val="D7DCE1"/>
+            </a:solidFill>
+          </a:ln>
+          <a:effectLst/>
+        </p:spPr>
+        <p:style>
+          <a:lnRef idx="1">
+            <a:schemeClr val="accent1"/>
+          </a:lnRef>
+          <a:fillRef idx="3">
+            <a:schemeClr val="accent1"/>
+          </a:fillRef>
+          <a:effectRef idx="2">
+            <a:schemeClr val="accent1"/>
+          </a:effectRef>
+          <a:fontRef idx="minor">
+            <a:schemeClr val="lt1"/>
+          </a:fontRef>
+        </p:style>
+        <p:txBody>
+          <a:bodyPr rtlCol="0" anchor="ctr"/>
+          <a:lstStyle/>
+          <a:p>
+            <a:pPr algn="ctr"/>
+          </a:p>
+        </p:txBody>
+      </p:sp>
+      <p:sp>
+        <p:nvSpPr>
+          <p:cNvPr id="9" name="TextBox 8"/>
+          <p:cNvSpPr txBox="1"/>
+          <p:nvPr/>
+        </p:nvSpPr>
+        <p:spPr>
+          <a:xfrm>
+            <a:off x="4617720" y="1645920"/>
+            <a:ext cx="3118104" cy="365760"/>
+          </a:xfrm>
+          <a:prstGeom prst="rect">
+            <a:avLst/>
+          </a:prstGeom>
+          <a:noFill/>
+        </p:spPr>
+        <p:txBody>
+          <a:bodyPr wrap="square" lIns="45720" rIns="45720" tIns="27432" bIns="27432" anchor="t">
+            <a:spAutoFit/>
+          </a:bodyPr>
+          <a:lstStyle/>
+          <a:p>
+            <a:pPr algn="l"/>
+            <a:r>
+              <a:rPr sz="1650" b="1" i="0">
+                <a:solidFill>
+                  <a:srgbClr val="356A96"/>
+                </a:solidFill>
+                <a:latin typeface="Arial"/>
+              </a:rPr>
+              <a:t>Excluir identificadores</a:t>
+            </a:r>
+          </a:p>
+        </p:txBody>
+      </p:sp>
+      <p:sp>
+        <p:nvSpPr>
+          <p:cNvPr id="10" name="TextBox 9"/>
+          <p:cNvSpPr txBox="1"/>
+          <p:nvPr/>
+        </p:nvSpPr>
+        <p:spPr>
+          <a:xfrm>
+            <a:off x="4617720" y="2103120"/>
+            <a:ext cx="3118104" cy="1143000"/>
+          </a:xfrm>
+          <a:prstGeom prst="rect">
+            <a:avLst/>
+          </a:prstGeom>
+          <a:noFill/>
+        </p:spPr>
+        <p:txBody>
+          <a:bodyPr wrap="square" lIns="45720" rIns="45720" tIns="27432" bIns="27432" anchor="t">
+            <a:spAutoFit/>
+          </a:bodyPr>
+          <a:lstStyle/>
+          <a:p>
+            <a:pPr algn="l"/>
+            <a:r>
+              <a:rPr sz="1400" b="0" i="0">
+                <a:solidFill>
+                  <a:srgbClr val="17212B"/>
+                </a:solidFill>
+                <a:latin typeface="Arial"/>
+              </a:rPr>
+              <a:t>UDI y Product ID solo numeran el registro. No describen cómo opera la máquina.</a:t>
+            </a:r>
+          </a:p>
+        </p:txBody>
+      </p:sp>
+      <p:sp>
+        <p:nvSpPr>
+          <p:cNvPr id="11" name="Rounded Rectangle 10"/>
+          <p:cNvSpPr/>
+          <p:nvPr/>
+        </p:nvSpPr>
+        <p:spPr>
+          <a:xfrm>
+            <a:off x="621792" y="3611879"/>
+            <a:ext cx="3520440" cy="1874519"/>
+          </a:xfrm>
+          <a:prstGeom prst="roundRect">
+            <a:avLst>
+              <a:gd name="adj" fmla="val 8000"/>
+            </a:avLst>
+          </a:prstGeom>
+          <a:solidFill>
+            <a:srgbClr val="F5F7F8"/>
+          </a:solidFill>
+          <a:ln w="9525">
+            <a:solidFill>
+              <a:srgbClr val="D7DCE1"/>
+            </a:solidFill>
+          </a:ln>
+          <a:effectLst/>
+        </p:spPr>
+        <p:style>
+          <a:lnRef idx="1">
+            <a:schemeClr val="accent1"/>
+          </a:lnRef>
+          <a:fillRef idx="3">
+            <a:schemeClr val="accent1"/>
+          </a:fillRef>
+          <a:effectRef idx="2">
+            <a:schemeClr val="accent1"/>
+          </a:effectRef>
+          <a:fontRef idx="minor">
+            <a:schemeClr val="lt1"/>
+          </a:fontRef>
+        </p:style>
+        <p:txBody>
+          <a:bodyPr rtlCol="0" anchor="ctr"/>
+          <a:lstStyle/>
+          <a:p>
+            <a:pPr algn="ctr"/>
+          </a:p>
+        </p:txBody>
+      </p:sp>
+      <p:sp>
+        <p:nvSpPr>
+          <p:cNvPr id="12" name="TextBox 11"/>
+          <p:cNvSpPr txBox="1"/>
+          <p:nvPr/>
+        </p:nvSpPr>
+        <p:spPr>
+          <a:xfrm>
+            <a:off x="822960" y="3794759"/>
+            <a:ext cx="3118104" cy="365760"/>
+          </a:xfrm>
+          <a:prstGeom prst="rect">
+            <a:avLst/>
+          </a:prstGeom>
+          <a:noFill/>
+        </p:spPr>
+        <p:txBody>
+          <a:bodyPr wrap="square" lIns="45720" rIns="45720" tIns="27432" bIns="27432" anchor="t">
+            <a:spAutoFit/>
+          </a:bodyPr>
+          <a:lstStyle/>
+          <a:p>
+            <a:pPr algn="l"/>
+            <a:r>
+              <a:rPr sz="1650" b="1" i="0">
+                <a:solidFill>
+                  <a:srgbClr val="C94C4C"/>
+                </a:solidFill>
+                <a:latin typeface="Arial"/>
+              </a:rPr>
+              <a:t>Excluir modos de falla</a:t>
+            </a:r>
+          </a:p>
+        </p:txBody>
+      </p:sp>
+      <p:sp>
+        <p:nvSpPr>
+          <p:cNvPr id="13" name="TextBox 12"/>
+          <p:cNvSpPr txBox="1"/>
+          <p:nvPr/>
+        </p:nvSpPr>
+        <p:spPr>
+          <a:xfrm>
+            <a:off x="822960" y="4251959"/>
+            <a:ext cx="3118104" cy="1143000"/>
+          </a:xfrm>
+          <a:prstGeom prst="rect">
+            <a:avLst/>
+          </a:prstGeom>
+          <a:noFill/>
+        </p:spPr>
+        <p:txBody>
+          <a:bodyPr wrap="square" lIns="45720" rIns="45720" tIns="27432" bIns="27432" anchor="t">
+            <a:spAutoFit/>
+          </a:bodyPr>
+          <a:lstStyle/>
+          <a:p>
+            <a:pPr algn="l"/>
+            <a:r>
+              <a:rPr sz="1400" b="0" i="0">
+                <a:solidFill>
+                  <a:srgbClr val="17212B"/>
+                </a:solidFill>
+                <a:latin typeface="Arial"/>
+              </a:rPr>
+              <a:t>TWF, HDF, PWF, OSF y RNF ya indican qué falló. Usarlos sería fuga de información: la respuesta entraría como dato.</a:t>
+            </a:r>
+          </a:p>
+        </p:txBody>
+      </p:sp>
+      <p:sp>
+        <p:nvSpPr>
+          <p:cNvPr id="14" name="Rounded Rectangle 13"/>
+          <p:cNvSpPr/>
+          <p:nvPr/>
+        </p:nvSpPr>
+        <p:spPr>
+          <a:xfrm>
+            <a:off x="4416552" y="3611879"/>
+            <a:ext cx="3520440" cy="1874519"/>
+          </a:xfrm>
+          <a:prstGeom prst="roundRect">
+            <a:avLst>
+              <a:gd name="adj" fmla="val 8000"/>
+            </a:avLst>
+          </a:prstGeom>
+          <a:solidFill>
+            <a:srgbClr val="F5F7F8"/>
+          </a:solidFill>
+          <a:ln w="9525">
+            <a:solidFill>
+              <a:srgbClr val="D7DCE1"/>
+            </a:solidFill>
+          </a:ln>
+          <a:effectLst/>
+        </p:spPr>
+        <p:style>
+          <a:lnRef idx="1">
+            <a:schemeClr val="accent1"/>
+          </a:lnRef>
+          <a:fillRef idx="3">
+            <a:schemeClr val="accent1"/>
+          </a:fillRef>
+          <a:effectRef idx="2">
+            <a:schemeClr val="accent1"/>
+          </a:effectRef>
+          <a:fontRef idx="minor">
+            <a:schemeClr val="lt1"/>
+          </a:fontRef>
+        </p:style>
+        <p:txBody>
+          <a:bodyPr rtlCol="0" anchor="ctr"/>
+          <a:lstStyle/>
+          <a:p>
+            <a:pPr algn="ctr"/>
+          </a:p>
+        </p:txBody>
+      </p:sp>
+      <p:sp>
+        <p:nvSpPr>
+          <p:cNvPr id="15" name="TextBox 14"/>
+          <p:cNvSpPr txBox="1"/>
+          <p:nvPr/>
+        </p:nvSpPr>
+        <p:spPr>
+          <a:xfrm>
+            <a:off x="4617720" y="3794759"/>
+            <a:ext cx="3118104" cy="365760"/>
+          </a:xfrm>
+          <a:prstGeom prst="rect">
+            <a:avLst/>
+          </a:prstGeom>
+          <a:noFill/>
+        </p:spPr>
+        <p:txBody>
+          <a:bodyPr wrap="square" lIns="45720" rIns="45720" tIns="27432" bIns="27432" anchor="t">
+            <a:spAutoFit/>
+          </a:bodyPr>
+          <a:lstStyle/>
+          <a:p>
+            <a:pPr algn="l"/>
+            <a:r>
+              <a:rPr sz="1650" b="1" i="0">
+                <a:solidFill>
+                  <a:srgbClr val="356A96"/>
+                </a:solidFill>
+                <a:latin typeface="Arial"/>
+              </a:rPr>
+              <a:t>Conservar valores extremos</a:t>
+            </a:r>
+          </a:p>
+        </p:txBody>
+      </p:sp>
+      <p:sp>
+        <p:nvSpPr>
+          <p:cNvPr id="16" name="TextBox 15"/>
+          <p:cNvSpPr txBox="1"/>
+          <p:nvPr/>
+        </p:nvSpPr>
+        <p:spPr>
+          <a:xfrm>
+            <a:off x="4617720" y="4251959"/>
+            <a:ext cx="3118104" cy="1143000"/>
+          </a:xfrm>
+          <a:prstGeom prst="rect">
+            <a:avLst/>
+          </a:prstGeom>
+          <a:noFill/>
+        </p:spPr>
+        <p:txBody>
+          <a:bodyPr wrap="square" lIns="45720" rIns="45720" tIns="27432" bIns="27432" anchor="t">
+            <a:spAutoFit/>
+          </a:bodyPr>
+          <a:lstStyle/>
+          <a:p>
+            <a:pPr algn="l"/>
+            <a:r>
+              <a:rPr sz="1400" b="0" i="0">
+                <a:solidFill>
+                  <a:srgbClr val="17212B"/>
+                </a:solidFill>
+                <a:latin typeface="Arial"/>
+              </a:rPr>
+              <a:t>Las velocidades y torques extremos pueden estar ligados a la falla. Se mantuvieron en el análisis.</a:t>
+            </a:r>
+          </a:p>
+        </p:txBody>
+      </p:sp>
+      <p:sp>
+        <p:nvSpPr>
+          <p:cNvPr id="17" name="Rounded Rectangle 16"/>
+          <p:cNvSpPr/>
+          <p:nvPr/>
+        </p:nvSpPr>
+        <p:spPr>
+          <a:xfrm>
+            <a:off x="8348472" y="1463040"/>
+            <a:ext cx="3218687" cy="4023360"/>
+          </a:xfrm>
+          <a:prstGeom prst="roundRect">
+            <a:avLst>
+              <a:gd name="adj" fmla="val 8000"/>
+            </a:avLst>
+          </a:prstGeom>
+          <a:solidFill>
+            <a:srgbClr val="F9EAEA"/>
+          </a:solidFill>
+          <a:ln w="9525">
+            <a:solidFill>
+              <a:srgbClr val="C94C4C"/>
+            </a:solidFill>
+          </a:ln>
+          <a:effectLst/>
+        </p:spPr>
+        <p:style>
+          <a:lnRef idx="1">
+            <a:schemeClr val="accent1"/>
+          </a:lnRef>
+          <a:fillRef idx="3">
+            <a:schemeClr val="accent1"/>
+          </a:fillRef>
+          <a:effectRef idx="2">
+            <a:schemeClr val="accent1"/>
+          </a:effectRef>
+          <a:fontRef idx="minor">
+            <a:schemeClr val="lt1"/>
+          </a:fontRef>
+        </p:style>
+        <p:txBody>
+          <a:bodyPr rtlCol="0" anchor="ctr"/>
+          <a:lstStyle/>
+          <a:p>
+            <a:pPr algn="ctr"/>
+          </a:p>
+        </p:txBody>
+      </p:sp>
+      <p:sp>
+        <p:nvSpPr>
+          <p:cNvPr id="18" name="TextBox 17"/>
+          <p:cNvSpPr txBox="1"/>
+          <p:nvPr/>
+        </p:nvSpPr>
+        <p:spPr>
+          <a:xfrm>
+            <a:off x="8577072" y="1691640"/>
+            <a:ext cx="2761487" cy="320040"/>
+          </a:xfrm>
+          <a:prstGeom prst="rect">
+            <a:avLst/>
+          </a:prstGeom>
+          <a:noFill/>
+        </p:spPr>
+        <p:txBody>
+          <a:bodyPr wrap="square" lIns="45720" rIns="45720" tIns="27432" bIns="27432" anchor="t">
+            <a:spAutoFit/>
+          </a:bodyPr>
+          <a:lstStyle/>
+          <a:p>
+            <a:pPr algn="l"/>
+            <a:r>
+              <a:rPr sz="1425" b="1" i="0">
+                <a:solidFill>
+                  <a:srgbClr val="C94C4C"/>
+                </a:solidFill>
+                <a:latin typeface="Arial"/>
+              </a:rPr>
+              <a:t>Clase desbalanceada</a:t>
+            </a:r>
+          </a:p>
+        </p:txBody>
+      </p:sp>
+      <p:sp>
+        <p:nvSpPr>
+          <p:cNvPr id="19" name="TextBox 18"/>
+          <p:cNvSpPr txBox="1"/>
+          <p:nvPr/>
+        </p:nvSpPr>
+        <p:spPr>
+          <a:xfrm>
+            <a:off x="8577072" y="2103120"/>
+            <a:ext cx="2761487" cy="731520"/>
+          </a:xfrm>
+          <a:prstGeom prst="rect">
+            <a:avLst/>
+          </a:prstGeom>
+          <a:noFill/>
+        </p:spPr>
+        <p:txBody>
+          <a:bodyPr wrap="square" lIns="45720" rIns="45720" tIns="27432" bIns="27432" anchor="t">
+            <a:spAutoFit/>
+          </a:bodyPr>
+          <a:lstStyle/>
+          <a:p>
+            <a:pPr algn="l"/>
+            <a:r>
+              <a:rPr sz="3600" b="1" i="0">
+                <a:solidFill>
+                  <a:srgbClr val="C94C4C"/>
+                </a:solidFill>
+                <a:latin typeface="Arial"/>
+              </a:rPr>
+              <a:t>96,61 %</a:t>
+            </a:r>
+          </a:p>
+        </p:txBody>
+      </p:sp>
+      <p:sp>
+        <p:nvSpPr>
+          <p:cNvPr id="20" name="TextBox 19"/>
+          <p:cNvSpPr txBox="1"/>
+          <p:nvPr/>
+        </p:nvSpPr>
+        <p:spPr>
+          <a:xfrm>
+            <a:off x="8577072" y="2880360"/>
+            <a:ext cx="2761487" cy="2468880"/>
+          </a:xfrm>
+          <a:prstGeom prst="rect">
+            <a:avLst/>
+          </a:prstGeom>
+          <a:noFill/>
+        </p:spPr>
+        <p:txBody>
+          <a:bodyPr wrap="square" lIns="45720" rIns="45720" tIns="27432" bIns="27432" anchor="t">
+            <a:spAutoFit/>
+          </a:bodyPr>
+          <a:lstStyle/>
+          <a:p>
+            <a:pPr algn="l">
+              <a:spcAft>
+                <a:spcPts val="800"/>
+              </a:spcAft>
+            </a:pPr>
+            <a:r>
+              <a:rPr sz="1400" b="0" i="0">
+                <a:solidFill>
+                  <a:srgbClr val="17212B"/>
+                </a:solidFill>
+                <a:latin typeface="Arial"/>
+              </a:rPr>
+              <a:t>Es lo que acertaría quien dijera siempre «sin falla», sin detectar ninguna.</a:t>
+            </a:r>
+          </a:p>
+          <a:p>
+            <a:pPr algn="l">
+              <a:spcAft>
+                <a:spcPts val="800"/>
+              </a:spcAft>
+            </a:pPr>
+            <a:r>
+              <a:rPr sz="1400" b="0" i="0">
+                <a:solidFill>
+                  <a:srgbClr val="17212B"/>
+                </a:solidFill>
+                <a:latin typeface="Arial"/>
+              </a:rPr>
+              <a:t>Por eso la exactitud no sirve como medida en este problema.</a:t>
+            </a:r>
+          </a:p>
+        </p:txBody>
+      </p:sp>
+      <p:sp>
+        <p:nvSpPr>
+          <p:cNvPr id="21" name="TextBox 20"/>
+          <p:cNvSpPr txBox="1"/>
+          <p:nvPr/>
+        </p:nvSpPr>
+        <p:spPr>
+          <a:xfrm>
+            <a:off x="11334902" y="6305702"/>
+            <a:ext cx="400050" cy="228600"/>
+          </a:xfrm>
+          <a:prstGeom prst="rect">
+            <a:avLst/>
+          </a:prstGeom>
+          <a:noFill/>
+        </p:spPr>
+        <p:txBody>
+          <a:bodyPr wrap="square" lIns="45720" rIns="45720" tIns="27432" bIns="27432" anchor="t">
+            <a:spAutoFit/>
+          </a:bodyPr>
+          <a:lstStyle/>
+          <a:p>
+            <a:pPr algn="r"/>
+            <a:r>
+              <a:rPr sz="1050" b="0" i="0">
+                <a:solidFill>
+                  <a:srgbClr val="5B6570"/>
+                </a:solidFill>
+                <a:latin typeface="Arial"/>
+              </a:rPr>
+              <a:t>4</a:t>
+            </a:r>
+          </a:p>
+        </p:txBody>
+      </p:sp>
+    </p:spTree>
+  </p:cSld>
+  <p:clrMapOvr>
+    <a:masterClrMapping/>
+  </p:clrMapOvr>
 </p:sld>
 </file>
 
